--- a/1.5 Switching Basic/1.5 Switching Basic.pptx
+++ b/1.5 Switching Basic/1.5 Switching Basic.pptx
@@ -14,6 +14,10 @@
     <p:sldId id="262" r:id="rId8"/>
     <p:sldId id="263" r:id="rId9"/>
     <p:sldId id="264" r:id="rId10"/>
+    <p:sldId id="265" r:id="rId11"/>
+    <p:sldId id="266" r:id="rId12"/>
+    <p:sldId id="267" r:id="rId13"/>
+    <p:sldId id="268" r:id="rId14"/>
   </p:sldIdLst>
   <p:sldSz cx="12192000" cy="6858000"/>
   <p:notesSz cx="6858000" cy="9144000"/>
@@ -112,6 +116,11 @@
       </a:defRPr>
     </a:lvl9pPr>
   </p:defaultTextStyle>
+  <p:extLst>
+    <p:ext uri="{EFAFB233-063F-42B5-8137-9DF3F51BA10A}">
+      <p15:sldGuideLst xmlns:p15="http://schemas.microsoft.com/office/powerpoint/2012/main"/>
+    </p:ext>
+  </p:extLst>
 </p:presentation>
 </file>
 
@@ -172,7 +181,7 @@
           <a:noFill/>
           <a:extLst>
             <a:ext uri="{909E8E84-426E-40dd-AFC4-6F175D3DCCD1}">
-              <a14:hiddenFill xmlns:a14="http://schemas.microsoft.com/office/drawing/2010/main" xmlns="">
+              <a14:hiddenFill xmlns="" xmlns:a14="http://schemas.microsoft.com/office/drawing/2010/main">
                 <a:solidFill>
                   <a:srgbClr val="FFFFFF"/>
                 </a:solidFill>
@@ -231,7 +240,7 @@
             </a:ln>
             <a:extLst>
               <a:ext uri="{91240B29-F687-4f45-9708-019B960494DF}">
-                <a14:hiddenLine xmlns:a14="http://schemas.microsoft.com/office/drawing/2010/main" xmlns="" w="9525">
+                <a14:hiddenLine xmlns="" xmlns:a14="http://schemas.microsoft.com/office/drawing/2010/main" w="9525">
                   <a:solidFill>
                     <a:srgbClr val="000000"/>
                   </a:solidFill>
@@ -321,7 +330,7 @@
             </a:ln>
             <a:extLst>
               <a:ext uri="{91240B29-F687-4f45-9708-019B960494DF}">
-                <a14:hiddenLine xmlns:a14="http://schemas.microsoft.com/office/drawing/2010/main" xmlns="" w="9525">
+                <a14:hiddenLine xmlns="" xmlns:a14="http://schemas.microsoft.com/office/drawing/2010/main" w="9525">
                   <a:solidFill>
                     <a:srgbClr val="000000"/>
                   </a:solidFill>
@@ -411,7 +420,7 @@
             </a:ln>
             <a:extLst>
               <a:ext uri="{91240B29-F687-4f45-9708-019B960494DF}">
-                <a14:hiddenLine xmlns:a14="http://schemas.microsoft.com/office/drawing/2010/main" xmlns="" w="9525">
+                <a14:hiddenLine xmlns="" xmlns:a14="http://schemas.microsoft.com/office/drawing/2010/main" w="9525">
                   <a:solidFill>
                     <a:srgbClr val="000000"/>
                   </a:solidFill>
@@ -445,7 +454,7 @@
             </a:ln>
             <a:extLst>
               <a:ext uri="{91240B29-F687-4f45-9708-019B960494DF}">
-                <a14:hiddenLine xmlns:a14="http://schemas.microsoft.com/office/drawing/2010/main" xmlns="" w="9525">
+                <a14:hiddenLine xmlns="" xmlns:a14="http://schemas.microsoft.com/office/drawing/2010/main" w="9525">
                   <a:solidFill>
                     <a:srgbClr val="000000"/>
                   </a:solidFill>
@@ -535,7 +544,7 @@
             </a:ln>
             <a:extLst>
               <a:ext uri="{91240B29-F687-4f45-9708-019B960494DF}">
-                <a14:hiddenLine xmlns:a14="http://schemas.microsoft.com/office/drawing/2010/main" xmlns="" w="9525">
+                <a14:hiddenLine xmlns="" xmlns:a14="http://schemas.microsoft.com/office/drawing/2010/main" w="9525">
                   <a:solidFill>
                     <a:srgbClr val="000000"/>
                   </a:solidFill>
@@ -597,7 +606,7 @@
             </a:ln>
             <a:extLst>
               <a:ext uri="{91240B29-F687-4f45-9708-019B960494DF}">
-                <a14:hiddenLine xmlns:a14="http://schemas.microsoft.com/office/drawing/2010/main" xmlns="" w="9525">
+                <a14:hiddenLine xmlns="" xmlns:a14="http://schemas.microsoft.com/office/drawing/2010/main" w="9525">
                   <a:solidFill>
                     <a:srgbClr val="000000"/>
                   </a:solidFill>
@@ -659,7 +668,7 @@
             </a:ln>
             <a:extLst>
               <a:ext uri="{91240B29-F687-4f45-9708-019B960494DF}">
-                <a14:hiddenLine xmlns:a14="http://schemas.microsoft.com/office/drawing/2010/main" xmlns="" w="9525">
+                <a14:hiddenLine xmlns="" xmlns:a14="http://schemas.microsoft.com/office/drawing/2010/main" w="9525">
                   <a:solidFill>
                     <a:srgbClr val="000000"/>
                   </a:solidFill>
@@ -749,7 +758,7 @@
             </a:ln>
             <a:extLst>
               <a:ext uri="{91240B29-F687-4f45-9708-019B960494DF}">
-                <a14:hiddenLine xmlns:a14="http://schemas.microsoft.com/office/drawing/2010/main" xmlns="" w="9525">
+                <a14:hiddenLine xmlns="" xmlns:a14="http://schemas.microsoft.com/office/drawing/2010/main" w="9525">
                   <a:solidFill>
                     <a:srgbClr val="000000"/>
                   </a:solidFill>
@@ -811,7 +820,7 @@
             </a:ln>
             <a:extLst>
               <a:ext uri="{91240B29-F687-4f45-9708-019B960494DF}">
-                <a14:hiddenLine xmlns:a14="http://schemas.microsoft.com/office/drawing/2010/main" xmlns="" w="9525">
+                <a14:hiddenLine xmlns="" xmlns:a14="http://schemas.microsoft.com/office/drawing/2010/main" w="9525">
                   <a:solidFill>
                     <a:srgbClr val="000000"/>
                   </a:solidFill>
@@ -873,7 +882,7 @@
             </a:ln>
             <a:extLst>
               <a:ext uri="{91240B29-F687-4f45-9708-019B960494DF}">
-                <a14:hiddenLine xmlns:a14="http://schemas.microsoft.com/office/drawing/2010/main" xmlns="" w="9525">
+                <a14:hiddenLine xmlns="" xmlns:a14="http://schemas.microsoft.com/office/drawing/2010/main" w="9525">
                   <a:solidFill>
                     <a:srgbClr val="000000"/>
                   </a:solidFill>
@@ -963,7 +972,7 @@
             </a:ln>
             <a:extLst>
               <a:ext uri="{91240B29-F687-4f45-9708-019B960494DF}">
-                <a14:hiddenLine xmlns:a14="http://schemas.microsoft.com/office/drawing/2010/main" xmlns="" w="9525">
+                <a14:hiddenLine xmlns="" xmlns:a14="http://schemas.microsoft.com/office/drawing/2010/main" w="9525">
                   <a:solidFill>
                     <a:srgbClr val="000000"/>
                   </a:solidFill>
@@ -1053,7 +1062,7 @@
             </a:ln>
             <a:extLst>
               <a:ext uri="{91240B29-F687-4f45-9708-019B960494DF}">
-                <a14:hiddenLine xmlns:a14="http://schemas.microsoft.com/office/drawing/2010/main" xmlns="" w="9525">
+                <a14:hiddenLine xmlns="" xmlns:a14="http://schemas.microsoft.com/office/drawing/2010/main" w="9525">
                   <a:solidFill>
                     <a:srgbClr val="000000"/>
                   </a:solidFill>
@@ -1115,7 +1124,7 @@
             </a:ln>
             <a:extLst>
               <a:ext uri="{91240B29-F687-4f45-9708-019B960494DF}">
-                <a14:hiddenLine xmlns:a14="http://schemas.microsoft.com/office/drawing/2010/main" xmlns="" w="9525">
+                <a14:hiddenLine xmlns="" xmlns:a14="http://schemas.microsoft.com/office/drawing/2010/main" w="9525">
                   <a:solidFill>
                     <a:srgbClr val="000000"/>
                   </a:solidFill>
@@ -1225,7 +1234,7 @@
             </a:ln>
             <a:extLst>
               <a:ext uri="{91240B29-F687-4f45-9708-019B960494DF}">
-                <a14:hiddenLine xmlns:a14="http://schemas.microsoft.com/office/drawing/2010/main" xmlns="" w="9525">
+                <a14:hiddenLine xmlns="" xmlns:a14="http://schemas.microsoft.com/office/drawing/2010/main" w="9525">
                   <a:solidFill>
                     <a:srgbClr val="000000"/>
                   </a:solidFill>
@@ -1287,7 +1296,7 @@
             </a:ln>
             <a:extLst>
               <a:ext uri="{91240B29-F687-4f45-9708-019B960494DF}">
-                <a14:hiddenLine xmlns:a14="http://schemas.microsoft.com/office/drawing/2010/main" xmlns="" w="9525">
+                <a14:hiddenLine xmlns="" xmlns:a14="http://schemas.microsoft.com/office/drawing/2010/main" w="9525">
                   <a:solidFill>
                     <a:srgbClr val="000000"/>
                   </a:solidFill>
@@ -1377,7 +1386,7 @@
             </a:ln>
             <a:extLst>
               <a:ext uri="{91240B29-F687-4f45-9708-019B960494DF}">
-                <a14:hiddenLine xmlns:a14="http://schemas.microsoft.com/office/drawing/2010/main" xmlns="" w="9525">
+                <a14:hiddenLine xmlns="" xmlns:a14="http://schemas.microsoft.com/office/drawing/2010/main" w="9525">
                   <a:solidFill>
                     <a:srgbClr val="000000"/>
                   </a:solidFill>
@@ -1467,7 +1476,7 @@
             </a:ln>
             <a:extLst>
               <a:ext uri="{91240B29-F687-4f45-9708-019B960494DF}">
-                <a14:hiddenLine xmlns:a14="http://schemas.microsoft.com/office/drawing/2010/main" xmlns="" w="9525">
+                <a14:hiddenLine xmlns="" xmlns:a14="http://schemas.microsoft.com/office/drawing/2010/main" w="9525">
                   <a:solidFill>
                     <a:srgbClr val="000000"/>
                   </a:solidFill>
@@ -1529,7 +1538,7 @@
             </a:ln>
             <a:extLst>
               <a:ext uri="{91240B29-F687-4f45-9708-019B960494DF}">
-                <a14:hiddenLine xmlns:a14="http://schemas.microsoft.com/office/drawing/2010/main" xmlns="" w="9525">
+                <a14:hiddenLine xmlns="" xmlns:a14="http://schemas.microsoft.com/office/drawing/2010/main" w="9525">
                   <a:solidFill>
                     <a:srgbClr val="000000"/>
                   </a:solidFill>
@@ -1619,7 +1628,7 @@
             </a:ln>
             <a:extLst>
               <a:ext uri="{91240B29-F687-4f45-9708-019B960494DF}">
-                <a14:hiddenLine xmlns:a14="http://schemas.microsoft.com/office/drawing/2010/main" xmlns="" w="9525">
+                <a14:hiddenLine xmlns="" xmlns:a14="http://schemas.microsoft.com/office/drawing/2010/main" w="9525">
                   <a:solidFill>
                     <a:srgbClr val="000000"/>
                   </a:solidFill>
@@ -1709,7 +1718,7 @@
             </a:ln>
             <a:extLst>
               <a:ext uri="{91240B29-F687-4f45-9708-019B960494DF}">
-                <a14:hiddenLine xmlns:a14="http://schemas.microsoft.com/office/drawing/2010/main" xmlns="" w="9525">
+                <a14:hiddenLine xmlns="" xmlns:a14="http://schemas.microsoft.com/office/drawing/2010/main" w="9525">
                   <a:solidFill>
                     <a:srgbClr val="000000"/>
                   </a:solidFill>
@@ -1765,7 +1774,7 @@
             </a:ln>
             <a:extLst>
               <a:ext uri="{91240B29-F687-4f45-9708-019B960494DF}">
-                <a14:hiddenLine xmlns:a14="http://schemas.microsoft.com/office/drawing/2010/main" xmlns="" w="9525">
+                <a14:hiddenLine xmlns="" xmlns:a14="http://schemas.microsoft.com/office/drawing/2010/main" w="9525">
                   <a:solidFill>
                     <a:srgbClr val="000000"/>
                   </a:solidFill>
@@ -1855,7 +1864,7 @@
             </a:ln>
             <a:extLst>
               <a:ext uri="{91240B29-F687-4f45-9708-019B960494DF}">
-                <a14:hiddenLine xmlns:a14="http://schemas.microsoft.com/office/drawing/2010/main" xmlns="" w="9525">
+                <a14:hiddenLine xmlns="" xmlns:a14="http://schemas.microsoft.com/office/drawing/2010/main" w="9525">
                   <a:solidFill>
                     <a:srgbClr val="000000"/>
                   </a:solidFill>
@@ -1911,7 +1920,7 @@
             </a:ln>
             <a:extLst>
               <a:ext uri="{91240B29-F687-4f45-9708-019B960494DF}">
-                <a14:hiddenLine xmlns:a14="http://schemas.microsoft.com/office/drawing/2010/main" xmlns="" w="9525">
+                <a14:hiddenLine xmlns="" xmlns:a14="http://schemas.microsoft.com/office/drawing/2010/main" w="9525">
                   <a:solidFill>
                     <a:srgbClr val="000000"/>
                   </a:solidFill>
@@ -2001,7 +2010,7 @@
             </a:ln>
             <a:extLst>
               <a:ext uri="{91240B29-F687-4f45-9708-019B960494DF}">
-                <a14:hiddenLine xmlns:a14="http://schemas.microsoft.com/office/drawing/2010/main" xmlns="" w="9525">
+                <a14:hiddenLine xmlns="" xmlns:a14="http://schemas.microsoft.com/office/drawing/2010/main" w="9525">
                   <a:solidFill>
                     <a:srgbClr val="000000"/>
                   </a:solidFill>
@@ -2069,7 +2078,7 @@
             </a:ln>
             <a:extLst>
               <a:ext uri="{91240B29-F687-4f45-9708-019B960494DF}">
-                <a14:hiddenLine xmlns:a14="http://schemas.microsoft.com/office/drawing/2010/main" xmlns="" w="9525">
+                <a14:hiddenLine xmlns="" xmlns:a14="http://schemas.microsoft.com/office/drawing/2010/main" w="9525">
                   <a:solidFill>
                     <a:srgbClr val="000000"/>
                   </a:solidFill>
@@ -2159,7 +2168,7 @@
             </a:ln>
             <a:extLst>
               <a:ext uri="{91240B29-F687-4f45-9708-019B960494DF}">
-                <a14:hiddenLine xmlns:a14="http://schemas.microsoft.com/office/drawing/2010/main" xmlns="" w="9525">
+                <a14:hiddenLine xmlns="" xmlns:a14="http://schemas.microsoft.com/office/drawing/2010/main" w="9525">
                   <a:solidFill>
                     <a:srgbClr val="000000"/>
                   </a:solidFill>
@@ -2227,7 +2236,7 @@
             </a:ln>
             <a:extLst>
               <a:ext uri="{91240B29-F687-4f45-9708-019B960494DF}">
-                <a14:hiddenLine xmlns:a14="http://schemas.microsoft.com/office/drawing/2010/main" xmlns="" w="9525">
+                <a14:hiddenLine xmlns="" xmlns:a14="http://schemas.microsoft.com/office/drawing/2010/main" w="9525">
                   <a:solidFill>
                     <a:srgbClr val="000000"/>
                   </a:solidFill>
@@ -2317,7 +2326,7 @@
             </a:ln>
             <a:extLst>
               <a:ext uri="{91240B29-F687-4f45-9708-019B960494DF}">
-                <a14:hiddenLine xmlns:a14="http://schemas.microsoft.com/office/drawing/2010/main" xmlns="" w="9525">
+                <a14:hiddenLine xmlns="" xmlns:a14="http://schemas.microsoft.com/office/drawing/2010/main" w="9525">
                   <a:solidFill>
                     <a:srgbClr val="000000"/>
                   </a:solidFill>
@@ -2351,7 +2360,7 @@
             </a:ln>
             <a:extLst>
               <a:ext uri="{91240B29-F687-4f45-9708-019B960494DF}">
-                <a14:hiddenLine xmlns:a14="http://schemas.microsoft.com/office/drawing/2010/main" xmlns="" w="9525">
+                <a14:hiddenLine xmlns="" xmlns:a14="http://schemas.microsoft.com/office/drawing/2010/main" w="9525">
                   <a:solidFill>
                     <a:srgbClr val="000000"/>
                   </a:solidFill>
@@ -2441,7 +2450,7 @@
             </a:ln>
             <a:extLst>
               <a:ext uri="{91240B29-F687-4f45-9708-019B960494DF}">
-                <a14:hiddenLine xmlns:a14="http://schemas.microsoft.com/office/drawing/2010/main" xmlns="" w="9525">
+                <a14:hiddenLine xmlns="" xmlns:a14="http://schemas.microsoft.com/office/drawing/2010/main" w="9525">
                   <a:solidFill>
                     <a:srgbClr val="000000"/>
                   </a:solidFill>
@@ -2503,7 +2512,7 @@
             </a:ln>
             <a:extLst>
               <a:ext uri="{91240B29-F687-4f45-9708-019B960494DF}">
-                <a14:hiddenLine xmlns:a14="http://schemas.microsoft.com/office/drawing/2010/main" xmlns="" w="9525">
+                <a14:hiddenLine xmlns="" xmlns:a14="http://schemas.microsoft.com/office/drawing/2010/main" w="9525">
                   <a:solidFill>
                     <a:srgbClr val="000000"/>
                   </a:solidFill>
@@ -2565,7 +2574,7 @@
             </a:ln>
             <a:extLst>
               <a:ext uri="{91240B29-F687-4f45-9708-019B960494DF}">
-                <a14:hiddenLine xmlns:a14="http://schemas.microsoft.com/office/drawing/2010/main" xmlns="" w="9525">
+                <a14:hiddenLine xmlns="" xmlns:a14="http://schemas.microsoft.com/office/drawing/2010/main" w="9525">
                   <a:solidFill>
                     <a:srgbClr val="000000"/>
                   </a:solidFill>
@@ -2655,7 +2664,7 @@
             </a:ln>
             <a:extLst>
               <a:ext uri="{91240B29-F687-4f45-9708-019B960494DF}">
-                <a14:hiddenLine xmlns:a14="http://schemas.microsoft.com/office/drawing/2010/main" xmlns="" w="9525">
+                <a14:hiddenLine xmlns="" xmlns:a14="http://schemas.microsoft.com/office/drawing/2010/main" w="9525">
                   <a:solidFill>
                     <a:srgbClr val="000000"/>
                   </a:solidFill>
@@ -2723,7 +2732,7 @@
             </a:ln>
             <a:extLst>
               <a:ext uri="{91240B29-F687-4f45-9708-019B960494DF}">
-                <a14:hiddenLine xmlns:a14="http://schemas.microsoft.com/office/drawing/2010/main" xmlns="" w="9525">
+                <a14:hiddenLine xmlns="" xmlns:a14="http://schemas.microsoft.com/office/drawing/2010/main" w="9525">
                   <a:solidFill>
                     <a:srgbClr val="000000"/>
                   </a:solidFill>
@@ -2785,7 +2794,7 @@
             </a:ln>
             <a:extLst>
               <a:ext uri="{91240B29-F687-4f45-9708-019B960494DF}">
-                <a14:hiddenLine xmlns:a14="http://schemas.microsoft.com/office/drawing/2010/main" xmlns="" w="9525">
+                <a14:hiddenLine xmlns="" xmlns:a14="http://schemas.microsoft.com/office/drawing/2010/main" w="9525">
                   <a:solidFill>
                     <a:srgbClr val="000000"/>
                   </a:solidFill>
@@ -2875,7 +2884,7 @@
             </a:ln>
             <a:extLst>
               <a:ext uri="{91240B29-F687-4f45-9708-019B960494DF}">
-                <a14:hiddenLine xmlns:a14="http://schemas.microsoft.com/office/drawing/2010/main" xmlns="" w="9525">
+                <a14:hiddenLine xmlns="" xmlns:a14="http://schemas.microsoft.com/office/drawing/2010/main" w="9525">
                   <a:solidFill>
                     <a:srgbClr val="000000"/>
                   </a:solidFill>
@@ -2937,7 +2946,7 @@
             </a:ln>
             <a:extLst>
               <a:ext uri="{91240B29-F687-4f45-9708-019B960494DF}">
-                <a14:hiddenLine xmlns:a14="http://schemas.microsoft.com/office/drawing/2010/main" xmlns="" w="9525">
+                <a14:hiddenLine xmlns="" xmlns:a14="http://schemas.microsoft.com/office/drawing/2010/main" w="9525">
                   <a:solidFill>
                     <a:srgbClr val="000000"/>
                   </a:solidFill>
@@ -3027,7 +3036,7 @@
             </a:ln>
             <a:extLst>
               <a:ext uri="{91240B29-F687-4f45-9708-019B960494DF}">
-                <a14:hiddenLine xmlns:a14="http://schemas.microsoft.com/office/drawing/2010/main" xmlns="" w="9525">
+                <a14:hiddenLine xmlns="" xmlns:a14="http://schemas.microsoft.com/office/drawing/2010/main" w="9525">
                   <a:solidFill>
                     <a:srgbClr val="000000"/>
                   </a:solidFill>
@@ -3089,7 +3098,7 @@
             </a:ln>
             <a:extLst>
               <a:ext uri="{91240B29-F687-4f45-9708-019B960494DF}">
-                <a14:hiddenLine xmlns:a14="http://schemas.microsoft.com/office/drawing/2010/main" xmlns="" w="9525">
+                <a14:hiddenLine xmlns="" xmlns:a14="http://schemas.microsoft.com/office/drawing/2010/main" w="9525">
                   <a:solidFill>
                     <a:srgbClr val="000000"/>
                   </a:solidFill>
@@ -3179,7 +3188,7 @@
             </a:ln>
             <a:extLst>
               <a:ext uri="{91240B29-F687-4f45-9708-019B960494DF}">
-                <a14:hiddenLine xmlns:a14="http://schemas.microsoft.com/office/drawing/2010/main" xmlns="" w="9525">
+                <a14:hiddenLine xmlns="" xmlns:a14="http://schemas.microsoft.com/office/drawing/2010/main" w="9525">
                   <a:solidFill>
                     <a:srgbClr val="000000"/>
                   </a:solidFill>
@@ -3213,7 +3222,7 @@
             </a:ln>
             <a:extLst>
               <a:ext uri="{91240B29-F687-4f45-9708-019B960494DF}">
-                <a14:hiddenLine xmlns:a14="http://schemas.microsoft.com/office/drawing/2010/main" xmlns="" w="9525">
+                <a14:hiddenLine xmlns="" xmlns:a14="http://schemas.microsoft.com/office/drawing/2010/main" w="9525">
                   <a:solidFill>
                     <a:srgbClr val="000000"/>
                   </a:solidFill>
@@ -3278,7 +3287,7 @@
             </a:ln>
             <a:extLst>
               <a:ext uri="{91240B29-F687-4f45-9708-019B960494DF}">
-                <a14:hiddenLine xmlns:a14="http://schemas.microsoft.com/office/drawing/2010/main" xmlns="" w="9525">
+                <a14:hiddenLine xmlns="" xmlns:a14="http://schemas.microsoft.com/office/drawing/2010/main" w="9525">
                   <a:solidFill>
                     <a:srgbClr val="000000"/>
                   </a:solidFill>
@@ -3368,7 +3377,7 @@
             </a:ln>
             <a:extLst>
               <a:ext uri="{91240B29-F687-4f45-9708-019B960494DF}">
-                <a14:hiddenLine xmlns:a14="http://schemas.microsoft.com/office/drawing/2010/main" xmlns="" w="9525">
+                <a14:hiddenLine xmlns="" xmlns:a14="http://schemas.microsoft.com/office/drawing/2010/main" w="9525">
                   <a:solidFill>
                     <a:srgbClr val="000000"/>
                   </a:solidFill>
@@ -3430,7 +3439,7 @@
             </a:ln>
             <a:extLst>
               <a:ext uri="{91240B29-F687-4f45-9708-019B960494DF}">
-                <a14:hiddenLine xmlns:a14="http://schemas.microsoft.com/office/drawing/2010/main" xmlns="" w="9525">
+                <a14:hiddenLine xmlns="" xmlns:a14="http://schemas.microsoft.com/office/drawing/2010/main" w="9525">
                   <a:solidFill>
                     <a:srgbClr val="000000"/>
                   </a:solidFill>
@@ -3520,7 +3529,7 @@
             </a:ln>
             <a:extLst>
               <a:ext uri="{91240B29-F687-4f45-9708-019B960494DF}">
-                <a14:hiddenLine xmlns:a14="http://schemas.microsoft.com/office/drawing/2010/main" xmlns="" w="9525">
+                <a14:hiddenLine xmlns="" xmlns:a14="http://schemas.microsoft.com/office/drawing/2010/main" w="9525">
                   <a:solidFill>
                     <a:srgbClr val="000000"/>
                   </a:solidFill>
@@ -3610,7 +3619,7 @@
             </a:ln>
             <a:extLst>
               <a:ext uri="{91240B29-F687-4f45-9708-019B960494DF}">
-                <a14:hiddenLine xmlns:a14="http://schemas.microsoft.com/office/drawing/2010/main" xmlns="" w="9525">
+                <a14:hiddenLine xmlns="" xmlns:a14="http://schemas.microsoft.com/office/drawing/2010/main" w="9525">
                   <a:solidFill>
                     <a:srgbClr val="000000"/>
                   </a:solidFill>
@@ -3675,7 +3684,7 @@
             </a:ln>
             <a:extLst>
               <a:ext uri="{91240B29-F687-4f45-9708-019B960494DF}">
-                <a14:hiddenLine xmlns:a14="http://schemas.microsoft.com/office/drawing/2010/main" xmlns="" w="9525">
+                <a14:hiddenLine xmlns="" xmlns:a14="http://schemas.microsoft.com/office/drawing/2010/main" w="9525">
                   <a:solidFill>
                     <a:srgbClr val="000000"/>
                   </a:solidFill>
@@ -3737,7 +3746,7 @@
             </a:ln>
             <a:extLst>
               <a:ext uri="{91240B29-F687-4f45-9708-019B960494DF}">
-                <a14:hiddenLine xmlns:a14="http://schemas.microsoft.com/office/drawing/2010/main" xmlns="" w="9525">
+                <a14:hiddenLine xmlns="" xmlns:a14="http://schemas.microsoft.com/office/drawing/2010/main" w="9525">
                   <a:solidFill>
                     <a:srgbClr val="000000"/>
                   </a:solidFill>
@@ -3827,7 +3836,7 @@
             </a:ln>
             <a:extLst>
               <a:ext uri="{91240B29-F687-4f45-9708-019B960494DF}">
-                <a14:hiddenLine xmlns:a14="http://schemas.microsoft.com/office/drawing/2010/main" xmlns="" w="9525">
+                <a14:hiddenLine xmlns="" xmlns:a14="http://schemas.microsoft.com/office/drawing/2010/main" w="9525">
                   <a:solidFill>
                     <a:srgbClr val="000000"/>
                   </a:solidFill>
@@ -3917,7 +3926,7 @@
             </a:ln>
             <a:extLst>
               <a:ext uri="{91240B29-F687-4f45-9708-019B960494DF}">
-                <a14:hiddenLine xmlns:a14="http://schemas.microsoft.com/office/drawing/2010/main" xmlns="" w="9525">
+                <a14:hiddenLine xmlns="" xmlns:a14="http://schemas.microsoft.com/office/drawing/2010/main" w="9525">
                   <a:solidFill>
                     <a:srgbClr val="000000"/>
                   </a:solidFill>
@@ -3979,7 +3988,7 @@
             </a:ln>
             <a:extLst>
               <a:ext uri="{91240B29-F687-4f45-9708-019B960494DF}">
-                <a14:hiddenLine xmlns:a14="http://schemas.microsoft.com/office/drawing/2010/main" xmlns="" w="9525">
+                <a14:hiddenLine xmlns="" xmlns:a14="http://schemas.microsoft.com/office/drawing/2010/main" w="9525">
                   <a:solidFill>
                     <a:srgbClr val="000000"/>
                   </a:solidFill>
@@ -4099,7 +4108,7 @@
             </a:ln>
             <a:extLst>
               <a:ext uri="{91240B29-F687-4f45-9708-019B960494DF}">
-                <a14:hiddenLine xmlns:a14="http://schemas.microsoft.com/office/drawing/2010/main" xmlns="" w="9525">
+                <a14:hiddenLine xmlns="" xmlns:a14="http://schemas.microsoft.com/office/drawing/2010/main" w="9525">
                   <a:solidFill>
                     <a:srgbClr val="000000"/>
                   </a:solidFill>
@@ -4167,7 +4176,7 @@
             </a:ln>
             <a:extLst>
               <a:ext uri="{91240B29-F687-4f45-9708-019B960494DF}">
-                <a14:hiddenLine xmlns:a14="http://schemas.microsoft.com/office/drawing/2010/main" xmlns="" w="9525">
+                <a14:hiddenLine xmlns="" xmlns:a14="http://schemas.microsoft.com/office/drawing/2010/main" w="9525">
                   <a:solidFill>
                     <a:srgbClr val="000000"/>
                   </a:solidFill>
@@ -4257,7 +4266,7 @@
             </a:ln>
             <a:extLst>
               <a:ext uri="{91240B29-F687-4f45-9708-019B960494DF}">
-                <a14:hiddenLine xmlns:a14="http://schemas.microsoft.com/office/drawing/2010/main" xmlns="" w="9525">
+                <a14:hiddenLine xmlns="" xmlns:a14="http://schemas.microsoft.com/office/drawing/2010/main" w="9525">
                   <a:solidFill>
                     <a:srgbClr val="000000"/>
                   </a:solidFill>
@@ -4397,7 +4406,7 @@
           <a:p>
             <a:fld id="{BC0BFF02-3553-4540-906C-392AB4B0BFF0}" type="datetimeFigureOut">
               <a:rPr lang="ru-RU" smtClean="0"/>
-              <a:t>27.08.2026</a:t>
+              <a:t>30.08.2026</a:t>
             </a:fld>
             <a:endParaRPr lang="ru-RU"/>
           </a:p>
@@ -4664,7 +4673,7 @@
           <a:p>
             <a:fld id="{BC0BFF02-3553-4540-906C-392AB4B0BFF0}" type="datetimeFigureOut">
               <a:rPr lang="ru-RU" smtClean="0"/>
-              <a:t>27.08.2026</a:t>
+              <a:t>30.08.2026</a:t>
             </a:fld>
             <a:endParaRPr lang="ru-RU"/>
           </a:p>
@@ -4860,7 +4869,7 @@
           <a:p>
             <a:fld id="{BC0BFF02-3553-4540-906C-392AB4B0BFF0}" type="datetimeFigureOut">
               <a:rPr lang="ru-RU" smtClean="0"/>
-              <a:t>27.08.2026</a:t>
+              <a:t>30.08.2026</a:t>
             </a:fld>
             <a:endParaRPr lang="ru-RU"/>
           </a:p>
@@ -5123,7 +5132,7 @@
           <a:p>
             <a:fld id="{BC0BFF02-3553-4540-906C-392AB4B0BFF0}" type="datetimeFigureOut">
               <a:rPr lang="ru-RU" smtClean="0"/>
-              <a:t>27.08.2026</a:t>
+              <a:t>30.08.2026</a:t>
             </a:fld>
             <a:endParaRPr lang="ru-RU"/>
           </a:p>
@@ -5557,7 +5566,7 @@
           <a:p>
             <a:fld id="{BC0BFF02-3553-4540-906C-392AB4B0BFF0}" type="datetimeFigureOut">
               <a:rPr lang="ru-RU" smtClean="0"/>
-              <a:t>27.08.2026</a:t>
+              <a:t>30.08.2026</a:t>
             </a:fld>
             <a:endParaRPr lang="ru-RU"/>
           </a:p>
@@ -6103,7 +6112,7 @@
           <a:p>
             <a:fld id="{BC0BFF02-3553-4540-906C-392AB4B0BFF0}" type="datetimeFigureOut">
               <a:rPr lang="ru-RU" smtClean="0"/>
-              <a:t>27.08.2026</a:t>
+              <a:t>30.08.2026</a:t>
             </a:fld>
             <a:endParaRPr lang="ru-RU"/>
           </a:p>
@@ -6823,7 +6832,7 @@
           <a:p>
             <a:fld id="{BC0BFF02-3553-4540-906C-392AB4B0BFF0}" type="datetimeFigureOut">
               <a:rPr lang="ru-RU" smtClean="0"/>
-              <a:t>27.08.2026</a:t>
+              <a:t>30.08.2026</a:t>
             </a:fld>
             <a:endParaRPr lang="ru-RU"/>
           </a:p>
@@ -6993,7 +7002,7 @@
           <a:p>
             <a:fld id="{BC0BFF02-3553-4540-906C-392AB4B0BFF0}" type="datetimeFigureOut">
               <a:rPr lang="ru-RU" smtClean="0"/>
-              <a:t>27.08.2026</a:t>
+              <a:t>30.08.2026</a:t>
             </a:fld>
             <a:endParaRPr lang="ru-RU"/>
           </a:p>
@@ -7173,7 +7182,7 @@
           <a:p>
             <a:fld id="{BC0BFF02-3553-4540-906C-392AB4B0BFF0}" type="datetimeFigureOut">
               <a:rPr lang="ru-RU" smtClean="0"/>
-              <a:t>27.08.2026</a:t>
+              <a:t>30.08.2026</a:t>
             </a:fld>
             <a:endParaRPr lang="ru-RU"/>
           </a:p>
@@ -7343,7 +7352,7 @@
           <a:p>
             <a:fld id="{BC0BFF02-3553-4540-906C-392AB4B0BFF0}" type="datetimeFigureOut">
               <a:rPr lang="ru-RU" smtClean="0"/>
-              <a:t>27.08.2026</a:t>
+              <a:t>30.08.2026</a:t>
             </a:fld>
             <a:endParaRPr lang="ru-RU"/>
           </a:p>
@@ -7593,7 +7602,7 @@
           <a:p>
             <a:fld id="{BC0BFF02-3553-4540-906C-392AB4B0BFF0}" type="datetimeFigureOut">
               <a:rPr lang="ru-RU" smtClean="0"/>
-              <a:t>27.08.2026</a:t>
+              <a:t>30.08.2026</a:t>
             </a:fld>
             <a:endParaRPr lang="ru-RU"/>
           </a:p>
@@ -7825,7 +7834,7 @@
           <a:p>
             <a:fld id="{BC0BFF02-3553-4540-906C-392AB4B0BFF0}" type="datetimeFigureOut">
               <a:rPr lang="ru-RU" smtClean="0"/>
-              <a:t>27.08.2026</a:t>
+              <a:t>30.08.2026</a:t>
             </a:fld>
             <a:endParaRPr lang="ru-RU"/>
           </a:p>
@@ -8206,7 +8215,7 @@
           <a:p>
             <a:fld id="{BC0BFF02-3553-4540-906C-392AB4B0BFF0}" type="datetimeFigureOut">
               <a:rPr lang="ru-RU" smtClean="0"/>
-              <a:t>27.08.2026</a:t>
+              <a:t>30.08.2026</a:t>
             </a:fld>
             <a:endParaRPr lang="ru-RU"/>
           </a:p>
@@ -8324,7 +8333,7 @@
           <a:p>
             <a:fld id="{BC0BFF02-3553-4540-906C-392AB4B0BFF0}" type="datetimeFigureOut">
               <a:rPr lang="ru-RU" smtClean="0"/>
-              <a:t>27.08.2026</a:t>
+              <a:t>30.08.2026</a:t>
             </a:fld>
             <a:endParaRPr lang="ru-RU"/>
           </a:p>
@@ -8419,7 +8428,7 @@
           <a:p>
             <a:fld id="{BC0BFF02-3553-4540-906C-392AB4B0BFF0}" type="datetimeFigureOut">
               <a:rPr lang="ru-RU" smtClean="0"/>
-              <a:t>27.08.2026</a:t>
+              <a:t>30.08.2026</a:t>
             </a:fld>
             <a:endParaRPr lang="ru-RU"/>
           </a:p>
@@ -8668,7 +8677,7 @@
           <a:p>
             <a:fld id="{BC0BFF02-3553-4540-906C-392AB4B0BFF0}" type="datetimeFigureOut">
               <a:rPr lang="ru-RU" smtClean="0"/>
-              <a:t>27.08.2026</a:t>
+              <a:t>30.08.2026</a:t>
             </a:fld>
             <a:endParaRPr lang="ru-RU"/>
           </a:p>
@@ -8948,7 +8957,7 @@
           <a:p>
             <a:fld id="{BC0BFF02-3553-4540-906C-392AB4B0BFF0}" type="datetimeFigureOut">
               <a:rPr lang="ru-RU" smtClean="0"/>
-              <a:t>27.08.2026</a:t>
+              <a:t>30.08.2026</a:t>
             </a:fld>
             <a:endParaRPr lang="ru-RU"/>
           </a:p>
@@ -9071,7 +9080,7 @@
           <a:noFill/>
           <a:extLst>
             <a:ext uri="{909E8E84-426E-40dd-AFC4-6F175D3DCCD1}">
-              <a14:hiddenFill xmlns:a14="http://schemas.microsoft.com/office/drawing/2010/main" xmlns="">
+              <a14:hiddenFill xmlns="" xmlns:a14="http://schemas.microsoft.com/office/drawing/2010/main">
                 <a:solidFill>
                   <a:srgbClr val="FFFFFF"/>
                 </a:solidFill>
@@ -9145,7 +9154,7 @@
               </a:ln>
               <a:extLst>
                 <a:ext uri="{91240B29-F687-4f45-9708-019B960494DF}">
-                  <a14:hiddenLine xmlns:a14="http://schemas.microsoft.com/office/drawing/2010/main" xmlns="" w="9525">
+                  <a14:hiddenLine xmlns="" xmlns:a14="http://schemas.microsoft.com/office/drawing/2010/main" w="9525">
                     <a:solidFill>
                       <a:srgbClr val="000000"/>
                     </a:solidFill>
@@ -9235,7 +9244,7 @@
               </a:ln>
               <a:extLst>
                 <a:ext uri="{91240B29-F687-4f45-9708-019B960494DF}">
-                  <a14:hiddenLine xmlns:a14="http://schemas.microsoft.com/office/drawing/2010/main" xmlns="" w="9525">
+                  <a14:hiddenLine xmlns="" xmlns:a14="http://schemas.microsoft.com/office/drawing/2010/main" w="9525">
                     <a:solidFill>
                       <a:srgbClr val="000000"/>
                     </a:solidFill>
@@ -9325,7 +9334,7 @@
               </a:ln>
               <a:extLst>
                 <a:ext uri="{91240B29-F687-4f45-9708-019B960494DF}">
-                  <a14:hiddenLine xmlns:a14="http://schemas.microsoft.com/office/drawing/2010/main" xmlns="" w="9525">
+                  <a14:hiddenLine xmlns="" xmlns:a14="http://schemas.microsoft.com/office/drawing/2010/main" w="9525">
                     <a:solidFill>
                       <a:srgbClr val="000000"/>
                     </a:solidFill>
@@ -9387,7 +9396,7 @@
               </a:ln>
               <a:extLst>
                 <a:ext uri="{91240B29-F687-4f45-9708-019B960494DF}">
-                  <a14:hiddenLine xmlns:a14="http://schemas.microsoft.com/office/drawing/2010/main" xmlns="" w="9525">
+                  <a14:hiddenLine xmlns="" xmlns:a14="http://schemas.microsoft.com/office/drawing/2010/main" w="9525">
                     <a:solidFill>
                       <a:srgbClr val="000000"/>
                     </a:solidFill>
@@ -9477,7 +9486,7 @@
               </a:ln>
               <a:extLst>
                 <a:ext uri="{91240B29-F687-4f45-9708-019B960494DF}">
-                  <a14:hiddenLine xmlns:a14="http://schemas.microsoft.com/office/drawing/2010/main" xmlns="" w="9525">
+                  <a14:hiddenLine xmlns="" xmlns:a14="http://schemas.microsoft.com/office/drawing/2010/main" w="9525">
                     <a:solidFill>
                       <a:srgbClr val="000000"/>
                     </a:solidFill>
@@ -9539,7 +9548,7 @@
               </a:ln>
               <a:extLst>
                 <a:ext uri="{91240B29-F687-4f45-9708-019B960494DF}">
-                  <a14:hiddenLine xmlns:a14="http://schemas.microsoft.com/office/drawing/2010/main" xmlns="" w="9525">
+                  <a14:hiddenLine xmlns="" xmlns:a14="http://schemas.microsoft.com/office/drawing/2010/main" w="9525">
                     <a:solidFill>
                       <a:srgbClr val="000000"/>
                     </a:solidFill>
@@ -9601,7 +9610,7 @@
               </a:ln>
               <a:extLst>
                 <a:ext uri="{91240B29-F687-4f45-9708-019B960494DF}">
-                  <a14:hiddenLine xmlns:a14="http://schemas.microsoft.com/office/drawing/2010/main" xmlns="" w="9525">
+                  <a14:hiddenLine xmlns="" xmlns:a14="http://schemas.microsoft.com/office/drawing/2010/main" w="9525">
                     <a:solidFill>
                       <a:srgbClr val="000000"/>
                     </a:solidFill>
@@ -9691,7 +9700,7 @@
               </a:ln>
               <a:extLst>
                 <a:ext uri="{91240B29-F687-4f45-9708-019B960494DF}">
-                  <a14:hiddenLine xmlns:a14="http://schemas.microsoft.com/office/drawing/2010/main" xmlns="" w="9525">
+                  <a14:hiddenLine xmlns="" xmlns:a14="http://schemas.microsoft.com/office/drawing/2010/main" w="9525">
                     <a:solidFill>
                       <a:srgbClr val="000000"/>
                     </a:solidFill>
@@ -9781,7 +9790,7 @@
               </a:ln>
               <a:extLst>
                 <a:ext uri="{91240B29-F687-4f45-9708-019B960494DF}">
-                  <a14:hiddenLine xmlns:a14="http://schemas.microsoft.com/office/drawing/2010/main" xmlns="" w="9525">
+                  <a14:hiddenLine xmlns="" xmlns:a14="http://schemas.microsoft.com/office/drawing/2010/main" w="9525">
                     <a:solidFill>
                       <a:srgbClr val="000000"/>
                     </a:solidFill>
@@ -9843,7 +9852,7 @@
               </a:ln>
               <a:extLst>
                 <a:ext uri="{91240B29-F687-4f45-9708-019B960494DF}">
-                  <a14:hiddenLine xmlns:a14="http://schemas.microsoft.com/office/drawing/2010/main" xmlns="" w="9525">
+                  <a14:hiddenLine xmlns="" xmlns:a14="http://schemas.microsoft.com/office/drawing/2010/main" w="9525">
                     <a:solidFill>
                       <a:srgbClr val="000000"/>
                     </a:solidFill>
@@ -9953,7 +9962,7 @@
               </a:ln>
               <a:extLst>
                 <a:ext uri="{91240B29-F687-4f45-9708-019B960494DF}">
-                  <a14:hiddenLine xmlns:a14="http://schemas.microsoft.com/office/drawing/2010/main" xmlns="" w="9525">
+                  <a14:hiddenLine xmlns="" xmlns:a14="http://schemas.microsoft.com/office/drawing/2010/main" w="9525">
                     <a:solidFill>
                       <a:srgbClr val="000000"/>
                     </a:solidFill>
@@ -10037,7 +10046,7 @@
               </a:ln>
               <a:extLst>
                 <a:ext uri="{91240B29-F687-4f45-9708-019B960494DF}">
-                  <a14:hiddenLine xmlns:a14="http://schemas.microsoft.com/office/drawing/2010/main" xmlns="" w="9525">
+                  <a14:hiddenLine xmlns="" xmlns:a14="http://schemas.microsoft.com/office/drawing/2010/main" w="9525">
                     <a:solidFill>
                       <a:srgbClr val="000000"/>
                     </a:solidFill>
@@ -10099,7 +10108,7 @@
               </a:ln>
               <a:extLst>
                 <a:ext uri="{91240B29-F687-4f45-9708-019B960494DF}">
-                  <a14:hiddenLine xmlns:a14="http://schemas.microsoft.com/office/drawing/2010/main" xmlns="" w="9525">
+                  <a14:hiddenLine xmlns="" xmlns:a14="http://schemas.microsoft.com/office/drawing/2010/main" w="9525">
                     <a:solidFill>
                       <a:srgbClr val="000000"/>
                     </a:solidFill>
@@ -10161,7 +10170,7 @@
               </a:ln>
               <a:extLst>
                 <a:ext uri="{91240B29-F687-4f45-9708-019B960494DF}">
-                  <a14:hiddenLine xmlns:a14="http://schemas.microsoft.com/office/drawing/2010/main" xmlns="" w="9525">
+                  <a14:hiddenLine xmlns="" xmlns:a14="http://schemas.microsoft.com/office/drawing/2010/main" w="9525">
                     <a:solidFill>
                       <a:srgbClr val="000000"/>
                     </a:solidFill>
@@ -10251,7 +10260,7 @@
               </a:ln>
               <a:extLst>
                 <a:ext uri="{91240B29-F687-4f45-9708-019B960494DF}">
-                  <a14:hiddenLine xmlns:a14="http://schemas.microsoft.com/office/drawing/2010/main" xmlns="" w="9525">
+                  <a14:hiddenLine xmlns="" xmlns:a14="http://schemas.microsoft.com/office/drawing/2010/main" w="9525">
                     <a:solidFill>
                       <a:srgbClr val="000000"/>
                     </a:solidFill>
@@ -10285,7 +10294,7 @@
               </a:ln>
               <a:extLst>
                 <a:ext uri="{91240B29-F687-4f45-9708-019B960494DF}">
-                  <a14:hiddenLine xmlns:a14="http://schemas.microsoft.com/office/drawing/2010/main" xmlns="" w="9525">
+                  <a14:hiddenLine xmlns="" xmlns:a14="http://schemas.microsoft.com/office/drawing/2010/main" w="9525">
                     <a:solidFill>
                       <a:srgbClr val="000000"/>
                     </a:solidFill>
@@ -10350,7 +10359,7 @@
               </a:ln>
               <a:extLst>
                 <a:ext uri="{91240B29-F687-4f45-9708-019B960494DF}">
-                  <a14:hiddenLine xmlns:a14="http://schemas.microsoft.com/office/drawing/2010/main" xmlns="" w="9525">
+                  <a14:hiddenLine xmlns="" xmlns:a14="http://schemas.microsoft.com/office/drawing/2010/main" w="9525">
                     <a:solidFill>
                       <a:srgbClr val="000000"/>
                     </a:solidFill>
@@ -10440,7 +10449,7 @@
               </a:ln>
               <a:extLst>
                 <a:ext uri="{91240B29-F687-4f45-9708-019B960494DF}">
-                  <a14:hiddenLine xmlns:a14="http://schemas.microsoft.com/office/drawing/2010/main" xmlns="" w="9525">
+                  <a14:hiddenLine xmlns="" xmlns:a14="http://schemas.microsoft.com/office/drawing/2010/main" w="9525">
                     <a:solidFill>
                       <a:srgbClr val="000000"/>
                     </a:solidFill>
@@ -10502,7 +10511,7 @@
               </a:ln>
               <a:extLst>
                 <a:ext uri="{91240B29-F687-4f45-9708-019B960494DF}">
-                  <a14:hiddenLine xmlns:a14="http://schemas.microsoft.com/office/drawing/2010/main" xmlns="" w="9525">
+                  <a14:hiddenLine xmlns="" xmlns:a14="http://schemas.microsoft.com/office/drawing/2010/main" w="9525">
                     <a:solidFill>
                       <a:srgbClr val="000000"/>
                     </a:solidFill>
@@ -10592,7 +10601,7 @@
               </a:ln>
               <a:extLst>
                 <a:ext uri="{91240B29-F687-4f45-9708-019B960494DF}">
-                  <a14:hiddenLine xmlns:a14="http://schemas.microsoft.com/office/drawing/2010/main" xmlns="" w="9525">
+                  <a14:hiddenLine xmlns="" xmlns:a14="http://schemas.microsoft.com/office/drawing/2010/main" w="9525">
                     <a:solidFill>
                       <a:srgbClr val="000000"/>
                     </a:solidFill>
@@ -10657,7 +10666,7 @@
               </a:ln>
               <a:extLst>
                 <a:ext uri="{91240B29-F687-4f45-9708-019B960494DF}">
-                  <a14:hiddenLine xmlns:a14="http://schemas.microsoft.com/office/drawing/2010/main" xmlns="" w="9525">
+                  <a14:hiddenLine xmlns="" xmlns:a14="http://schemas.microsoft.com/office/drawing/2010/main" w="9525">
                     <a:solidFill>
                       <a:srgbClr val="000000"/>
                     </a:solidFill>
@@ -10719,7 +10728,7 @@
               </a:ln>
               <a:extLst>
                 <a:ext uri="{91240B29-F687-4f45-9708-019B960494DF}">
-                  <a14:hiddenLine xmlns:a14="http://schemas.microsoft.com/office/drawing/2010/main" xmlns="" w="9525">
+                  <a14:hiddenLine xmlns="" xmlns:a14="http://schemas.microsoft.com/office/drawing/2010/main" w="9525">
                     <a:solidFill>
                       <a:srgbClr val="000000"/>
                     </a:solidFill>
@@ -10809,7 +10818,7 @@
               </a:ln>
               <a:extLst>
                 <a:ext uri="{91240B29-F687-4f45-9708-019B960494DF}">
-                  <a14:hiddenLine xmlns:a14="http://schemas.microsoft.com/office/drawing/2010/main" xmlns="" w="9525">
+                  <a14:hiddenLine xmlns="" xmlns:a14="http://schemas.microsoft.com/office/drawing/2010/main" w="9525">
                     <a:solidFill>
                       <a:srgbClr val="000000"/>
                     </a:solidFill>
@@ -10899,7 +10908,7 @@
               </a:ln>
               <a:extLst>
                 <a:ext uri="{91240B29-F687-4f45-9708-019B960494DF}">
-                  <a14:hiddenLine xmlns:a14="http://schemas.microsoft.com/office/drawing/2010/main" xmlns="" w="9525">
+                  <a14:hiddenLine xmlns="" xmlns:a14="http://schemas.microsoft.com/office/drawing/2010/main" w="9525">
                     <a:solidFill>
                       <a:srgbClr val="000000"/>
                     </a:solidFill>
@@ -10964,7 +10973,7 @@
               </a:ln>
               <a:extLst>
                 <a:ext uri="{91240B29-F687-4f45-9708-019B960494DF}">
-                  <a14:hiddenLine xmlns:a14="http://schemas.microsoft.com/office/drawing/2010/main" xmlns="" w="9525">
+                  <a14:hiddenLine xmlns="" xmlns:a14="http://schemas.microsoft.com/office/drawing/2010/main" w="9525">
                     <a:solidFill>
                       <a:srgbClr val="000000"/>
                     </a:solidFill>
@@ -11084,7 +11093,7 @@
               </a:ln>
               <a:extLst>
                 <a:ext uri="{91240B29-F687-4f45-9708-019B960494DF}">
-                  <a14:hiddenLine xmlns:a14="http://schemas.microsoft.com/office/drawing/2010/main" xmlns="" w="9525">
+                  <a14:hiddenLine xmlns="" xmlns:a14="http://schemas.microsoft.com/office/drawing/2010/main" w="9525">
                     <a:solidFill>
                       <a:srgbClr val="000000"/>
                     </a:solidFill>
@@ -11165,7 +11174,7 @@
               </a:ln>
               <a:extLst>
                 <a:ext uri="{91240B29-F687-4f45-9708-019B960494DF}">
-                  <a14:hiddenLine xmlns:a14="http://schemas.microsoft.com/office/drawing/2010/main" xmlns="" w="9525">
+                  <a14:hiddenLine xmlns="" xmlns:a14="http://schemas.microsoft.com/office/drawing/2010/main" w="9525">
                     <a:solidFill>
                       <a:srgbClr val="000000"/>
                     </a:solidFill>
@@ -11280,7 +11289,7 @@
               </a:ln>
               <a:extLst>
                 <a:ext uri="{91240B29-F687-4f45-9708-019B960494DF}">
-                  <a14:hiddenLine xmlns:a14="http://schemas.microsoft.com/office/drawing/2010/main" xmlns="" w="9525">
+                  <a14:hiddenLine xmlns="" xmlns:a14="http://schemas.microsoft.com/office/drawing/2010/main" w="9525">
                     <a:solidFill>
                       <a:srgbClr val="000000"/>
                     </a:solidFill>
@@ -11370,7 +11379,7 @@
               </a:ln>
               <a:extLst>
                 <a:ext uri="{91240B29-F687-4f45-9708-019B960494DF}">
-                  <a14:hiddenLine xmlns:a14="http://schemas.microsoft.com/office/drawing/2010/main" xmlns="" w="9525">
+                  <a14:hiddenLine xmlns="" xmlns:a14="http://schemas.microsoft.com/office/drawing/2010/main" w="9525">
                     <a:solidFill>
                       <a:srgbClr val="000000"/>
                     </a:solidFill>
@@ -11435,7 +11444,7 @@
               </a:ln>
               <a:extLst>
                 <a:ext uri="{91240B29-F687-4f45-9708-019B960494DF}">
-                  <a14:hiddenLine xmlns:a14="http://schemas.microsoft.com/office/drawing/2010/main" xmlns="" w="9525">
+                  <a14:hiddenLine xmlns="" xmlns:a14="http://schemas.microsoft.com/office/drawing/2010/main" w="9525">
                     <a:solidFill>
                       <a:srgbClr val="000000"/>
                     </a:solidFill>
@@ -11525,7 +11534,7 @@
               </a:ln>
               <a:extLst>
                 <a:ext uri="{91240B29-F687-4f45-9708-019B960494DF}">
-                  <a14:hiddenLine xmlns:a14="http://schemas.microsoft.com/office/drawing/2010/main" xmlns="" w="9525">
+                  <a14:hiddenLine xmlns="" xmlns:a14="http://schemas.microsoft.com/office/drawing/2010/main" w="9525">
                     <a:solidFill>
                       <a:srgbClr val="000000"/>
                     </a:solidFill>
@@ -11593,7 +11602,7 @@
               </a:ln>
               <a:extLst>
                 <a:ext uri="{91240B29-F687-4f45-9708-019B960494DF}">
-                  <a14:hiddenLine xmlns:a14="http://schemas.microsoft.com/office/drawing/2010/main" xmlns="" w="9525">
+                  <a14:hiddenLine xmlns="" xmlns:a14="http://schemas.microsoft.com/office/drawing/2010/main" w="9525">
                     <a:solidFill>
                       <a:srgbClr val="000000"/>
                     </a:solidFill>
@@ -11683,7 +11692,7 @@
               </a:ln>
               <a:extLst>
                 <a:ext uri="{91240B29-F687-4f45-9708-019B960494DF}">
-                  <a14:hiddenLine xmlns:a14="http://schemas.microsoft.com/office/drawing/2010/main" xmlns="" w="9525">
+                  <a14:hiddenLine xmlns="" xmlns:a14="http://schemas.microsoft.com/office/drawing/2010/main" w="9525">
                     <a:solidFill>
                       <a:srgbClr val="000000"/>
                     </a:solidFill>
@@ -11751,7 +11760,7 @@
               </a:ln>
               <a:extLst>
                 <a:ext uri="{91240B29-F687-4f45-9708-019B960494DF}">
-                  <a14:hiddenLine xmlns:a14="http://schemas.microsoft.com/office/drawing/2010/main" xmlns="" w="9525">
+                  <a14:hiddenLine xmlns="" xmlns:a14="http://schemas.microsoft.com/office/drawing/2010/main" w="9525">
                     <a:solidFill>
                       <a:srgbClr val="000000"/>
                     </a:solidFill>
@@ -11841,7 +11850,7 @@
               </a:ln>
               <a:extLst>
                 <a:ext uri="{91240B29-F687-4f45-9708-019B960494DF}">
-                  <a14:hiddenLine xmlns:a14="http://schemas.microsoft.com/office/drawing/2010/main" xmlns="" w="9525">
+                  <a14:hiddenLine xmlns="" xmlns:a14="http://schemas.microsoft.com/office/drawing/2010/main" w="9525">
                     <a:solidFill>
                       <a:srgbClr val="000000"/>
                     </a:solidFill>
@@ -11875,7 +11884,7 @@
               </a:ln>
               <a:extLst>
                 <a:ext uri="{91240B29-F687-4f45-9708-019B960494DF}">
-                  <a14:hiddenLine xmlns:a14="http://schemas.microsoft.com/office/drawing/2010/main" xmlns="" w="9525">
+                  <a14:hiddenLine xmlns="" xmlns:a14="http://schemas.microsoft.com/office/drawing/2010/main" w="9525">
                     <a:solidFill>
                       <a:srgbClr val="000000"/>
                     </a:solidFill>
@@ -12015,7 +12024,7 @@
           <a:p>
             <a:fld id="{BC0BFF02-3553-4540-906C-392AB4B0BFF0}" type="datetimeFigureOut">
               <a:rPr lang="ru-RU" smtClean="0"/>
-              <a:t>27.08.2026</a:t>
+              <a:t>30.08.2026</a:t>
             </a:fld>
             <a:endParaRPr lang="ru-RU"/>
           </a:p>
@@ -12454,7 +12463,6 @@
               <a:rPr lang="ru-RU" dirty="0"/>
               <a:t>Основы межсетевого взаимодействия и коммутации пакетов</a:t>
             </a:r>
-            <a:endParaRPr lang="ru-RU" dirty="0"/>
           </a:p>
         </p:txBody>
       </p:sp>
@@ -12475,6 +12483,1287 @@
       </p:par>
     </p:tnLst>
   </p:timing>
+</p:sld>
+</file>
+
+<file path=ppt/slides/slide10.xml><?xml version="1.0" encoding="utf-8"?>
+<p:sld xmlns:a="http://schemas.openxmlformats.org/drawingml/2006/main" xmlns:r="http://schemas.openxmlformats.org/officeDocument/2006/relationships" xmlns:p="http://schemas.openxmlformats.org/presentationml/2006/main">
+  <p:cSld>
+    <p:spTree>
+      <p:nvGrpSpPr>
+        <p:cNvPr id="1" name=""/>
+        <p:cNvGrpSpPr/>
+        <p:nvPr/>
+      </p:nvGrpSpPr>
+      <p:grpSpPr>
+        <a:xfrm>
+          <a:off x="0" y="0"/>
+          <a:ext cx="0" cy="0"/>
+          <a:chOff x="0" y="0"/>
+          <a:chExt cx="0" cy="0"/>
+        </a:xfrm>
+      </p:grpSpPr>
+      <p:sp>
+        <p:nvSpPr>
+          <p:cNvPr id="2" name="Заголовок 1"/>
+          <p:cNvSpPr>
+            <a:spLocks noGrp="1"/>
+          </p:cNvSpPr>
+          <p:nvPr>
+            <p:ph type="title"/>
+          </p:nvPr>
+        </p:nvSpPr>
+        <p:spPr/>
+        <p:txBody>
+          <a:bodyPr>
+            <a:normAutofit fontScale="90000"/>
+          </a:bodyPr>
+          <a:lstStyle/>
+          <a:p>
+            <a:r>
+              <a:rPr lang="ru-RU" dirty="0"/>
+              <a:t>Распределите утверждения по двум колонкам — </a:t>
+            </a:r>
+            <a:r>
+              <a:rPr lang="ru-RU" b="1" dirty="0"/>
+              <a:t>[Д]</a:t>
+            </a:r>
+            <a:r>
+              <a:rPr lang="ru-RU" dirty="0"/>
+              <a:t> (</a:t>
+            </a:r>
+            <a:r>
+              <a:rPr lang="ru-RU" dirty="0" err="1"/>
+              <a:t>Датаграммный</a:t>
+            </a:r>
+            <a:r>
+              <a:rPr lang="ru-RU" dirty="0"/>
+              <a:t> подход) или </a:t>
+            </a:r>
+            <a:r>
+              <a:rPr lang="ru-RU" b="1" dirty="0"/>
+              <a:t>[ВК]</a:t>
+            </a:r>
+            <a:r>
+              <a:rPr lang="ru-RU" dirty="0"/>
+              <a:t> (Виртуальные каналы):</a:t>
+            </a:r>
+            <a:endParaRPr lang="ru-RU" dirty="0"/>
+          </a:p>
+        </p:txBody>
+      </p:sp>
+      <p:sp>
+        <p:nvSpPr>
+          <p:cNvPr id="3" name="Объект 2"/>
+          <p:cNvSpPr>
+            <a:spLocks noGrp="1"/>
+          </p:cNvSpPr>
+          <p:nvPr>
+            <p:ph idx="1"/>
+          </p:nvPr>
+        </p:nvSpPr>
+        <p:spPr>
+          <a:xfrm>
+            <a:off x="1141412" y="2249486"/>
+            <a:ext cx="9905999" cy="4204067"/>
+          </a:xfrm>
+        </p:spPr>
+        <p:txBody>
+          <a:bodyPr>
+            <a:normAutofit fontScale="92500" lnSpcReduction="10000"/>
+          </a:bodyPr>
+          <a:lstStyle/>
+          <a:p>
+            <a:r>
+              <a:rPr lang="ru-RU" dirty="0"/>
+              <a:t>Требуется предварительная фаза установления соединения перед отправкой данных.</a:t>
+            </a:r>
+          </a:p>
+          <a:p>
+            <a:r>
+              <a:rPr lang="ru-RU" dirty="0"/>
+              <a:t>Каждый кадр содержит полный адрес узла назначения.</a:t>
+            </a:r>
+          </a:p>
+          <a:p>
+            <a:r>
+              <a:rPr lang="ru-RU" dirty="0"/>
+              <a:t>Идентификатор в заголовке кадра (VCI) может меняться от коммутатора к коммутатору.</a:t>
+            </a:r>
+          </a:p>
+          <a:p>
+            <a:r>
+              <a:rPr lang="ru-RU" dirty="0"/>
+              <a:t>Последовательные кадры между одними и теми же узлами могут передаваться разными маршрутами.</a:t>
+            </a:r>
+          </a:p>
+          <a:p>
+            <a:r>
+              <a:rPr lang="ru-RU" dirty="0"/>
+              <a:t>При сбое промежуточного узла достаточно перестроить таблицу пересылки, связь не требует полного пересоздания логического канала.</a:t>
+            </a:r>
+          </a:p>
+          <a:p>
+            <a:endParaRPr lang="ru-RU" dirty="0"/>
+          </a:p>
+        </p:txBody>
+      </p:sp>
+    </p:spTree>
+    <p:extLst>
+      <p:ext uri="{BB962C8B-B14F-4D97-AF65-F5344CB8AC3E}">
+        <p14:creationId xmlns:p14="http://schemas.microsoft.com/office/powerpoint/2010/main" val="3268469599"/>
+      </p:ext>
+    </p:extLst>
+  </p:cSld>
+  <p:clrMapOvr>
+    <a:masterClrMapping/>
+  </p:clrMapOvr>
+</p:sld>
+</file>
+
+<file path=ppt/slides/slide11.xml><?xml version="1.0" encoding="utf-8"?>
+<p:sld xmlns:a="http://schemas.openxmlformats.org/drawingml/2006/main" xmlns:r="http://schemas.openxmlformats.org/officeDocument/2006/relationships" xmlns:p="http://schemas.openxmlformats.org/presentationml/2006/main">
+  <p:cSld>
+    <p:spTree>
+      <p:nvGrpSpPr>
+        <p:cNvPr id="1" name=""/>
+        <p:cNvGrpSpPr/>
+        <p:nvPr/>
+      </p:nvGrpSpPr>
+      <p:grpSpPr>
+        <a:xfrm>
+          <a:off x="0" y="0"/>
+          <a:ext cx="0" cy="0"/>
+          <a:chOff x="0" y="0"/>
+          <a:chExt cx="0" cy="0"/>
+        </a:xfrm>
+      </p:grpSpPr>
+      <p:sp>
+        <p:nvSpPr>
+          <p:cNvPr id="2" name="Заголовок 1"/>
+          <p:cNvSpPr>
+            <a:spLocks noGrp="1"/>
+          </p:cNvSpPr>
+          <p:nvPr>
+            <p:ph type="title"/>
+          </p:nvPr>
+        </p:nvSpPr>
+        <p:spPr/>
+        <p:txBody>
+          <a:bodyPr/>
+          <a:lstStyle/>
+          <a:p>
+            <a:r>
+              <a:rPr lang="ru-RU" dirty="0"/>
+              <a:t>Взгляните на фрагмент таблицы коммутатора и ответьте на вопрос:</a:t>
+            </a:r>
+            <a:endParaRPr lang="ru-RU" dirty="0"/>
+          </a:p>
+        </p:txBody>
+      </p:sp>
+      <p:sp>
+        <p:nvSpPr>
+          <p:cNvPr id="4" name="Объект 3"/>
+          <p:cNvSpPr>
+            <a:spLocks noGrp="1"/>
+          </p:cNvSpPr>
+          <p:nvPr>
+            <p:ph sz="half" idx="1"/>
+          </p:nvPr>
+        </p:nvSpPr>
+        <p:spPr>
+          <a:xfrm>
+            <a:off x="1018318" y="2249487"/>
+            <a:ext cx="9822597" cy="2111498"/>
+          </a:xfrm>
+        </p:spPr>
+        <p:txBody>
+          <a:bodyPr>
+            <a:normAutofit/>
+          </a:bodyPr>
+          <a:lstStyle/>
+          <a:p>
+            <a:pPr marL="0" indent="0">
+              <a:buNone/>
+            </a:pPr>
+            <a:r>
+              <a:rPr lang="ru-RU" dirty="0"/>
+              <a:t>На </a:t>
+            </a:r>
+            <a:r>
+              <a:rPr lang="ru-RU" b="1" dirty="0"/>
+              <a:t>интерфейс 3</a:t>
+            </a:r>
+            <a:r>
+              <a:rPr lang="ru-RU" dirty="0"/>
+              <a:t> коммутатора пришёл кадр со значением </a:t>
+            </a:r>
+            <a:r>
+              <a:rPr lang="ru-RU" b="1" dirty="0"/>
+              <a:t>VCI = 11</a:t>
+            </a:r>
+            <a:r>
+              <a:rPr lang="ru-RU" dirty="0"/>
+              <a:t> в заголовке. </a:t>
+            </a:r>
+            <a:r>
+              <a:rPr lang="ru-RU" b="1" dirty="0"/>
+              <a:t>Вопрос:</a:t>
+            </a:r>
+            <a:r>
+              <a:rPr lang="ru-RU" dirty="0"/>
+              <a:t> Через какой интерфейс коммутатор отправит этот кадр и какое значение VCI будет записано в его заголовке на выходе?</a:t>
+            </a:r>
+            <a:endParaRPr lang="ru-RU" dirty="0"/>
+          </a:p>
+        </p:txBody>
+      </p:sp>
+      <p:graphicFrame>
+        <p:nvGraphicFramePr>
+          <p:cNvPr id="6" name="Объект 5"/>
+          <p:cNvGraphicFramePr>
+            <a:graphicFrameLocks noGrp="1"/>
+          </p:cNvGraphicFramePr>
+          <p:nvPr>
+            <p:ph sz="half" idx="2"/>
+            <p:extLst>
+              <p:ext uri="{D42A27DB-BD31-4B8C-83A1-F6EECF244321}">
+                <p14:modId xmlns:p14="http://schemas.microsoft.com/office/powerpoint/2010/main" val="2281866047"/>
+              </p:ext>
+            </p:extLst>
+          </p:nvPr>
+        </p:nvGraphicFramePr>
+        <p:xfrm>
+          <a:off x="1141411" y="4070515"/>
+          <a:ext cx="9251096" cy="1055400"/>
+        </p:xfrm>
+        <a:graphic>
+          <a:graphicData uri="http://schemas.openxmlformats.org/drawingml/2006/table">
+            <a:tbl>
+              <a:tblPr/>
+              <a:tblGrid>
+                <a:gridCol w="2312774">
+                  <a:extLst>
+                    <a:ext uri="{9D8B030D-6E8A-4147-A177-3AD203B41FA5}">
+                      <a16:colId xmlns:a16="http://schemas.microsoft.com/office/drawing/2014/main" val="1189316071"/>
+                    </a:ext>
+                  </a:extLst>
+                </a:gridCol>
+                <a:gridCol w="2312774">
+                  <a:extLst>
+                    <a:ext uri="{9D8B030D-6E8A-4147-A177-3AD203B41FA5}">
+                      <a16:colId xmlns:a16="http://schemas.microsoft.com/office/drawing/2014/main" val="63714675"/>
+                    </a:ext>
+                  </a:extLst>
+                </a:gridCol>
+                <a:gridCol w="2312774">
+                  <a:extLst>
+                    <a:ext uri="{9D8B030D-6E8A-4147-A177-3AD203B41FA5}">
+                      <a16:colId xmlns:a16="http://schemas.microsoft.com/office/drawing/2014/main" val="2151466475"/>
+                    </a:ext>
+                  </a:extLst>
+                </a:gridCol>
+                <a:gridCol w="2312774">
+                  <a:extLst>
+                    <a:ext uri="{9D8B030D-6E8A-4147-A177-3AD203B41FA5}">
+                      <a16:colId xmlns:a16="http://schemas.microsoft.com/office/drawing/2014/main" val="2162776188"/>
+                    </a:ext>
+                  </a:extLst>
+                </a:gridCol>
+              </a:tblGrid>
+              <a:tr h="351800">
+                <a:tc>
+                  <a:txBody>
+                    <a:bodyPr/>
+                    <a:lstStyle/>
+                    <a:p>
+                      <a:pPr algn="ctr"/>
+                      <a:r>
+                        <a:rPr lang="ru-RU" sz="1600" b="1" dirty="0">
+                          <a:effectLst/>
+                        </a:rPr>
+                        <a:t>Входящий интерфейс</a:t>
+                      </a:r>
+                    </a:p>
+                  </a:txBody>
+                  <a:tcPr marL="46877" marR="46877" marT="23439" marB="23439" anchor="ctr">
+                    <a:lnL w="12700" cap="flat" cmpd="sng" algn="ctr">
+                      <a:solidFill>
+                        <a:schemeClr val="tx1"/>
+                      </a:solidFill>
+                      <a:prstDash val="solid"/>
+                      <a:round/>
+                      <a:headEnd type="none" w="med" len="med"/>
+                      <a:tailEnd type="none" w="med" len="med"/>
+                    </a:lnL>
+                    <a:lnR w="12700" cap="flat" cmpd="sng" algn="ctr">
+                      <a:solidFill>
+                        <a:schemeClr val="tx1"/>
+                      </a:solidFill>
+                      <a:prstDash val="solid"/>
+                      <a:round/>
+                      <a:headEnd type="none" w="med" len="med"/>
+                      <a:tailEnd type="none" w="med" len="med"/>
+                    </a:lnR>
+                    <a:lnT w="12700" cap="flat" cmpd="sng" algn="ctr">
+                      <a:solidFill>
+                        <a:schemeClr val="tx1"/>
+                      </a:solidFill>
+                      <a:prstDash val="solid"/>
+                      <a:round/>
+                      <a:headEnd type="none" w="med" len="med"/>
+                      <a:tailEnd type="none" w="med" len="med"/>
+                    </a:lnT>
+                    <a:lnB w="12700" cap="flat" cmpd="sng" algn="ctr">
+                      <a:solidFill>
+                        <a:schemeClr val="tx1"/>
+                      </a:solidFill>
+                      <a:prstDash val="solid"/>
+                      <a:round/>
+                      <a:headEnd type="none" w="med" len="med"/>
+                      <a:tailEnd type="none" w="med" len="med"/>
+                    </a:lnB>
+                  </a:tcPr>
+                </a:tc>
+                <a:tc>
+                  <a:txBody>
+                    <a:bodyPr/>
+                    <a:lstStyle/>
+                    <a:p>
+                      <a:pPr algn="ctr"/>
+                      <a:r>
+                        <a:rPr lang="ru-RU" sz="1600" b="1" dirty="0">
+                          <a:effectLst/>
+                        </a:rPr>
+                        <a:t>Входящий </a:t>
+                      </a:r>
+                      <a:r>
+                        <a:rPr lang="af-ZA" sz="1600" b="1" dirty="0">
+                          <a:effectLst/>
+                        </a:rPr>
+                        <a:t>VCI</a:t>
+                      </a:r>
+                    </a:p>
+                  </a:txBody>
+                  <a:tcPr marL="46877" marR="46877" marT="23439" marB="23439" anchor="ctr">
+                    <a:lnL w="12700" cap="flat" cmpd="sng" algn="ctr">
+                      <a:solidFill>
+                        <a:schemeClr val="tx1"/>
+                      </a:solidFill>
+                      <a:prstDash val="solid"/>
+                      <a:round/>
+                      <a:headEnd type="none" w="med" len="med"/>
+                      <a:tailEnd type="none" w="med" len="med"/>
+                    </a:lnL>
+                    <a:lnR w="12700" cap="flat" cmpd="sng" algn="ctr">
+                      <a:solidFill>
+                        <a:schemeClr val="tx1"/>
+                      </a:solidFill>
+                      <a:prstDash val="solid"/>
+                      <a:round/>
+                      <a:headEnd type="none" w="med" len="med"/>
+                      <a:tailEnd type="none" w="med" len="med"/>
+                    </a:lnR>
+                    <a:lnT w="12700" cap="flat" cmpd="sng" algn="ctr">
+                      <a:solidFill>
+                        <a:schemeClr val="tx1"/>
+                      </a:solidFill>
+                      <a:prstDash val="solid"/>
+                      <a:round/>
+                      <a:headEnd type="none" w="med" len="med"/>
+                      <a:tailEnd type="none" w="med" len="med"/>
+                    </a:lnT>
+                    <a:lnB w="12700" cap="flat" cmpd="sng" algn="ctr">
+                      <a:solidFill>
+                        <a:schemeClr val="tx1"/>
+                      </a:solidFill>
+                      <a:prstDash val="solid"/>
+                      <a:round/>
+                      <a:headEnd type="none" w="med" len="med"/>
+                      <a:tailEnd type="none" w="med" len="med"/>
+                    </a:lnB>
+                  </a:tcPr>
+                </a:tc>
+                <a:tc>
+                  <a:txBody>
+                    <a:bodyPr/>
+                    <a:lstStyle/>
+                    <a:p>
+                      <a:pPr algn="ctr"/>
+                      <a:r>
+                        <a:rPr lang="ru-RU" sz="1600" b="1">
+                          <a:effectLst/>
+                        </a:rPr>
+                        <a:t>Исходящий интерфейс</a:t>
+                      </a:r>
+                    </a:p>
+                  </a:txBody>
+                  <a:tcPr marL="46877" marR="46877" marT="23439" marB="23439" anchor="ctr">
+                    <a:lnL w="12700" cap="flat" cmpd="sng" algn="ctr">
+                      <a:solidFill>
+                        <a:schemeClr val="tx1"/>
+                      </a:solidFill>
+                      <a:prstDash val="solid"/>
+                      <a:round/>
+                      <a:headEnd type="none" w="med" len="med"/>
+                      <a:tailEnd type="none" w="med" len="med"/>
+                    </a:lnL>
+                    <a:lnR w="12700" cap="flat" cmpd="sng" algn="ctr">
+                      <a:solidFill>
+                        <a:schemeClr val="tx1"/>
+                      </a:solidFill>
+                      <a:prstDash val="solid"/>
+                      <a:round/>
+                      <a:headEnd type="none" w="med" len="med"/>
+                      <a:tailEnd type="none" w="med" len="med"/>
+                    </a:lnR>
+                    <a:lnT w="12700" cap="flat" cmpd="sng" algn="ctr">
+                      <a:solidFill>
+                        <a:schemeClr val="tx1"/>
+                      </a:solidFill>
+                      <a:prstDash val="solid"/>
+                      <a:round/>
+                      <a:headEnd type="none" w="med" len="med"/>
+                      <a:tailEnd type="none" w="med" len="med"/>
+                    </a:lnT>
+                    <a:lnB w="12700" cap="flat" cmpd="sng" algn="ctr">
+                      <a:solidFill>
+                        <a:schemeClr val="tx1"/>
+                      </a:solidFill>
+                      <a:prstDash val="solid"/>
+                      <a:round/>
+                      <a:headEnd type="none" w="med" len="med"/>
+                      <a:tailEnd type="none" w="med" len="med"/>
+                    </a:lnB>
+                  </a:tcPr>
+                </a:tc>
+                <a:tc>
+                  <a:txBody>
+                    <a:bodyPr/>
+                    <a:lstStyle/>
+                    <a:p>
+                      <a:pPr algn="ctr"/>
+                      <a:r>
+                        <a:rPr lang="ru-RU" sz="1600" b="1">
+                          <a:effectLst/>
+                        </a:rPr>
+                        <a:t>Исходящий </a:t>
+                      </a:r>
+                      <a:r>
+                        <a:rPr lang="af-ZA" sz="1600" b="1">
+                          <a:effectLst/>
+                        </a:rPr>
+                        <a:t>VCI</a:t>
+                      </a:r>
+                    </a:p>
+                  </a:txBody>
+                  <a:tcPr marL="46877" marR="46877" marT="23439" marB="23439" anchor="ctr">
+                    <a:lnL w="12700" cap="flat" cmpd="sng" algn="ctr">
+                      <a:solidFill>
+                        <a:schemeClr val="tx1"/>
+                      </a:solidFill>
+                      <a:prstDash val="solid"/>
+                      <a:round/>
+                      <a:headEnd type="none" w="med" len="med"/>
+                      <a:tailEnd type="none" w="med" len="med"/>
+                    </a:lnL>
+                    <a:lnR w="12700" cap="flat" cmpd="sng" algn="ctr">
+                      <a:solidFill>
+                        <a:schemeClr val="tx1"/>
+                      </a:solidFill>
+                      <a:prstDash val="solid"/>
+                      <a:round/>
+                      <a:headEnd type="none" w="med" len="med"/>
+                      <a:tailEnd type="none" w="med" len="med"/>
+                    </a:lnR>
+                    <a:lnT w="12700" cap="flat" cmpd="sng" algn="ctr">
+                      <a:solidFill>
+                        <a:schemeClr val="tx1"/>
+                      </a:solidFill>
+                      <a:prstDash val="solid"/>
+                      <a:round/>
+                      <a:headEnd type="none" w="med" len="med"/>
+                      <a:tailEnd type="none" w="med" len="med"/>
+                    </a:lnT>
+                    <a:lnB w="12700" cap="flat" cmpd="sng" algn="ctr">
+                      <a:solidFill>
+                        <a:schemeClr val="tx1"/>
+                      </a:solidFill>
+                      <a:prstDash val="solid"/>
+                      <a:round/>
+                      <a:headEnd type="none" w="med" len="med"/>
+                      <a:tailEnd type="none" w="med" len="med"/>
+                    </a:lnB>
+                  </a:tcPr>
+                </a:tc>
+                <a:extLst>
+                  <a:ext uri="{0D108BD9-81ED-4DB2-BD59-A6C34878D82A}">
+                    <a16:rowId xmlns:a16="http://schemas.microsoft.com/office/drawing/2014/main" val="2486349717"/>
+                  </a:ext>
+                </a:extLst>
+              </a:tr>
+              <a:tr h="351800">
+                <a:tc>
+                  <a:txBody>
+                    <a:bodyPr/>
+                    <a:lstStyle/>
+                    <a:p>
+                      <a:pPr algn="ctr"/>
+                      <a:r>
+                        <a:rPr lang="ru-RU" sz="1600" b="1" dirty="0">
+                          <a:effectLst/>
+                        </a:rPr>
+                        <a:t>3</a:t>
+                      </a:r>
+                    </a:p>
+                  </a:txBody>
+                  <a:tcPr marL="46877" marR="46877" marT="23439" marB="23439" anchor="ctr">
+                    <a:lnL w="12700" cap="flat" cmpd="sng" algn="ctr">
+                      <a:solidFill>
+                        <a:schemeClr val="tx1"/>
+                      </a:solidFill>
+                      <a:prstDash val="solid"/>
+                      <a:round/>
+                      <a:headEnd type="none" w="med" len="med"/>
+                      <a:tailEnd type="none" w="med" len="med"/>
+                    </a:lnL>
+                    <a:lnR w="12700" cap="flat" cmpd="sng" algn="ctr">
+                      <a:solidFill>
+                        <a:schemeClr val="tx1"/>
+                      </a:solidFill>
+                      <a:prstDash val="solid"/>
+                      <a:round/>
+                      <a:headEnd type="none" w="med" len="med"/>
+                      <a:tailEnd type="none" w="med" len="med"/>
+                    </a:lnR>
+                    <a:lnT w="12700" cap="flat" cmpd="sng" algn="ctr">
+                      <a:solidFill>
+                        <a:schemeClr val="tx1"/>
+                      </a:solidFill>
+                      <a:prstDash val="solid"/>
+                      <a:round/>
+                      <a:headEnd type="none" w="med" len="med"/>
+                      <a:tailEnd type="none" w="med" len="med"/>
+                    </a:lnT>
+                    <a:lnB w="12700" cap="flat" cmpd="sng" algn="ctr">
+                      <a:solidFill>
+                        <a:schemeClr val="tx1"/>
+                      </a:solidFill>
+                      <a:prstDash val="solid"/>
+                      <a:round/>
+                      <a:headEnd type="none" w="med" len="med"/>
+                      <a:tailEnd type="none" w="med" len="med"/>
+                    </a:lnB>
+                  </a:tcPr>
+                </a:tc>
+                <a:tc>
+                  <a:txBody>
+                    <a:bodyPr/>
+                    <a:lstStyle/>
+                    <a:p>
+                      <a:pPr algn="ctr"/>
+                      <a:r>
+                        <a:rPr lang="ru-RU" sz="1600" b="1" dirty="0">
+                          <a:effectLst/>
+                        </a:rPr>
+                        <a:t>11</a:t>
+                      </a:r>
+                    </a:p>
+                  </a:txBody>
+                  <a:tcPr marL="46877" marR="46877" marT="23439" marB="23439" anchor="ctr">
+                    <a:lnL w="12700" cap="flat" cmpd="sng" algn="ctr">
+                      <a:solidFill>
+                        <a:schemeClr val="tx1"/>
+                      </a:solidFill>
+                      <a:prstDash val="solid"/>
+                      <a:round/>
+                      <a:headEnd type="none" w="med" len="med"/>
+                      <a:tailEnd type="none" w="med" len="med"/>
+                    </a:lnL>
+                    <a:lnR w="12700" cap="flat" cmpd="sng" algn="ctr">
+                      <a:solidFill>
+                        <a:schemeClr val="tx1"/>
+                      </a:solidFill>
+                      <a:prstDash val="solid"/>
+                      <a:round/>
+                      <a:headEnd type="none" w="med" len="med"/>
+                      <a:tailEnd type="none" w="med" len="med"/>
+                    </a:lnR>
+                    <a:lnT w="12700" cap="flat" cmpd="sng" algn="ctr">
+                      <a:solidFill>
+                        <a:schemeClr val="tx1"/>
+                      </a:solidFill>
+                      <a:prstDash val="solid"/>
+                      <a:round/>
+                      <a:headEnd type="none" w="med" len="med"/>
+                      <a:tailEnd type="none" w="med" len="med"/>
+                    </a:lnT>
+                    <a:lnB w="12700" cap="flat" cmpd="sng" algn="ctr">
+                      <a:solidFill>
+                        <a:schemeClr val="tx1"/>
+                      </a:solidFill>
+                      <a:prstDash val="solid"/>
+                      <a:round/>
+                      <a:headEnd type="none" w="med" len="med"/>
+                      <a:tailEnd type="none" w="med" len="med"/>
+                    </a:lnB>
+                  </a:tcPr>
+                </a:tc>
+                <a:tc>
+                  <a:txBody>
+                    <a:bodyPr/>
+                    <a:lstStyle/>
+                    <a:p>
+                      <a:pPr algn="ctr"/>
+                      <a:r>
+                        <a:rPr lang="ru-RU" sz="1600" b="1" dirty="0">
+                          <a:effectLst/>
+                        </a:rPr>
+                        <a:t>2</a:t>
+                      </a:r>
+                    </a:p>
+                  </a:txBody>
+                  <a:tcPr marL="46877" marR="46877" marT="23439" marB="23439" anchor="ctr">
+                    <a:lnL w="12700" cap="flat" cmpd="sng" algn="ctr">
+                      <a:solidFill>
+                        <a:schemeClr val="tx1"/>
+                      </a:solidFill>
+                      <a:prstDash val="solid"/>
+                      <a:round/>
+                      <a:headEnd type="none" w="med" len="med"/>
+                      <a:tailEnd type="none" w="med" len="med"/>
+                    </a:lnL>
+                    <a:lnR w="12700" cap="flat" cmpd="sng" algn="ctr">
+                      <a:solidFill>
+                        <a:schemeClr val="tx1"/>
+                      </a:solidFill>
+                      <a:prstDash val="solid"/>
+                      <a:round/>
+                      <a:headEnd type="none" w="med" len="med"/>
+                      <a:tailEnd type="none" w="med" len="med"/>
+                    </a:lnR>
+                    <a:lnT w="12700" cap="flat" cmpd="sng" algn="ctr">
+                      <a:solidFill>
+                        <a:schemeClr val="tx1"/>
+                      </a:solidFill>
+                      <a:prstDash val="solid"/>
+                      <a:round/>
+                      <a:headEnd type="none" w="med" len="med"/>
+                      <a:tailEnd type="none" w="med" len="med"/>
+                    </a:lnT>
+                    <a:lnB w="12700" cap="flat" cmpd="sng" algn="ctr">
+                      <a:solidFill>
+                        <a:schemeClr val="tx1"/>
+                      </a:solidFill>
+                      <a:prstDash val="solid"/>
+                      <a:round/>
+                      <a:headEnd type="none" w="med" len="med"/>
+                      <a:tailEnd type="none" w="med" len="med"/>
+                    </a:lnB>
+                  </a:tcPr>
+                </a:tc>
+                <a:tc>
+                  <a:txBody>
+                    <a:bodyPr/>
+                    <a:lstStyle/>
+                    <a:p>
+                      <a:pPr algn="ctr"/>
+                      <a:r>
+                        <a:rPr lang="ru-RU" sz="1600" b="1" dirty="0">
+                          <a:effectLst/>
+                        </a:rPr>
+                        <a:t>7</a:t>
+                      </a:r>
+                    </a:p>
+                  </a:txBody>
+                  <a:tcPr marL="46877" marR="46877" marT="23439" marB="23439" anchor="ctr">
+                    <a:lnL w="12700" cap="flat" cmpd="sng" algn="ctr">
+                      <a:solidFill>
+                        <a:schemeClr val="tx1"/>
+                      </a:solidFill>
+                      <a:prstDash val="solid"/>
+                      <a:round/>
+                      <a:headEnd type="none" w="med" len="med"/>
+                      <a:tailEnd type="none" w="med" len="med"/>
+                    </a:lnL>
+                    <a:lnR w="12700" cap="flat" cmpd="sng" algn="ctr">
+                      <a:solidFill>
+                        <a:schemeClr val="tx1"/>
+                      </a:solidFill>
+                      <a:prstDash val="solid"/>
+                      <a:round/>
+                      <a:headEnd type="none" w="med" len="med"/>
+                      <a:tailEnd type="none" w="med" len="med"/>
+                    </a:lnR>
+                    <a:lnT w="12700" cap="flat" cmpd="sng" algn="ctr">
+                      <a:solidFill>
+                        <a:schemeClr val="tx1"/>
+                      </a:solidFill>
+                      <a:prstDash val="solid"/>
+                      <a:round/>
+                      <a:headEnd type="none" w="med" len="med"/>
+                      <a:tailEnd type="none" w="med" len="med"/>
+                    </a:lnT>
+                    <a:lnB w="12700" cap="flat" cmpd="sng" algn="ctr">
+                      <a:solidFill>
+                        <a:schemeClr val="tx1"/>
+                      </a:solidFill>
+                      <a:prstDash val="solid"/>
+                      <a:round/>
+                      <a:headEnd type="none" w="med" len="med"/>
+                      <a:tailEnd type="none" w="med" len="med"/>
+                    </a:lnB>
+                  </a:tcPr>
+                </a:tc>
+                <a:extLst>
+                  <a:ext uri="{0D108BD9-81ED-4DB2-BD59-A6C34878D82A}">
+                    <a16:rowId xmlns:a16="http://schemas.microsoft.com/office/drawing/2014/main" val="3117077400"/>
+                  </a:ext>
+                </a:extLst>
+              </a:tr>
+              <a:tr h="351800">
+                <a:tc>
+                  <a:txBody>
+                    <a:bodyPr/>
+                    <a:lstStyle/>
+                    <a:p>
+                      <a:pPr algn="ctr"/>
+                      <a:r>
+                        <a:rPr lang="ru-RU" sz="1600" b="1">
+                          <a:effectLst/>
+                        </a:rPr>
+                        <a:t>0</a:t>
+                      </a:r>
+                    </a:p>
+                  </a:txBody>
+                  <a:tcPr marL="46877" marR="46877" marT="23439" marB="23439" anchor="ctr">
+                    <a:lnL w="12700" cap="flat" cmpd="sng" algn="ctr">
+                      <a:solidFill>
+                        <a:schemeClr val="tx1"/>
+                      </a:solidFill>
+                      <a:prstDash val="solid"/>
+                      <a:round/>
+                      <a:headEnd type="none" w="med" len="med"/>
+                      <a:tailEnd type="none" w="med" len="med"/>
+                    </a:lnL>
+                    <a:lnR w="12700" cap="flat" cmpd="sng" algn="ctr">
+                      <a:solidFill>
+                        <a:schemeClr val="tx1"/>
+                      </a:solidFill>
+                      <a:prstDash val="solid"/>
+                      <a:round/>
+                      <a:headEnd type="none" w="med" len="med"/>
+                      <a:tailEnd type="none" w="med" len="med"/>
+                    </a:lnR>
+                    <a:lnT w="12700" cap="flat" cmpd="sng" algn="ctr">
+                      <a:solidFill>
+                        <a:schemeClr val="tx1"/>
+                      </a:solidFill>
+                      <a:prstDash val="solid"/>
+                      <a:round/>
+                      <a:headEnd type="none" w="med" len="med"/>
+                      <a:tailEnd type="none" w="med" len="med"/>
+                    </a:lnT>
+                    <a:lnB w="12700" cap="flat" cmpd="sng" algn="ctr">
+                      <a:solidFill>
+                        <a:schemeClr val="tx1"/>
+                      </a:solidFill>
+                      <a:prstDash val="solid"/>
+                      <a:round/>
+                      <a:headEnd type="none" w="med" len="med"/>
+                      <a:tailEnd type="none" w="med" len="med"/>
+                    </a:lnB>
+                  </a:tcPr>
+                </a:tc>
+                <a:tc>
+                  <a:txBody>
+                    <a:bodyPr/>
+                    <a:lstStyle/>
+                    <a:p>
+                      <a:pPr algn="ctr"/>
+                      <a:r>
+                        <a:rPr lang="ru-RU" sz="1600" b="1">
+                          <a:effectLst/>
+                        </a:rPr>
+                        <a:t>5</a:t>
+                      </a:r>
+                    </a:p>
+                  </a:txBody>
+                  <a:tcPr marL="46877" marR="46877" marT="23439" marB="23439" anchor="ctr">
+                    <a:lnL w="12700" cap="flat" cmpd="sng" algn="ctr">
+                      <a:solidFill>
+                        <a:schemeClr val="tx1"/>
+                      </a:solidFill>
+                      <a:prstDash val="solid"/>
+                      <a:round/>
+                      <a:headEnd type="none" w="med" len="med"/>
+                      <a:tailEnd type="none" w="med" len="med"/>
+                    </a:lnL>
+                    <a:lnR w="12700" cap="flat" cmpd="sng" algn="ctr">
+                      <a:solidFill>
+                        <a:schemeClr val="tx1"/>
+                      </a:solidFill>
+                      <a:prstDash val="solid"/>
+                      <a:round/>
+                      <a:headEnd type="none" w="med" len="med"/>
+                      <a:tailEnd type="none" w="med" len="med"/>
+                    </a:lnR>
+                    <a:lnT w="12700" cap="flat" cmpd="sng" algn="ctr">
+                      <a:solidFill>
+                        <a:schemeClr val="tx1"/>
+                      </a:solidFill>
+                      <a:prstDash val="solid"/>
+                      <a:round/>
+                      <a:headEnd type="none" w="med" len="med"/>
+                      <a:tailEnd type="none" w="med" len="med"/>
+                    </a:lnT>
+                    <a:lnB w="12700" cap="flat" cmpd="sng" algn="ctr">
+                      <a:solidFill>
+                        <a:schemeClr val="tx1"/>
+                      </a:solidFill>
+                      <a:prstDash val="solid"/>
+                      <a:round/>
+                      <a:headEnd type="none" w="med" len="med"/>
+                      <a:tailEnd type="none" w="med" len="med"/>
+                    </a:lnB>
+                  </a:tcPr>
+                </a:tc>
+                <a:tc>
+                  <a:txBody>
+                    <a:bodyPr/>
+                    <a:lstStyle/>
+                    <a:p>
+                      <a:pPr algn="ctr"/>
+                      <a:r>
+                        <a:rPr lang="ru-RU" sz="1600" b="1" dirty="0">
+                          <a:effectLst/>
+                        </a:rPr>
+                        <a:t>1</a:t>
+                      </a:r>
+                    </a:p>
+                  </a:txBody>
+                  <a:tcPr marL="46877" marR="46877" marT="23439" marB="23439" anchor="ctr">
+                    <a:lnL w="12700" cap="flat" cmpd="sng" algn="ctr">
+                      <a:solidFill>
+                        <a:schemeClr val="tx1"/>
+                      </a:solidFill>
+                      <a:prstDash val="solid"/>
+                      <a:round/>
+                      <a:headEnd type="none" w="med" len="med"/>
+                      <a:tailEnd type="none" w="med" len="med"/>
+                    </a:lnL>
+                    <a:lnR w="12700" cap="flat" cmpd="sng" algn="ctr">
+                      <a:solidFill>
+                        <a:schemeClr val="tx1"/>
+                      </a:solidFill>
+                      <a:prstDash val="solid"/>
+                      <a:round/>
+                      <a:headEnd type="none" w="med" len="med"/>
+                      <a:tailEnd type="none" w="med" len="med"/>
+                    </a:lnR>
+                    <a:lnT w="12700" cap="flat" cmpd="sng" algn="ctr">
+                      <a:solidFill>
+                        <a:schemeClr val="tx1"/>
+                      </a:solidFill>
+                      <a:prstDash val="solid"/>
+                      <a:round/>
+                      <a:headEnd type="none" w="med" len="med"/>
+                      <a:tailEnd type="none" w="med" len="med"/>
+                    </a:lnT>
+                    <a:lnB w="12700" cap="flat" cmpd="sng" algn="ctr">
+                      <a:solidFill>
+                        <a:schemeClr val="tx1"/>
+                      </a:solidFill>
+                      <a:prstDash val="solid"/>
+                      <a:round/>
+                      <a:headEnd type="none" w="med" len="med"/>
+                      <a:tailEnd type="none" w="med" len="med"/>
+                    </a:lnB>
+                  </a:tcPr>
+                </a:tc>
+                <a:tc>
+                  <a:txBody>
+                    <a:bodyPr/>
+                    <a:lstStyle/>
+                    <a:p>
+                      <a:pPr algn="ctr"/>
+                      <a:r>
+                        <a:rPr lang="ru-RU" sz="1600" b="1" dirty="0">
+                          <a:effectLst/>
+                        </a:rPr>
+                        <a:t>12</a:t>
+                      </a:r>
+                    </a:p>
+                  </a:txBody>
+                  <a:tcPr marL="46877" marR="46877" marT="23439" marB="23439" anchor="ctr">
+                    <a:lnL w="12700" cap="flat" cmpd="sng" algn="ctr">
+                      <a:solidFill>
+                        <a:schemeClr val="tx1"/>
+                      </a:solidFill>
+                      <a:prstDash val="solid"/>
+                      <a:round/>
+                      <a:headEnd type="none" w="med" len="med"/>
+                      <a:tailEnd type="none" w="med" len="med"/>
+                    </a:lnL>
+                    <a:lnR w="12700" cap="flat" cmpd="sng" algn="ctr">
+                      <a:solidFill>
+                        <a:schemeClr val="tx1"/>
+                      </a:solidFill>
+                      <a:prstDash val="solid"/>
+                      <a:round/>
+                      <a:headEnd type="none" w="med" len="med"/>
+                      <a:tailEnd type="none" w="med" len="med"/>
+                    </a:lnR>
+                    <a:lnT w="12700" cap="flat" cmpd="sng" algn="ctr">
+                      <a:solidFill>
+                        <a:schemeClr val="tx1"/>
+                      </a:solidFill>
+                      <a:prstDash val="solid"/>
+                      <a:round/>
+                      <a:headEnd type="none" w="med" len="med"/>
+                      <a:tailEnd type="none" w="med" len="med"/>
+                    </a:lnT>
+                    <a:lnB w="12700" cap="flat" cmpd="sng" algn="ctr">
+                      <a:solidFill>
+                        <a:schemeClr val="tx1"/>
+                      </a:solidFill>
+                      <a:prstDash val="solid"/>
+                      <a:round/>
+                      <a:headEnd type="none" w="med" len="med"/>
+                      <a:tailEnd type="none" w="med" len="med"/>
+                    </a:lnB>
+                  </a:tcPr>
+                </a:tc>
+                <a:extLst>
+                  <a:ext uri="{0D108BD9-81ED-4DB2-BD59-A6C34878D82A}">
+                    <a16:rowId xmlns:a16="http://schemas.microsoft.com/office/drawing/2014/main" val="1633814772"/>
+                  </a:ext>
+                </a:extLst>
+              </a:tr>
+            </a:tbl>
+          </a:graphicData>
+        </a:graphic>
+      </p:graphicFrame>
+      <p:sp>
+        <p:nvSpPr>
+          <p:cNvPr id="7" name="Rectangle 1"/>
+          <p:cNvSpPr>
+            <a:spLocks noChangeArrowheads="1"/>
+          </p:cNvSpPr>
+          <p:nvPr/>
+        </p:nvSpPr>
+        <p:spPr bwMode="auto">
+          <a:xfrm>
+            <a:off x="0" y="0"/>
+            <a:ext cx="12192000" cy="0"/>
+          </a:xfrm>
+          <a:prstGeom prst="rect">
+            <a:avLst/>
+          </a:prstGeom>
+          <a:noFill/>
+          <a:ln>
+            <a:noFill/>
+          </a:ln>
+          <a:effectLst/>
+          <a:extLst>
+            <a:ext uri="{909E8E84-426E-40DD-AFC4-6F175D3DCCD1}">
+              <a14:hiddenFill xmlns:a14="http://schemas.microsoft.com/office/drawing/2010/main">
+                <a:solidFill>
+                  <a:schemeClr val="accent1"/>
+                </a:solidFill>
+              </a14:hiddenFill>
+            </a:ext>
+            <a:ext uri="{91240B29-F687-4F45-9708-019B960494DF}">
+              <a14:hiddenLine xmlns:a14="http://schemas.microsoft.com/office/drawing/2010/main" w="9525">
+                <a:solidFill>
+                  <a:schemeClr val="tx1"/>
+                </a:solidFill>
+                <a:miter lim="800000"/>
+                <a:headEnd/>
+                <a:tailEnd/>
+              </a14:hiddenLine>
+            </a:ext>
+            <a:ext uri="{AF507438-7753-43E0-B8FC-AC1667EBCBE1}">
+              <a14:hiddenEffects xmlns:a14="http://schemas.microsoft.com/office/drawing/2010/main">
+                <a:effectLst>
+                  <a:outerShdw dist="35921" dir="2700000" algn="ctr" rotWithShape="0">
+                    <a:schemeClr val="bg2"/>
+                  </a:outerShdw>
+                </a:effectLst>
+              </a14:hiddenEffects>
+            </a:ext>
+          </a:extLst>
+        </p:spPr>
+        <p:txBody>
+          <a:bodyPr vert="horz" wrap="none" lIns="91440" tIns="45720" rIns="91440" bIns="45720" numCol="1" anchor="ctr" anchorCtr="0" compatLnSpc="1">
+            <a:prstTxWarp prst="textNoShape">
+              <a:avLst/>
+            </a:prstTxWarp>
+            <a:spAutoFit/>
+          </a:bodyPr>
+          <a:lstStyle/>
+          <a:p>
+            <a:pPr marL="0" marR="0" lvl="0" indent="0" algn="l" defTabSz="914400" rtl="0" eaLnBrk="0" fontAlgn="base" latinLnBrk="0" hangingPunct="0">
+              <a:lnSpc>
+                <a:spcPct val="100000"/>
+              </a:lnSpc>
+              <a:spcBef>
+                <a:spcPct val="0"/>
+              </a:spcBef>
+              <a:spcAft>
+                <a:spcPct val="0"/>
+              </a:spcAft>
+              <a:buClrTx/>
+              <a:buSzTx/>
+              <a:buFontTx/>
+              <a:buNone/>
+              <a:tabLst/>
+            </a:pPr>
+            <a:r>
+              <a:rPr kumimoji="0" lang="ru-RU" altLang="ru-RU" sz="1800" b="0" i="0" u="none" strike="noStrike" cap="none" normalizeH="0" baseline="0" smtClean="0">
+                <a:ln>
+                  <a:noFill/>
+                </a:ln>
+                <a:solidFill>
+                  <a:schemeClr val="tx1"/>
+                </a:solidFill>
+                <a:effectLst/>
+                <a:latin typeface="Arial" panose="020B0604020202020204" pitchFamily="34" charset="0"/>
+              </a:rPr>
+              <a:t/>
+            </a:r>
+            <a:br>
+              <a:rPr kumimoji="0" lang="ru-RU" altLang="ru-RU" sz="1800" b="0" i="0" u="none" strike="noStrike" cap="none" normalizeH="0" baseline="0" smtClean="0">
+                <a:ln>
+                  <a:noFill/>
+                </a:ln>
+                <a:solidFill>
+                  <a:schemeClr val="tx1"/>
+                </a:solidFill>
+                <a:effectLst/>
+                <a:latin typeface="Arial" panose="020B0604020202020204" pitchFamily="34" charset="0"/>
+              </a:rPr>
+            </a:br>
+            <a:endParaRPr kumimoji="0" lang="ru-RU" altLang="ru-RU" sz="1800" b="0" i="0" u="none" strike="noStrike" cap="none" normalizeH="0" baseline="0" smtClean="0">
+              <a:ln>
+                <a:noFill/>
+              </a:ln>
+              <a:solidFill>
+                <a:schemeClr val="tx1"/>
+              </a:solidFill>
+              <a:effectLst/>
+              <a:latin typeface="Arial" panose="020B0604020202020204" pitchFamily="34" charset="0"/>
+            </a:endParaRPr>
+          </a:p>
+        </p:txBody>
+      </p:sp>
+    </p:spTree>
+    <p:extLst>
+      <p:ext uri="{BB962C8B-B14F-4D97-AF65-F5344CB8AC3E}">
+        <p14:creationId xmlns:p14="http://schemas.microsoft.com/office/powerpoint/2010/main" val="4082141234"/>
+      </p:ext>
+    </p:extLst>
+  </p:cSld>
+  <p:clrMapOvr>
+    <a:masterClrMapping/>
+  </p:clrMapOvr>
+</p:sld>
+</file>
+
+<file path=ppt/slides/slide12.xml><?xml version="1.0" encoding="utf-8"?>
+<p:sld xmlns:a="http://schemas.openxmlformats.org/drawingml/2006/main" xmlns:r="http://schemas.openxmlformats.org/officeDocument/2006/relationships" xmlns:p="http://schemas.openxmlformats.org/presentationml/2006/main">
+  <p:cSld>
+    <p:spTree>
+      <p:nvGrpSpPr>
+        <p:cNvPr id="1" name=""/>
+        <p:cNvGrpSpPr/>
+        <p:nvPr/>
+      </p:nvGrpSpPr>
+      <p:grpSpPr>
+        <a:xfrm>
+          <a:off x="0" y="0"/>
+          <a:ext cx="0" cy="0"/>
+          <a:chOff x="0" y="0"/>
+          <a:chExt cx="0" cy="0"/>
+        </a:xfrm>
+      </p:grpSpPr>
+      <p:sp>
+        <p:nvSpPr>
+          <p:cNvPr id="5" name="Заголовок 4"/>
+          <p:cNvSpPr>
+            <a:spLocks noGrp="1"/>
+          </p:cNvSpPr>
+          <p:nvPr>
+            <p:ph type="title"/>
+          </p:nvPr>
+        </p:nvSpPr>
+        <p:spPr/>
+        <p:txBody>
+          <a:bodyPr/>
+          <a:lstStyle/>
+          <a:p>
+            <a:r>
+              <a:rPr lang="ru-RU" dirty="0"/>
+              <a:t>Определите, верны ли следующие утверждения:</a:t>
+            </a:r>
+            <a:endParaRPr lang="ru-RU" dirty="0"/>
+          </a:p>
+        </p:txBody>
+      </p:sp>
+      <p:sp>
+        <p:nvSpPr>
+          <p:cNvPr id="6" name="Объект 5"/>
+          <p:cNvSpPr>
+            <a:spLocks noGrp="1"/>
+          </p:cNvSpPr>
+          <p:nvPr>
+            <p:ph idx="1"/>
+          </p:nvPr>
+        </p:nvSpPr>
+        <p:spPr/>
+        <p:txBody>
+          <a:bodyPr/>
+          <a:lstStyle/>
+          <a:p>
+            <a:r>
+              <a:rPr lang="ru-RU" b="1" dirty="0"/>
+              <a:t>[ Да / Нет ]</a:t>
+            </a:r>
+            <a:r>
+              <a:rPr lang="ru-RU" dirty="0"/>
+              <a:t> Сетевой коммутатор (L2-switch) принимает решения о пересылке кадров, работая на третьем (сетевом) уровне модели OSI.</a:t>
+            </a:r>
+          </a:p>
+          <a:p>
+            <a:r>
+              <a:rPr lang="ru-RU" b="1" dirty="0"/>
+              <a:t>[ Да / Нет ]</a:t>
+            </a:r>
+            <a:r>
+              <a:rPr lang="ru-RU" dirty="0"/>
+              <a:t> В коммутируемой сети с топологией «звезда» узлы могут передавать данные одновременно на полной скорости канала (при достаточной производительности коммутатора).</a:t>
+            </a:r>
+          </a:p>
+          <a:p>
+            <a:r>
+              <a:rPr lang="ru-RU" b="1" dirty="0"/>
+              <a:t>[ Да / Нет ]</a:t>
+            </a:r>
+            <a:r>
+              <a:rPr lang="ru-RU" dirty="0"/>
+              <a:t> Идентификатор виртуального канала (VCI) является глобально уникальным во всей мировой сети (как MAC-адрес).</a:t>
+            </a:r>
+          </a:p>
+          <a:p>
+            <a:pPr marL="0" indent="0">
+              <a:buNone/>
+            </a:pPr>
+            <a:endParaRPr lang="ru-RU" dirty="0"/>
+          </a:p>
+        </p:txBody>
+      </p:sp>
+    </p:spTree>
+    <p:extLst>
+      <p:ext uri="{BB962C8B-B14F-4D97-AF65-F5344CB8AC3E}">
+        <p14:creationId xmlns:p14="http://schemas.microsoft.com/office/powerpoint/2010/main" val="3076644338"/>
+      </p:ext>
+    </p:extLst>
+  </p:cSld>
+  <p:clrMapOvr>
+    <a:masterClrMapping/>
+  </p:clrMapOvr>
+</p:sld>
+</file>
+
+<file path=ppt/slides/slide13.xml><?xml version="1.0" encoding="utf-8"?>
+<p:sld xmlns:a="http://schemas.openxmlformats.org/drawingml/2006/main" xmlns:r="http://schemas.openxmlformats.org/officeDocument/2006/relationships" xmlns:p="http://schemas.openxmlformats.org/presentationml/2006/main">
+  <p:cSld>
+    <p:spTree>
+      <p:nvGrpSpPr>
+        <p:cNvPr id="1" name=""/>
+        <p:cNvGrpSpPr/>
+        <p:nvPr/>
+      </p:nvGrpSpPr>
+      <p:grpSpPr>
+        <a:xfrm>
+          <a:off x="0" y="0"/>
+          <a:ext cx="0" cy="0"/>
+          <a:chOff x="0" y="0"/>
+          <a:chExt cx="0" cy="0"/>
+        </a:xfrm>
+      </p:grpSpPr>
+      <p:sp>
+        <p:nvSpPr>
+          <p:cNvPr id="2" name="Заголовок 1"/>
+          <p:cNvSpPr>
+            <a:spLocks noGrp="1"/>
+          </p:cNvSpPr>
+          <p:nvPr>
+            <p:ph type="title"/>
+          </p:nvPr>
+        </p:nvSpPr>
+        <p:spPr/>
+        <p:txBody>
+          <a:bodyPr/>
+          <a:lstStyle/>
+          <a:p>
+            <a:r>
+              <a:rPr lang="ru-RU" dirty="0"/>
+              <a:t>Вставьте пропущенные ключевые термины вместо многоточий:</a:t>
+            </a:r>
+            <a:endParaRPr lang="ru-RU" dirty="0"/>
+          </a:p>
+        </p:txBody>
+      </p:sp>
+      <p:sp>
+        <p:nvSpPr>
+          <p:cNvPr id="3" name="Объект 2"/>
+          <p:cNvSpPr>
+            <a:spLocks noGrp="1"/>
+          </p:cNvSpPr>
+          <p:nvPr>
+            <p:ph idx="1"/>
+          </p:nvPr>
+        </p:nvSpPr>
+        <p:spPr>
+          <a:xfrm>
+            <a:off x="1141413" y="3093548"/>
+            <a:ext cx="10209457" cy="1944444"/>
+          </a:xfrm>
+        </p:spPr>
+        <p:txBody>
+          <a:bodyPr/>
+          <a:lstStyle/>
+          <a:p>
+            <a:pPr marL="0" indent="0">
+              <a:buNone/>
+            </a:pPr>
+            <a:r>
+              <a:rPr lang="ru-RU" dirty="0"/>
+              <a:t>«В отличие от сетей виртуальных каналов, </a:t>
+            </a:r>
+            <a:r>
+              <a:rPr lang="ru-RU" dirty="0" err="1"/>
+              <a:t>датаграммные</a:t>
+            </a:r>
+            <a:r>
+              <a:rPr lang="ru-RU" dirty="0"/>
+              <a:t> сети работают без предварительного ............ соединения. При этом коммутатор принимает решение о пересылке каждого кадра на основе таблицы ............ .»</a:t>
+            </a:r>
+            <a:endParaRPr lang="ru-RU" dirty="0"/>
+          </a:p>
+        </p:txBody>
+      </p:sp>
+    </p:spTree>
+    <p:extLst>
+      <p:ext uri="{BB962C8B-B14F-4D97-AF65-F5344CB8AC3E}">
+        <p14:creationId xmlns:p14="http://schemas.microsoft.com/office/powerpoint/2010/main" val="3761616292"/>
+      </p:ext>
+    </p:extLst>
+  </p:cSld>
+  <p:clrMapOvr>
+    <a:masterClrMapping/>
+  </p:clrMapOvr>
 </p:sld>
 </file>
 
@@ -12597,11 +13886,7 @@
             </a:r>
             <a:r>
               <a:rPr lang="ru-RU" dirty="0"/>
-              <a:t> — </a:t>
-            </a:r>
-            <a:r>
-              <a:rPr lang="ru-RU" dirty="0"/>
-              <a:t>концепция объединения сетей на основе одинаковых или разнородных канальных технологий в единую масштабируемую сеть.</a:t>
+              <a:t> — концепция объединения сетей на основе одинаковых или разнородных канальных технологий в единую масштабируемую сеть.</a:t>
             </a:r>
           </a:p>
           <a:p>

--- a/1.5 Switching Basic/1.5 Switching Basic.pptx
+++ b/1.5 Switching Basic/1.5 Switching Basic.pptx
@@ -8,16 +8,16 @@
     <p:sldId id="256" r:id="rId2"/>
     <p:sldId id="257" r:id="rId3"/>
     <p:sldId id="258" r:id="rId4"/>
-    <p:sldId id="259" r:id="rId5"/>
-    <p:sldId id="260" r:id="rId6"/>
+    <p:sldId id="269" r:id="rId5"/>
+    <p:sldId id="259" r:id="rId6"/>
     <p:sldId id="261" r:id="rId7"/>
-    <p:sldId id="262" r:id="rId8"/>
+    <p:sldId id="260" r:id="rId8"/>
     <p:sldId id="263" r:id="rId9"/>
-    <p:sldId id="264" r:id="rId10"/>
-    <p:sldId id="265" r:id="rId11"/>
-    <p:sldId id="266" r:id="rId12"/>
-    <p:sldId id="267" r:id="rId13"/>
-    <p:sldId id="268" r:id="rId14"/>
+    <p:sldId id="262" r:id="rId10"/>
+    <p:sldId id="264" r:id="rId11"/>
+    <p:sldId id="265" r:id="rId12"/>
+    <p:sldId id="266" r:id="rId13"/>
+    <p:sldId id="267" r:id="rId14"/>
   </p:sldIdLst>
   <p:sldSz cx="12192000" cy="6858000"/>
   <p:notesSz cx="6858000" cy="9144000"/>
@@ -181,7 +181,7 @@
           <a:noFill/>
           <a:extLst>
             <a:ext uri="{909E8E84-426E-40dd-AFC4-6F175D3DCCD1}">
-              <a14:hiddenFill xmlns="" xmlns:a14="http://schemas.microsoft.com/office/drawing/2010/main">
+              <a14:hiddenFill xmlns:a14="http://schemas.microsoft.com/office/drawing/2010/main" xmlns="">
                 <a:solidFill>
                   <a:srgbClr val="FFFFFF"/>
                 </a:solidFill>
@@ -240,7 +240,7 @@
             </a:ln>
             <a:extLst>
               <a:ext uri="{91240B29-F687-4f45-9708-019B960494DF}">
-                <a14:hiddenLine xmlns="" xmlns:a14="http://schemas.microsoft.com/office/drawing/2010/main" w="9525">
+                <a14:hiddenLine xmlns:a14="http://schemas.microsoft.com/office/drawing/2010/main" xmlns="" w="9525">
                   <a:solidFill>
                     <a:srgbClr val="000000"/>
                   </a:solidFill>
@@ -330,7 +330,7 @@
             </a:ln>
             <a:extLst>
               <a:ext uri="{91240B29-F687-4f45-9708-019B960494DF}">
-                <a14:hiddenLine xmlns="" xmlns:a14="http://schemas.microsoft.com/office/drawing/2010/main" w="9525">
+                <a14:hiddenLine xmlns:a14="http://schemas.microsoft.com/office/drawing/2010/main" xmlns="" w="9525">
                   <a:solidFill>
                     <a:srgbClr val="000000"/>
                   </a:solidFill>
@@ -420,7 +420,7 @@
             </a:ln>
             <a:extLst>
               <a:ext uri="{91240B29-F687-4f45-9708-019B960494DF}">
-                <a14:hiddenLine xmlns="" xmlns:a14="http://schemas.microsoft.com/office/drawing/2010/main" w="9525">
+                <a14:hiddenLine xmlns:a14="http://schemas.microsoft.com/office/drawing/2010/main" xmlns="" w="9525">
                   <a:solidFill>
                     <a:srgbClr val="000000"/>
                   </a:solidFill>
@@ -454,7 +454,7 @@
             </a:ln>
             <a:extLst>
               <a:ext uri="{91240B29-F687-4f45-9708-019B960494DF}">
-                <a14:hiddenLine xmlns="" xmlns:a14="http://schemas.microsoft.com/office/drawing/2010/main" w="9525">
+                <a14:hiddenLine xmlns:a14="http://schemas.microsoft.com/office/drawing/2010/main" xmlns="" w="9525">
                   <a:solidFill>
                     <a:srgbClr val="000000"/>
                   </a:solidFill>
@@ -544,7 +544,7 @@
             </a:ln>
             <a:extLst>
               <a:ext uri="{91240B29-F687-4f45-9708-019B960494DF}">
-                <a14:hiddenLine xmlns="" xmlns:a14="http://schemas.microsoft.com/office/drawing/2010/main" w="9525">
+                <a14:hiddenLine xmlns:a14="http://schemas.microsoft.com/office/drawing/2010/main" xmlns="" w="9525">
                   <a:solidFill>
                     <a:srgbClr val="000000"/>
                   </a:solidFill>
@@ -606,7 +606,7 @@
             </a:ln>
             <a:extLst>
               <a:ext uri="{91240B29-F687-4f45-9708-019B960494DF}">
-                <a14:hiddenLine xmlns="" xmlns:a14="http://schemas.microsoft.com/office/drawing/2010/main" w="9525">
+                <a14:hiddenLine xmlns:a14="http://schemas.microsoft.com/office/drawing/2010/main" xmlns="" w="9525">
                   <a:solidFill>
                     <a:srgbClr val="000000"/>
                   </a:solidFill>
@@ -668,7 +668,7 @@
             </a:ln>
             <a:extLst>
               <a:ext uri="{91240B29-F687-4f45-9708-019B960494DF}">
-                <a14:hiddenLine xmlns="" xmlns:a14="http://schemas.microsoft.com/office/drawing/2010/main" w="9525">
+                <a14:hiddenLine xmlns:a14="http://schemas.microsoft.com/office/drawing/2010/main" xmlns="" w="9525">
                   <a:solidFill>
                     <a:srgbClr val="000000"/>
                   </a:solidFill>
@@ -758,7 +758,7 @@
             </a:ln>
             <a:extLst>
               <a:ext uri="{91240B29-F687-4f45-9708-019B960494DF}">
-                <a14:hiddenLine xmlns="" xmlns:a14="http://schemas.microsoft.com/office/drawing/2010/main" w="9525">
+                <a14:hiddenLine xmlns:a14="http://schemas.microsoft.com/office/drawing/2010/main" xmlns="" w="9525">
                   <a:solidFill>
                     <a:srgbClr val="000000"/>
                   </a:solidFill>
@@ -820,7 +820,7 @@
             </a:ln>
             <a:extLst>
               <a:ext uri="{91240B29-F687-4f45-9708-019B960494DF}">
-                <a14:hiddenLine xmlns="" xmlns:a14="http://schemas.microsoft.com/office/drawing/2010/main" w="9525">
+                <a14:hiddenLine xmlns:a14="http://schemas.microsoft.com/office/drawing/2010/main" xmlns="" w="9525">
                   <a:solidFill>
                     <a:srgbClr val="000000"/>
                   </a:solidFill>
@@ -882,7 +882,7 @@
             </a:ln>
             <a:extLst>
               <a:ext uri="{91240B29-F687-4f45-9708-019B960494DF}">
-                <a14:hiddenLine xmlns="" xmlns:a14="http://schemas.microsoft.com/office/drawing/2010/main" w="9525">
+                <a14:hiddenLine xmlns:a14="http://schemas.microsoft.com/office/drawing/2010/main" xmlns="" w="9525">
                   <a:solidFill>
                     <a:srgbClr val="000000"/>
                   </a:solidFill>
@@ -972,7 +972,7 @@
             </a:ln>
             <a:extLst>
               <a:ext uri="{91240B29-F687-4f45-9708-019B960494DF}">
-                <a14:hiddenLine xmlns="" xmlns:a14="http://schemas.microsoft.com/office/drawing/2010/main" w="9525">
+                <a14:hiddenLine xmlns:a14="http://schemas.microsoft.com/office/drawing/2010/main" xmlns="" w="9525">
                   <a:solidFill>
                     <a:srgbClr val="000000"/>
                   </a:solidFill>
@@ -1062,7 +1062,7 @@
             </a:ln>
             <a:extLst>
               <a:ext uri="{91240B29-F687-4f45-9708-019B960494DF}">
-                <a14:hiddenLine xmlns="" xmlns:a14="http://schemas.microsoft.com/office/drawing/2010/main" w="9525">
+                <a14:hiddenLine xmlns:a14="http://schemas.microsoft.com/office/drawing/2010/main" xmlns="" w="9525">
                   <a:solidFill>
                     <a:srgbClr val="000000"/>
                   </a:solidFill>
@@ -1124,7 +1124,7 @@
             </a:ln>
             <a:extLst>
               <a:ext uri="{91240B29-F687-4f45-9708-019B960494DF}">
-                <a14:hiddenLine xmlns="" xmlns:a14="http://schemas.microsoft.com/office/drawing/2010/main" w="9525">
+                <a14:hiddenLine xmlns:a14="http://schemas.microsoft.com/office/drawing/2010/main" xmlns="" w="9525">
                   <a:solidFill>
                     <a:srgbClr val="000000"/>
                   </a:solidFill>
@@ -1234,7 +1234,7 @@
             </a:ln>
             <a:extLst>
               <a:ext uri="{91240B29-F687-4f45-9708-019B960494DF}">
-                <a14:hiddenLine xmlns="" xmlns:a14="http://schemas.microsoft.com/office/drawing/2010/main" w="9525">
+                <a14:hiddenLine xmlns:a14="http://schemas.microsoft.com/office/drawing/2010/main" xmlns="" w="9525">
                   <a:solidFill>
                     <a:srgbClr val="000000"/>
                   </a:solidFill>
@@ -1296,7 +1296,7 @@
             </a:ln>
             <a:extLst>
               <a:ext uri="{91240B29-F687-4f45-9708-019B960494DF}">
-                <a14:hiddenLine xmlns="" xmlns:a14="http://schemas.microsoft.com/office/drawing/2010/main" w="9525">
+                <a14:hiddenLine xmlns:a14="http://schemas.microsoft.com/office/drawing/2010/main" xmlns="" w="9525">
                   <a:solidFill>
                     <a:srgbClr val="000000"/>
                   </a:solidFill>
@@ -1386,7 +1386,7 @@
             </a:ln>
             <a:extLst>
               <a:ext uri="{91240B29-F687-4f45-9708-019B960494DF}">
-                <a14:hiddenLine xmlns="" xmlns:a14="http://schemas.microsoft.com/office/drawing/2010/main" w="9525">
+                <a14:hiddenLine xmlns:a14="http://schemas.microsoft.com/office/drawing/2010/main" xmlns="" w="9525">
                   <a:solidFill>
                     <a:srgbClr val="000000"/>
                   </a:solidFill>
@@ -1476,7 +1476,7 @@
             </a:ln>
             <a:extLst>
               <a:ext uri="{91240B29-F687-4f45-9708-019B960494DF}">
-                <a14:hiddenLine xmlns="" xmlns:a14="http://schemas.microsoft.com/office/drawing/2010/main" w="9525">
+                <a14:hiddenLine xmlns:a14="http://schemas.microsoft.com/office/drawing/2010/main" xmlns="" w="9525">
                   <a:solidFill>
                     <a:srgbClr val="000000"/>
                   </a:solidFill>
@@ -1538,7 +1538,7 @@
             </a:ln>
             <a:extLst>
               <a:ext uri="{91240B29-F687-4f45-9708-019B960494DF}">
-                <a14:hiddenLine xmlns="" xmlns:a14="http://schemas.microsoft.com/office/drawing/2010/main" w="9525">
+                <a14:hiddenLine xmlns:a14="http://schemas.microsoft.com/office/drawing/2010/main" xmlns="" w="9525">
                   <a:solidFill>
                     <a:srgbClr val="000000"/>
                   </a:solidFill>
@@ -1628,7 +1628,7 @@
             </a:ln>
             <a:extLst>
               <a:ext uri="{91240B29-F687-4f45-9708-019B960494DF}">
-                <a14:hiddenLine xmlns="" xmlns:a14="http://schemas.microsoft.com/office/drawing/2010/main" w="9525">
+                <a14:hiddenLine xmlns:a14="http://schemas.microsoft.com/office/drawing/2010/main" xmlns="" w="9525">
                   <a:solidFill>
                     <a:srgbClr val="000000"/>
                   </a:solidFill>
@@ -1718,7 +1718,7 @@
             </a:ln>
             <a:extLst>
               <a:ext uri="{91240B29-F687-4f45-9708-019B960494DF}">
-                <a14:hiddenLine xmlns="" xmlns:a14="http://schemas.microsoft.com/office/drawing/2010/main" w="9525">
+                <a14:hiddenLine xmlns:a14="http://schemas.microsoft.com/office/drawing/2010/main" xmlns="" w="9525">
                   <a:solidFill>
                     <a:srgbClr val="000000"/>
                   </a:solidFill>
@@ -1774,7 +1774,7 @@
             </a:ln>
             <a:extLst>
               <a:ext uri="{91240B29-F687-4f45-9708-019B960494DF}">
-                <a14:hiddenLine xmlns="" xmlns:a14="http://schemas.microsoft.com/office/drawing/2010/main" w="9525">
+                <a14:hiddenLine xmlns:a14="http://schemas.microsoft.com/office/drawing/2010/main" xmlns="" w="9525">
                   <a:solidFill>
                     <a:srgbClr val="000000"/>
                   </a:solidFill>
@@ -1864,7 +1864,7 @@
             </a:ln>
             <a:extLst>
               <a:ext uri="{91240B29-F687-4f45-9708-019B960494DF}">
-                <a14:hiddenLine xmlns="" xmlns:a14="http://schemas.microsoft.com/office/drawing/2010/main" w="9525">
+                <a14:hiddenLine xmlns:a14="http://schemas.microsoft.com/office/drawing/2010/main" xmlns="" w="9525">
                   <a:solidFill>
                     <a:srgbClr val="000000"/>
                   </a:solidFill>
@@ -1920,7 +1920,7 @@
             </a:ln>
             <a:extLst>
               <a:ext uri="{91240B29-F687-4f45-9708-019B960494DF}">
-                <a14:hiddenLine xmlns="" xmlns:a14="http://schemas.microsoft.com/office/drawing/2010/main" w="9525">
+                <a14:hiddenLine xmlns:a14="http://schemas.microsoft.com/office/drawing/2010/main" xmlns="" w="9525">
                   <a:solidFill>
                     <a:srgbClr val="000000"/>
                   </a:solidFill>
@@ -2010,7 +2010,7 @@
             </a:ln>
             <a:extLst>
               <a:ext uri="{91240B29-F687-4f45-9708-019B960494DF}">
-                <a14:hiddenLine xmlns="" xmlns:a14="http://schemas.microsoft.com/office/drawing/2010/main" w="9525">
+                <a14:hiddenLine xmlns:a14="http://schemas.microsoft.com/office/drawing/2010/main" xmlns="" w="9525">
                   <a:solidFill>
                     <a:srgbClr val="000000"/>
                   </a:solidFill>
@@ -2078,7 +2078,7 @@
             </a:ln>
             <a:extLst>
               <a:ext uri="{91240B29-F687-4f45-9708-019B960494DF}">
-                <a14:hiddenLine xmlns="" xmlns:a14="http://schemas.microsoft.com/office/drawing/2010/main" w="9525">
+                <a14:hiddenLine xmlns:a14="http://schemas.microsoft.com/office/drawing/2010/main" xmlns="" w="9525">
                   <a:solidFill>
                     <a:srgbClr val="000000"/>
                   </a:solidFill>
@@ -2168,7 +2168,7 @@
             </a:ln>
             <a:extLst>
               <a:ext uri="{91240B29-F687-4f45-9708-019B960494DF}">
-                <a14:hiddenLine xmlns="" xmlns:a14="http://schemas.microsoft.com/office/drawing/2010/main" w="9525">
+                <a14:hiddenLine xmlns:a14="http://schemas.microsoft.com/office/drawing/2010/main" xmlns="" w="9525">
                   <a:solidFill>
                     <a:srgbClr val="000000"/>
                   </a:solidFill>
@@ -2236,7 +2236,7 @@
             </a:ln>
             <a:extLst>
               <a:ext uri="{91240B29-F687-4f45-9708-019B960494DF}">
-                <a14:hiddenLine xmlns="" xmlns:a14="http://schemas.microsoft.com/office/drawing/2010/main" w="9525">
+                <a14:hiddenLine xmlns:a14="http://schemas.microsoft.com/office/drawing/2010/main" xmlns="" w="9525">
                   <a:solidFill>
                     <a:srgbClr val="000000"/>
                   </a:solidFill>
@@ -2326,7 +2326,7 @@
             </a:ln>
             <a:extLst>
               <a:ext uri="{91240B29-F687-4f45-9708-019B960494DF}">
-                <a14:hiddenLine xmlns="" xmlns:a14="http://schemas.microsoft.com/office/drawing/2010/main" w="9525">
+                <a14:hiddenLine xmlns:a14="http://schemas.microsoft.com/office/drawing/2010/main" xmlns="" w="9525">
                   <a:solidFill>
                     <a:srgbClr val="000000"/>
                   </a:solidFill>
@@ -2360,7 +2360,7 @@
             </a:ln>
             <a:extLst>
               <a:ext uri="{91240B29-F687-4f45-9708-019B960494DF}">
-                <a14:hiddenLine xmlns="" xmlns:a14="http://schemas.microsoft.com/office/drawing/2010/main" w="9525">
+                <a14:hiddenLine xmlns:a14="http://schemas.microsoft.com/office/drawing/2010/main" xmlns="" w="9525">
                   <a:solidFill>
                     <a:srgbClr val="000000"/>
                   </a:solidFill>
@@ -2450,7 +2450,7 @@
             </a:ln>
             <a:extLst>
               <a:ext uri="{91240B29-F687-4f45-9708-019B960494DF}">
-                <a14:hiddenLine xmlns="" xmlns:a14="http://schemas.microsoft.com/office/drawing/2010/main" w="9525">
+                <a14:hiddenLine xmlns:a14="http://schemas.microsoft.com/office/drawing/2010/main" xmlns="" w="9525">
                   <a:solidFill>
                     <a:srgbClr val="000000"/>
                   </a:solidFill>
@@ -2512,7 +2512,7 @@
             </a:ln>
             <a:extLst>
               <a:ext uri="{91240B29-F687-4f45-9708-019B960494DF}">
-                <a14:hiddenLine xmlns="" xmlns:a14="http://schemas.microsoft.com/office/drawing/2010/main" w="9525">
+                <a14:hiddenLine xmlns:a14="http://schemas.microsoft.com/office/drawing/2010/main" xmlns="" w="9525">
                   <a:solidFill>
                     <a:srgbClr val="000000"/>
                   </a:solidFill>
@@ -2574,7 +2574,7 @@
             </a:ln>
             <a:extLst>
               <a:ext uri="{91240B29-F687-4f45-9708-019B960494DF}">
-                <a14:hiddenLine xmlns="" xmlns:a14="http://schemas.microsoft.com/office/drawing/2010/main" w="9525">
+                <a14:hiddenLine xmlns:a14="http://schemas.microsoft.com/office/drawing/2010/main" xmlns="" w="9525">
                   <a:solidFill>
                     <a:srgbClr val="000000"/>
                   </a:solidFill>
@@ -2664,7 +2664,7 @@
             </a:ln>
             <a:extLst>
               <a:ext uri="{91240B29-F687-4f45-9708-019B960494DF}">
-                <a14:hiddenLine xmlns="" xmlns:a14="http://schemas.microsoft.com/office/drawing/2010/main" w="9525">
+                <a14:hiddenLine xmlns:a14="http://schemas.microsoft.com/office/drawing/2010/main" xmlns="" w="9525">
                   <a:solidFill>
                     <a:srgbClr val="000000"/>
                   </a:solidFill>
@@ -2732,7 +2732,7 @@
             </a:ln>
             <a:extLst>
               <a:ext uri="{91240B29-F687-4f45-9708-019B960494DF}">
-                <a14:hiddenLine xmlns="" xmlns:a14="http://schemas.microsoft.com/office/drawing/2010/main" w="9525">
+                <a14:hiddenLine xmlns:a14="http://schemas.microsoft.com/office/drawing/2010/main" xmlns="" w="9525">
                   <a:solidFill>
                     <a:srgbClr val="000000"/>
                   </a:solidFill>
@@ -2794,7 +2794,7 @@
             </a:ln>
             <a:extLst>
               <a:ext uri="{91240B29-F687-4f45-9708-019B960494DF}">
-                <a14:hiddenLine xmlns="" xmlns:a14="http://schemas.microsoft.com/office/drawing/2010/main" w="9525">
+                <a14:hiddenLine xmlns:a14="http://schemas.microsoft.com/office/drawing/2010/main" xmlns="" w="9525">
                   <a:solidFill>
                     <a:srgbClr val="000000"/>
                   </a:solidFill>
@@ -2884,7 +2884,7 @@
             </a:ln>
             <a:extLst>
               <a:ext uri="{91240B29-F687-4f45-9708-019B960494DF}">
-                <a14:hiddenLine xmlns="" xmlns:a14="http://schemas.microsoft.com/office/drawing/2010/main" w="9525">
+                <a14:hiddenLine xmlns:a14="http://schemas.microsoft.com/office/drawing/2010/main" xmlns="" w="9525">
                   <a:solidFill>
                     <a:srgbClr val="000000"/>
                   </a:solidFill>
@@ -2946,7 +2946,7 @@
             </a:ln>
             <a:extLst>
               <a:ext uri="{91240B29-F687-4f45-9708-019B960494DF}">
-                <a14:hiddenLine xmlns="" xmlns:a14="http://schemas.microsoft.com/office/drawing/2010/main" w="9525">
+                <a14:hiddenLine xmlns:a14="http://schemas.microsoft.com/office/drawing/2010/main" xmlns="" w="9525">
                   <a:solidFill>
                     <a:srgbClr val="000000"/>
                   </a:solidFill>
@@ -3036,7 +3036,7 @@
             </a:ln>
             <a:extLst>
               <a:ext uri="{91240B29-F687-4f45-9708-019B960494DF}">
-                <a14:hiddenLine xmlns="" xmlns:a14="http://schemas.microsoft.com/office/drawing/2010/main" w="9525">
+                <a14:hiddenLine xmlns:a14="http://schemas.microsoft.com/office/drawing/2010/main" xmlns="" w="9525">
                   <a:solidFill>
                     <a:srgbClr val="000000"/>
                   </a:solidFill>
@@ -3098,7 +3098,7 @@
             </a:ln>
             <a:extLst>
               <a:ext uri="{91240B29-F687-4f45-9708-019B960494DF}">
-                <a14:hiddenLine xmlns="" xmlns:a14="http://schemas.microsoft.com/office/drawing/2010/main" w="9525">
+                <a14:hiddenLine xmlns:a14="http://schemas.microsoft.com/office/drawing/2010/main" xmlns="" w="9525">
                   <a:solidFill>
                     <a:srgbClr val="000000"/>
                   </a:solidFill>
@@ -3188,7 +3188,7 @@
             </a:ln>
             <a:extLst>
               <a:ext uri="{91240B29-F687-4f45-9708-019B960494DF}">
-                <a14:hiddenLine xmlns="" xmlns:a14="http://schemas.microsoft.com/office/drawing/2010/main" w="9525">
+                <a14:hiddenLine xmlns:a14="http://schemas.microsoft.com/office/drawing/2010/main" xmlns="" w="9525">
                   <a:solidFill>
                     <a:srgbClr val="000000"/>
                   </a:solidFill>
@@ -3222,7 +3222,7 @@
             </a:ln>
             <a:extLst>
               <a:ext uri="{91240B29-F687-4f45-9708-019B960494DF}">
-                <a14:hiddenLine xmlns="" xmlns:a14="http://schemas.microsoft.com/office/drawing/2010/main" w="9525">
+                <a14:hiddenLine xmlns:a14="http://schemas.microsoft.com/office/drawing/2010/main" xmlns="" w="9525">
                   <a:solidFill>
                     <a:srgbClr val="000000"/>
                   </a:solidFill>
@@ -3287,7 +3287,7 @@
             </a:ln>
             <a:extLst>
               <a:ext uri="{91240B29-F687-4f45-9708-019B960494DF}">
-                <a14:hiddenLine xmlns="" xmlns:a14="http://schemas.microsoft.com/office/drawing/2010/main" w="9525">
+                <a14:hiddenLine xmlns:a14="http://schemas.microsoft.com/office/drawing/2010/main" xmlns="" w="9525">
                   <a:solidFill>
                     <a:srgbClr val="000000"/>
                   </a:solidFill>
@@ -3377,7 +3377,7 @@
             </a:ln>
             <a:extLst>
               <a:ext uri="{91240B29-F687-4f45-9708-019B960494DF}">
-                <a14:hiddenLine xmlns="" xmlns:a14="http://schemas.microsoft.com/office/drawing/2010/main" w="9525">
+                <a14:hiddenLine xmlns:a14="http://schemas.microsoft.com/office/drawing/2010/main" xmlns="" w="9525">
                   <a:solidFill>
                     <a:srgbClr val="000000"/>
                   </a:solidFill>
@@ -3439,7 +3439,7 @@
             </a:ln>
             <a:extLst>
               <a:ext uri="{91240B29-F687-4f45-9708-019B960494DF}">
-                <a14:hiddenLine xmlns="" xmlns:a14="http://schemas.microsoft.com/office/drawing/2010/main" w="9525">
+                <a14:hiddenLine xmlns:a14="http://schemas.microsoft.com/office/drawing/2010/main" xmlns="" w="9525">
                   <a:solidFill>
                     <a:srgbClr val="000000"/>
                   </a:solidFill>
@@ -3529,7 +3529,7 @@
             </a:ln>
             <a:extLst>
               <a:ext uri="{91240B29-F687-4f45-9708-019B960494DF}">
-                <a14:hiddenLine xmlns="" xmlns:a14="http://schemas.microsoft.com/office/drawing/2010/main" w="9525">
+                <a14:hiddenLine xmlns:a14="http://schemas.microsoft.com/office/drawing/2010/main" xmlns="" w="9525">
                   <a:solidFill>
                     <a:srgbClr val="000000"/>
                   </a:solidFill>
@@ -3619,7 +3619,7 @@
             </a:ln>
             <a:extLst>
               <a:ext uri="{91240B29-F687-4f45-9708-019B960494DF}">
-                <a14:hiddenLine xmlns="" xmlns:a14="http://schemas.microsoft.com/office/drawing/2010/main" w="9525">
+                <a14:hiddenLine xmlns:a14="http://schemas.microsoft.com/office/drawing/2010/main" xmlns="" w="9525">
                   <a:solidFill>
                     <a:srgbClr val="000000"/>
                   </a:solidFill>
@@ -3684,7 +3684,7 @@
             </a:ln>
             <a:extLst>
               <a:ext uri="{91240B29-F687-4f45-9708-019B960494DF}">
-                <a14:hiddenLine xmlns="" xmlns:a14="http://schemas.microsoft.com/office/drawing/2010/main" w="9525">
+                <a14:hiddenLine xmlns:a14="http://schemas.microsoft.com/office/drawing/2010/main" xmlns="" w="9525">
                   <a:solidFill>
                     <a:srgbClr val="000000"/>
                   </a:solidFill>
@@ -3746,7 +3746,7 @@
             </a:ln>
             <a:extLst>
               <a:ext uri="{91240B29-F687-4f45-9708-019B960494DF}">
-                <a14:hiddenLine xmlns="" xmlns:a14="http://schemas.microsoft.com/office/drawing/2010/main" w="9525">
+                <a14:hiddenLine xmlns:a14="http://schemas.microsoft.com/office/drawing/2010/main" xmlns="" w="9525">
                   <a:solidFill>
                     <a:srgbClr val="000000"/>
                   </a:solidFill>
@@ -3836,7 +3836,7 @@
             </a:ln>
             <a:extLst>
               <a:ext uri="{91240B29-F687-4f45-9708-019B960494DF}">
-                <a14:hiddenLine xmlns="" xmlns:a14="http://schemas.microsoft.com/office/drawing/2010/main" w="9525">
+                <a14:hiddenLine xmlns:a14="http://schemas.microsoft.com/office/drawing/2010/main" xmlns="" w="9525">
                   <a:solidFill>
                     <a:srgbClr val="000000"/>
                   </a:solidFill>
@@ -3926,7 +3926,7 @@
             </a:ln>
             <a:extLst>
               <a:ext uri="{91240B29-F687-4f45-9708-019B960494DF}">
-                <a14:hiddenLine xmlns="" xmlns:a14="http://schemas.microsoft.com/office/drawing/2010/main" w="9525">
+                <a14:hiddenLine xmlns:a14="http://schemas.microsoft.com/office/drawing/2010/main" xmlns="" w="9525">
                   <a:solidFill>
                     <a:srgbClr val="000000"/>
                   </a:solidFill>
@@ -3988,7 +3988,7 @@
             </a:ln>
             <a:extLst>
               <a:ext uri="{91240B29-F687-4f45-9708-019B960494DF}">
-                <a14:hiddenLine xmlns="" xmlns:a14="http://schemas.microsoft.com/office/drawing/2010/main" w="9525">
+                <a14:hiddenLine xmlns:a14="http://schemas.microsoft.com/office/drawing/2010/main" xmlns="" w="9525">
                   <a:solidFill>
                     <a:srgbClr val="000000"/>
                   </a:solidFill>
@@ -4108,7 +4108,7 @@
             </a:ln>
             <a:extLst>
               <a:ext uri="{91240B29-F687-4f45-9708-019B960494DF}">
-                <a14:hiddenLine xmlns="" xmlns:a14="http://schemas.microsoft.com/office/drawing/2010/main" w="9525">
+                <a14:hiddenLine xmlns:a14="http://schemas.microsoft.com/office/drawing/2010/main" xmlns="" w="9525">
                   <a:solidFill>
                     <a:srgbClr val="000000"/>
                   </a:solidFill>
@@ -4176,7 +4176,7 @@
             </a:ln>
             <a:extLst>
               <a:ext uri="{91240B29-F687-4f45-9708-019B960494DF}">
-                <a14:hiddenLine xmlns="" xmlns:a14="http://schemas.microsoft.com/office/drawing/2010/main" w="9525">
+                <a14:hiddenLine xmlns:a14="http://schemas.microsoft.com/office/drawing/2010/main" xmlns="" w="9525">
                   <a:solidFill>
                     <a:srgbClr val="000000"/>
                   </a:solidFill>
@@ -4266,7 +4266,7 @@
             </a:ln>
             <a:extLst>
               <a:ext uri="{91240B29-F687-4f45-9708-019B960494DF}">
-                <a14:hiddenLine xmlns="" xmlns:a14="http://schemas.microsoft.com/office/drawing/2010/main" w="9525">
+                <a14:hiddenLine xmlns:a14="http://schemas.microsoft.com/office/drawing/2010/main" xmlns="" w="9525">
                   <a:solidFill>
                     <a:srgbClr val="000000"/>
                   </a:solidFill>
@@ -4406,7 +4406,7 @@
           <a:p>
             <a:fld id="{BC0BFF02-3553-4540-906C-392AB4B0BFF0}" type="datetimeFigureOut">
               <a:rPr lang="ru-RU" smtClean="0"/>
-              <a:t>30.08.2026</a:t>
+              <a:t>02.09.2026</a:t>
             </a:fld>
             <a:endParaRPr lang="ru-RU"/>
           </a:p>
@@ -4673,7 +4673,7 @@
           <a:p>
             <a:fld id="{BC0BFF02-3553-4540-906C-392AB4B0BFF0}" type="datetimeFigureOut">
               <a:rPr lang="ru-RU" smtClean="0"/>
-              <a:t>30.08.2026</a:t>
+              <a:t>02.09.2026</a:t>
             </a:fld>
             <a:endParaRPr lang="ru-RU"/>
           </a:p>
@@ -4869,7 +4869,7 @@
           <a:p>
             <a:fld id="{BC0BFF02-3553-4540-906C-392AB4B0BFF0}" type="datetimeFigureOut">
               <a:rPr lang="ru-RU" smtClean="0"/>
-              <a:t>30.08.2026</a:t>
+              <a:t>02.09.2026</a:t>
             </a:fld>
             <a:endParaRPr lang="ru-RU"/>
           </a:p>
@@ -5132,7 +5132,7 @@
           <a:p>
             <a:fld id="{BC0BFF02-3553-4540-906C-392AB4B0BFF0}" type="datetimeFigureOut">
               <a:rPr lang="ru-RU" smtClean="0"/>
-              <a:t>30.08.2026</a:t>
+              <a:t>02.09.2026</a:t>
             </a:fld>
             <a:endParaRPr lang="ru-RU"/>
           </a:p>
@@ -5566,7 +5566,7 @@
           <a:p>
             <a:fld id="{BC0BFF02-3553-4540-906C-392AB4B0BFF0}" type="datetimeFigureOut">
               <a:rPr lang="ru-RU" smtClean="0"/>
-              <a:t>30.08.2026</a:t>
+              <a:t>02.09.2026</a:t>
             </a:fld>
             <a:endParaRPr lang="ru-RU"/>
           </a:p>
@@ -6112,7 +6112,7 @@
           <a:p>
             <a:fld id="{BC0BFF02-3553-4540-906C-392AB4B0BFF0}" type="datetimeFigureOut">
               <a:rPr lang="ru-RU" smtClean="0"/>
-              <a:t>30.08.2026</a:t>
+              <a:t>02.09.2026</a:t>
             </a:fld>
             <a:endParaRPr lang="ru-RU"/>
           </a:p>
@@ -6832,7 +6832,7 @@
           <a:p>
             <a:fld id="{BC0BFF02-3553-4540-906C-392AB4B0BFF0}" type="datetimeFigureOut">
               <a:rPr lang="ru-RU" smtClean="0"/>
-              <a:t>30.08.2026</a:t>
+              <a:t>02.09.2026</a:t>
             </a:fld>
             <a:endParaRPr lang="ru-RU"/>
           </a:p>
@@ -7002,7 +7002,7 @@
           <a:p>
             <a:fld id="{BC0BFF02-3553-4540-906C-392AB4B0BFF0}" type="datetimeFigureOut">
               <a:rPr lang="ru-RU" smtClean="0"/>
-              <a:t>30.08.2026</a:t>
+              <a:t>02.09.2026</a:t>
             </a:fld>
             <a:endParaRPr lang="ru-RU"/>
           </a:p>
@@ -7182,7 +7182,7 @@
           <a:p>
             <a:fld id="{BC0BFF02-3553-4540-906C-392AB4B0BFF0}" type="datetimeFigureOut">
               <a:rPr lang="ru-RU" smtClean="0"/>
-              <a:t>30.08.2026</a:t>
+              <a:t>02.09.2026</a:t>
             </a:fld>
             <a:endParaRPr lang="ru-RU"/>
           </a:p>
@@ -7352,7 +7352,7 @@
           <a:p>
             <a:fld id="{BC0BFF02-3553-4540-906C-392AB4B0BFF0}" type="datetimeFigureOut">
               <a:rPr lang="ru-RU" smtClean="0"/>
-              <a:t>30.08.2026</a:t>
+              <a:t>02.09.2026</a:t>
             </a:fld>
             <a:endParaRPr lang="ru-RU"/>
           </a:p>
@@ -7602,7 +7602,7 @@
           <a:p>
             <a:fld id="{BC0BFF02-3553-4540-906C-392AB4B0BFF0}" type="datetimeFigureOut">
               <a:rPr lang="ru-RU" smtClean="0"/>
-              <a:t>30.08.2026</a:t>
+              <a:t>02.09.2026</a:t>
             </a:fld>
             <a:endParaRPr lang="ru-RU"/>
           </a:p>
@@ -7834,7 +7834,7 @@
           <a:p>
             <a:fld id="{BC0BFF02-3553-4540-906C-392AB4B0BFF0}" type="datetimeFigureOut">
               <a:rPr lang="ru-RU" smtClean="0"/>
-              <a:t>30.08.2026</a:t>
+              <a:t>02.09.2026</a:t>
             </a:fld>
             <a:endParaRPr lang="ru-RU"/>
           </a:p>
@@ -8215,7 +8215,7 @@
           <a:p>
             <a:fld id="{BC0BFF02-3553-4540-906C-392AB4B0BFF0}" type="datetimeFigureOut">
               <a:rPr lang="ru-RU" smtClean="0"/>
-              <a:t>30.08.2026</a:t>
+              <a:t>02.09.2026</a:t>
             </a:fld>
             <a:endParaRPr lang="ru-RU"/>
           </a:p>
@@ -8333,7 +8333,7 @@
           <a:p>
             <a:fld id="{BC0BFF02-3553-4540-906C-392AB4B0BFF0}" type="datetimeFigureOut">
               <a:rPr lang="ru-RU" smtClean="0"/>
-              <a:t>30.08.2026</a:t>
+              <a:t>02.09.2026</a:t>
             </a:fld>
             <a:endParaRPr lang="ru-RU"/>
           </a:p>
@@ -8428,7 +8428,7 @@
           <a:p>
             <a:fld id="{BC0BFF02-3553-4540-906C-392AB4B0BFF0}" type="datetimeFigureOut">
               <a:rPr lang="ru-RU" smtClean="0"/>
-              <a:t>30.08.2026</a:t>
+              <a:t>02.09.2026</a:t>
             </a:fld>
             <a:endParaRPr lang="ru-RU"/>
           </a:p>
@@ -8677,7 +8677,7 @@
           <a:p>
             <a:fld id="{BC0BFF02-3553-4540-906C-392AB4B0BFF0}" type="datetimeFigureOut">
               <a:rPr lang="ru-RU" smtClean="0"/>
-              <a:t>30.08.2026</a:t>
+              <a:t>02.09.2026</a:t>
             </a:fld>
             <a:endParaRPr lang="ru-RU"/>
           </a:p>
@@ -8957,7 +8957,7 @@
           <a:p>
             <a:fld id="{BC0BFF02-3553-4540-906C-392AB4B0BFF0}" type="datetimeFigureOut">
               <a:rPr lang="ru-RU" smtClean="0"/>
-              <a:t>30.08.2026</a:t>
+              <a:t>02.09.2026</a:t>
             </a:fld>
             <a:endParaRPr lang="ru-RU"/>
           </a:p>
@@ -9080,7 +9080,7 @@
           <a:noFill/>
           <a:extLst>
             <a:ext uri="{909E8E84-426E-40dd-AFC4-6F175D3DCCD1}">
-              <a14:hiddenFill xmlns="" xmlns:a14="http://schemas.microsoft.com/office/drawing/2010/main">
+              <a14:hiddenFill xmlns:a14="http://schemas.microsoft.com/office/drawing/2010/main" xmlns="">
                 <a:solidFill>
                   <a:srgbClr val="FFFFFF"/>
                 </a:solidFill>
@@ -9154,7 +9154,7 @@
               </a:ln>
               <a:extLst>
                 <a:ext uri="{91240B29-F687-4f45-9708-019B960494DF}">
-                  <a14:hiddenLine xmlns="" xmlns:a14="http://schemas.microsoft.com/office/drawing/2010/main" w="9525">
+                  <a14:hiddenLine xmlns:a14="http://schemas.microsoft.com/office/drawing/2010/main" xmlns="" w="9525">
                     <a:solidFill>
                       <a:srgbClr val="000000"/>
                     </a:solidFill>
@@ -9244,7 +9244,7 @@
               </a:ln>
               <a:extLst>
                 <a:ext uri="{91240B29-F687-4f45-9708-019B960494DF}">
-                  <a14:hiddenLine xmlns="" xmlns:a14="http://schemas.microsoft.com/office/drawing/2010/main" w="9525">
+                  <a14:hiddenLine xmlns:a14="http://schemas.microsoft.com/office/drawing/2010/main" xmlns="" w="9525">
                     <a:solidFill>
                       <a:srgbClr val="000000"/>
                     </a:solidFill>
@@ -9334,7 +9334,7 @@
               </a:ln>
               <a:extLst>
                 <a:ext uri="{91240B29-F687-4f45-9708-019B960494DF}">
-                  <a14:hiddenLine xmlns="" xmlns:a14="http://schemas.microsoft.com/office/drawing/2010/main" w="9525">
+                  <a14:hiddenLine xmlns:a14="http://schemas.microsoft.com/office/drawing/2010/main" xmlns="" w="9525">
                     <a:solidFill>
                       <a:srgbClr val="000000"/>
                     </a:solidFill>
@@ -9396,7 +9396,7 @@
               </a:ln>
               <a:extLst>
                 <a:ext uri="{91240B29-F687-4f45-9708-019B960494DF}">
-                  <a14:hiddenLine xmlns="" xmlns:a14="http://schemas.microsoft.com/office/drawing/2010/main" w="9525">
+                  <a14:hiddenLine xmlns:a14="http://schemas.microsoft.com/office/drawing/2010/main" xmlns="" w="9525">
                     <a:solidFill>
                       <a:srgbClr val="000000"/>
                     </a:solidFill>
@@ -9486,7 +9486,7 @@
               </a:ln>
               <a:extLst>
                 <a:ext uri="{91240B29-F687-4f45-9708-019B960494DF}">
-                  <a14:hiddenLine xmlns="" xmlns:a14="http://schemas.microsoft.com/office/drawing/2010/main" w="9525">
+                  <a14:hiddenLine xmlns:a14="http://schemas.microsoft.com/office/drawing/2010/main" xmlns="" w="9525">
                     <a:solidFill>
                       <a:srgbClr val="000000"/>
                     </a:solidFill>
@@ -9548,7 +9548,7 @@
               </a:ln>
               <a:extLst>
                 <a:ext uri="{91240B29-F687-4f45-9708-019B960494DF}">
-                  <a14:hiddenLine xmlns="" xmlns:a14="http://schemas.microsoft.com/office/drawing/2010/main" w="9525">
+                  <a14:hiddenLine xmlns:a14="http://schemas.microsoft.com/office/drawing/2010/main" xmlns="" w="9525">
                     <a:solidFill>
                       <a:srgbClr val="000000"/>
                     </a:solidFill>
@@ -9610,7 +9610,7 @@
               </a:ln>
               <a:extLst>
                 <a:ext uri="{91240B29-F687-4f45-9708-019B960494DF}">
-                  <a14:hiddenLine xmlns="" xmlns:a14="http://schemas.microsoft.com/office/drawing/2010/main" w="9525">
+                  <a14:hiddenLine xmlns:a14="http://schemas.microsoft.com/office/drawing/2010/main" xmlns="" w="9525">
                     <a:solidFill>
                       <a:srgbClr val="000000"/>
                     </a:solidFill>
@@ -9700,7 +9700,7 @@
               </a:ln>
               <a:extLst>
                 <a:ext uri="{91240B29-F687-4f45-9708-019B960494DF}">
-                  <a14:hiddenLine xmlns="" xmlns:a14="http://schemas.microsoft.com/office/drawing/2010/main" w="9525">
+                  <a14:hiddenLine xmlns:a14="http://schemas.microsoft.com/office/drawing/2010/main" xmlns="" w="9525">
                     <a:solidFill>
                       <a:srgbClr val="000000"/>
                     </a:solidFill>
@@ -9790,7 +9790,7 @@
               </a:ln>
               <a:extLst>
                 <a:ext uri="{91240B29-F687-4f45-9708-019B960494DF}">
-                  <a14:hiddenLine xmlns="" xmlns:a14="http://schemas.microsoft.com/office/drawing/2010/main" w="9525">
+                  <a14:hiddenLine xmlns:a14="http://schemas.microsoft.com/office/drawing/2010/main" xmlns="" w="9525">
                     <a:solidFill>
                       <a:srgbClr val="000000"/>
                     </a:solidFill>
@@ -9852,7 +9852,7 @@
               </a:ln>
               <a:extLst>
                 <a:ext uri="{91240B29-F687-4f45-9708-019B960494DF}">
-                  <a14:hiddenLine xmlns="" xmlns:a14="http://schemas.microsoft.com/office/drawing/2010/main" w="9525">
+                  <a14:hiddenLine xmlns:a14="http://schemas.microsoft.com/office/drawing/2010/main" xmlns="" w="9525">
                     <a:solidFill>
                       <a:srgbClr val="000000"/>
                     </a:solidFill>
@@ -9962,7 +9962,7 @@
               </a:ln>
               <a:extLst>
                 <a:ext uri="{91240B29-F687-4f45-9708-019B960494DF}">
-                  <a14:hiddenLine xmlns="" xmlns:a14="http://schemas.microsoft.com/office/drawing/2010/main" w="9525">
+                  <a14:hiddenLine xmlns:a14="http://schemas.microsoft.com/office/drawing/2010/main" xmlns="" w="9525">
                     <a:solidFill>
                       <a:srgbClr val="000000"/>
                     </a:solidFill>
@@ -10046,7 +10046,7 @@
               </a:ln>
               <a:extLst>
                 <a:ext uri="{91240B29-F687-4f45-9708-019B960494DF}">
-                  <a14:hiddenLine xmlns="" xmlns:a14="http://schemas.microsoft.com/office/drawing/2010/main" w="9525">
+                  <a14:hiddenLine xmlns:a14="http://schemas.microsoft.com/office/drawing/2010/main" xmlns="" w="9525">
                     <a:solidFill>
                       <a:srgbClr val="000000"/>
                     </a:solidFill>
@@ -10108,7 +10108,7 @@
               </a:ln>
               <a:extLst>
                 <a:ext uri="{91240B29-F687-4f45-9708-019B960494DF}">
-                  <a14:hiddenLine xmlns="" xmlns:a14="http://schemas.microsoft.com/office/drawing/2010/main" w="9525">
+                  <a14:hiddenLine xmlns:a14="http://schemas.microsoft.com/office/drawing/2010/main" xmlns="" w="9525">
                     <a:solidFill>
                       <a:srgbClr val="000000"/>
                     </a:solidFill>
@@ -10170,7 +10170,7 @@
               </a:ln>
               <a:extLst>
                 <a:ext uri="{91240B29-F687-4f45-9708-019B960494DF}">
-                  <a14:hiddenLine xmlns="" xmlns:a14="http://schemas.microsoft.com/office/drawing/2010/main" w="9525">
+                  <a14:hiddenLine xmlns:a14="http://schemas.microsoft.com/office/drawing/2010/main" xmlns="" w="9525">
                     <a:solidFill>
                       <a:srgbClr val="000000"/>
                     </a:solidFill>
@@ -10260,7 +10260,7 @@
               </a:ln>
               <a:extLst>
                 <a:ext uri="{91240B29-F687-4f45-9708-019B960494DF}">
-                  <a14:hiddenLine xmlns="" xmlns:a14="http://schemas.microsoft.com/office/drawing/2010/main" w="9525">
+                  <a14:hiddenLine xmlns:a14="http://schemas.microsoft.com/office/drawing/2010/main" xmlns="" w="9525">
                     <a:solidFill>
                       <a:srgbClr val="000000"/>
                     </a:solidFill>
@@ -10294,7 +10294,7 @@
               </a:ln>
               <a:extLst>
                 <a:ext uri="{91240B29-F687-4f45-9708-019B960494DF}">
-                  <a14:hiddenLine xmlns="" xmlns:a14="http://schemas.microsoft.com/office/drawing/2010/main" w="9525">
+                  <a14:hiddenLine xmlns:a14="http://schemas.microsoft.com/office/drawing/2010/main" xmlns="" w="9525">
                     <a:solidFill>
                       <a:srgbClr val="000000"/>
                     </a:solidFill>
@@ -10359,7 +10359,7 @@
               </a:ln>
               <a:extLst>
                 <a:ext uri="{91240B29-F687-4f45-9708-019B960494DF}">
-                  <a14:hiddenLine xmlns="" xmlns:a14="http://schemas.microsoft.com/office/drawing/2010/main" w="9525">
+                  <a14:hiddenLine xmlns:a14="http://schemas.microsoft.com/office/drawing/2010/main" xmlns="" w="9525">
                     <a:solidFill>
                       <a:srgbClr val="000000"/>
                     </a:solidFill>
@@ -10449,7 +10449,7 @@
               </a:ln>
               <a:extLst>
                 <a:ext uri="{91240B29-F687-4f45-9708-019B960494DF}">
-                  <a14:hiddenLine xmlns="" xmlns:a14="http://schemas.microsoft.com/office/drawing/2010/main" w="9525">
+                  <a14:hiddenLine xmlns:a14="http://schemas.microsoft.com/office/drawing/2010/main" xmlns="" w="9525">
                     <a:solidFill>
                       <a:srgbClr val="000000"/>
                     </a:solidFill>
@@ -10511,7 +10511,7 @@
               </a:ln>
               <a:extLst>
                 <a:ext uri="{91240B29-F687-4f45-9708-019B960494DF}">
-                  <a14:hiddenLine xmlns="" xmlns:a14="http://schemas.microsoft.com/office/drawing/2010/main" w="9525">
+                  <a14:hiddenLine xmlns:a14="http://schemas.microsoft.com/office/drawing/2010/main" xmlns="" w="9525">
                     <a:solidFill>
                       <a:srgbClr val="000000"/>
                     </a:solidFill>
@@ -10601,7 +10601,7 @@
               </a:ln>
               <a:extLst>
                 <a:ext uri="{91240B29-F687-4f45-9708-019B960494DF}">
-                  <a14:hiddenLine xmlns="" xmlns:a14="http://schemas.microsoft.com/office/drawing/2010/main" w="9525">
+                  <a14:hiddenLine xmlns:a14="http://schemas.microsoft.com/office/drawing/2010/main" xmlns="" w="9525">
                     <a:solidFill>
                       <a:srgbClr val="000000"/>
                     </a:solidFill>
@@ -10666,7 +10666,7 @@
               </a:ln>
               <a:extLst>
                 <a:ext uri="{91240B29-F687-4f45-9708-019B960494DF}">
-                  <a14:hiddenLine xmlns="" xmlns:a14="http://schemas.microsoft.com/office/drawing/2010/main" w="9525">
+                  <a14:hiddenLine xmlns:a14="http://schemas.microsoft.com/office/drawing/2010/main" xmlns="" w="9525">
                     <a:solidFill>
                       <a:srgbClr val="000000"/>
                     </a:solidFill>
@@ -10728,7 +10728,7 @@
               </a:ln>
               <a:extLst>
                 <a:ext uri="{91240B29-F687-4f45-9708-019B960494DF}">
-                  <a14:hiddenLine xmlns="" xmlns:a14="http://schemas.microsoft.com/office/drawing/2010/main" w="9525">
+                  <a14:hiddenLine xmlns:a14="http://schemas.microsoft.com/office/drawing/2010/main" xmlns="" w="9525">
                     <a:solidFill>
                       <a:srgbClr val="000000"/>
                     </a:solidFill>
@@ -10818,7 +10818,7 @@
               </a:ln>
               <a:extLst>
                 <a:ext uri="{91240B29-F687-4f45-9708-019B960494DF}">
-                  <a14:hiddenLine xmlns="" xmlns:a14="http://schemas.microsoft.com/office/drawing/2010/main" w="9525">
+                  <a14:hiddenLine xmlns:a14="http://schemas.microsoft.com/office/drawing/2010/main" xmlns="" w="9525">
                     <a:solidFill>
                       <a:srgbClr val="000000"/>
                     </a:solidFill>
@@ -10908,7 +10908,7 @@
               </a:ln>
               <a:extLst>
                 <a:ext uri="{91240B29-F687-4f45-9708-019B960494DF}">
-                  <a14:hiddenLine xmlns="" xmlns:a14="http://schemas.microsoft.com/office/drawing/2010/main" w="9525">
+                  <a14:hiddenLine xmlns:a14="http://schemas.microsoft.com/office/drawing/2010/main" xmlns="" w="9525">
                     <a:solidFill>
                       <a:srgbClr val="000000"/>
                     </a:solidFill>
@@ -10973,7 +10973,7 @@
               </a:ln>
               <a:extLst>
                 <a:ext uri="{91240B29-F687-4f45-9708-019B960494DF}">
-                  <a14:hiddenLine xmlns="" xmlns:a14="http://schemas.microsoft.com/office/drawing/2010/main" w="9525">
+                  <a14:hiddenLine xmlns:a14="http://schemas.microsoft.com/office/drawing/2010/main" xmlns="" w="9525">
                     <a:solidFill>
                       <a:srgbClr val="000000"/>
                     </a:solidFill>
@@ -11093,7 +11093,7 @@
               </a:ln>
               <a:extLst>
                 <a:ext uri="{91240B29-F687-4f45-9708-019B960494DF}">
-                  <a14:hiddenLine xmlns="" xmlns:a14="http://schemas.microsoft.com/office/drawing/2010/main" w="9525">
+                  <a14:hiddenLine xmlns:a14="http://schemas.microsoft.com/office/drawing/2010/main" xmlns="" w="9525">
                     <a:solidFill>
                       <a:srgbClr val="000000"/>
                     </a:solidFill>
@@ -11174,7 +11174,7 @@
               </a:ln>
               <a:extLst>
                 <a:ext uri="{91240B29-F687-4f45-9708-019B960494DF}">
-                  <a14:hiddenLine xmlns="" xmlns:a14="http://schemas.microsoft.com/office/drawing/2010/main" w="9525">
+                  <a14:hiddenLine xmlns:a14="http://schemas.microsoft.com/office/drawing/2010/main" xmlns="" w="9525">
                     <a:solidFill>
                       <a:srgbClr val="000000"/>
                     </a:solidFill>
@@ -11289,7 +11289,7 @@
               </a:ln>
               <a:extLst>
                 <a:ext uri="{91240B29-F687-4f45-9708-019B960494DF}">
-                  <a14:hiddenLine xmlns="" xmlns:a14="http://schemas.microsoft.com/office/drawing/2010/main" w="9525">
+                  <a14:hiddenLine xmlns:a14="http://schemas.microsoft.com/office/drawing/2010/main" xmlns="" w="9525">
                     <a:solidFill>
                       <a:srgbClr val="000000"/>
                     </a:solidFill>
@@ -11379,7 +11379,7 @@
               </a:ln>
               <a:extLst>
                 <a:ext uri="{91240B29-F687-4f45-9708-019B960494DF}">
-                  <a14:hiddenLine xmlns="" xmlns:a14="http://schemas.microsoft.com/office/drawing/2010/main" w="9525">
+                  <a14:hiddenLine xmlns:a14="http://schemas.microsoft.com/office/drawing/2010/main" xmlns="" w="9525">
                     <a:solidFill>
                       <a:srgbClr val="000000"/>
                     </a:solidFill>
@@ -11444,7 +11444,7 @@
               </a:ln>
               <a:extLst>
                 <a:ext uri="{91240B29-F687-4f45-9708-019B960494DF}">
-                  <a14:hiddenLine xmlns="" xmlns:a14="http://schemas.microsoft.com/office/drawing/2010/main" w="9525">
+                  <a14:hiddenLine xmlns:a14="http://schemas.microsoft.com/office/drawing/2010/main" xmlns="" w="9525">
                     <a:solidFill>
                       <a:srgbClr val="000000"/>
                     </a:solidFill>
@@ -11534,7 +11534,7 @@
               </a:ln>
               <a:extLst>
                 <a:ext uri="{91240B29-F687-4f45-9708-019B960494DF}">
-                  <a14:hiddenLine xmlns="" xmlns:a14="http://schemas.microsoft.com/office/drawing/2010/main" w="9525">
+                  <a14:hiddenLine xmlns:a14="http://schemas.microsoft.com/office/drawing/2010/main" xmlns="" w="9525">
                     <a:solidFill>
                       <a:srgbClr val="000000"/>
                     </a:solidFill>
@@ -11602,7 +11602,7 @@
               </a:ln>
               <a:extLst>
                 <a:ext uri="{91240B29-F687-4f45-9708-019B960494DF}">
-                  <a14:hiddenLine xmlns="" xmlns:a14="http://schemas.microsoft.com/office/drawing/2010/main" w="9525">
+                  <a14:hiddenLine xmlns:a14="http://schemas.microsoft.com/office/drawing/2010/main" xmlns="" w="9525">
                     <a:solidFill>
                       <a:srgbClr val="000000"/>
                     </a:solidFill>
@@ -11692,7 +11692,7 @@
               </a:ln>
               <a:extLst>
                 <a:ext uri="{91240B29-F687-4f45-9708-019B960494DF}">
-                  <a14:hiddenLine xmlns="" xmlns:a14="http://schemas.microsoft.com/office/drawing/2010/main" w="9525">
+                  <a14:hiddenLine xmlns:a14="http://schemas.microsoft.com/office/drawing/2010/main" xmlns="" w="9525">
                     <a:solidFill>
                       <a:srgbClr val="000000"/>
                     </a:solidFill>
@@ -11760,7 +11760,7 @@
               </a:ln>
               <a:extLst>
                 <a:ext uri="{91240B29-F687-4f45-9708-019B960494DF}">
-                  <a14:hiddenLine xmlns="" xmlns:a14="http://schemas.microsoft.com/office/drawing/2010/main" w="9525">
+                  <a14:hiddenLine xmlns:a14="http://schemas.microsoft.com/office/drawing/2010/main" xmlns="" w="9525">
                     <a:solidFill>
                       <a:srgbClr val="000000"/>
                     </a:solidFill>
@@ -11850,7 +11850,7 @@
               </a:ln>
               <a:extLst>
                 <a:ext uri="{91240B29-F687-4f45-9708-019B960494DF}">
-                  <a14:hiddenLine xmlns="" xmlns:a14="http://schemas.microsoft.com/office/drawing/2010/main" w="9525">
+                  <a14:hiddenLine xmlns:a14="http://schemas.microsoft.com/office/drawing/2010/main" xmlns="" w="9525">
                     <a:solidFill>
                       <a:srgbClr val="000000"/>
                     </a:solidFill>
@@ -11884,7 +11884,7 @@
               </a:ln>
               <a:extLst>
                 <a:ext uri="{91240B29-F687-4f45-9708-019B960494DF}">
-                  <a14:hiddenLine xmlns="" xmlns:a14="http://schemas.microsoft.com/office/drawing/2010/main" w="9525">
+                  <a14:hiddenLine xmlns:a14="http://schemas.microsoft.com/office/drawing/2010/main" xmlns="" w="9525">
                     <a:solidFill>
                       <a:srgbClr val="000000"/>
                     </a:solidFill>
@@ -12024,7 +12024,7 @@
           <a:p>
             <a:fld id="{BC0BFF02-3553-4540-906C-392AB4B0BFF0}" type="datetimeFigureOut">
               <a:rPr lang="ru-RU" smtClean="0"/>
-              <a:t>30.08.2026</a:t>
+              <a:t>02.09.2026</a:t>
             </a:fld>
             <a:endParaRPr lang="ru-RU"/>
           </a:p>
@@ -12503,121 +12503,1282 @@
           <a:chExt cx="0" cy="0"/>
         </a:xfrm>
       </p:grpSpPr>
-      <p:sp>
-        <p:nvSpPr>
-          <p:cNvPr id="2" name="Заголовок 1"/>
-          <p:cNvSpPr>
-            <a:spLocks noGrp="1"/>
-          </p:cNvSpPr>
+      <p:graphicFrame>
+        <p:nvGraphicFramePr>
+          <p:cNvPr id="5" name="Таблица 4"/>
+          <p:cNvGraphicFramePr>
+            <a:graphicFrameLocks noGrp="1"/>
+          </p:cNvGraphicFramePr>
           <p:nvPr>
-            <p:ph type="title"/>
+            <p:extLst>
+              <p:ext uri="{D42A27DB-BD31-4B8C-83A1-F6EECF244321}">
+                <p14:modId xmlns:p14="http://schemas.microsoft.com/office/powerpoint/2010/main" val="1588240456"/>
+              </p:ext>
+            </p:extLst>
           </p:nvPr>
-        </p:nvSpPr>
-        <p:spPr/>
-        <p:txBody>
-          <a:bodyPr>
-            <a:normAutofit fontScale="90000"/>
-          </a:bodyPr>
-          <a:lstStyle/>
-          <a:p>
-            <a:r>
-              <a:rPr lang="ru-RU" dirty="0"/>
-              <a:t>Распределите утверждения по двум колонкам — </a:t>
-            </a:r>
-            <a:r>
-              <a:rPr lang="ru-RU" b="1" dirty="0"/>
-              <a:t>[Д]</a:t>
-            </a:r>
-            <a:r>
-              <a:rPr lang="ru-RU" dirty="0"/>
-              <a:t> (</a:t>
-            </a:r>
-            <a:r>
-              <a:rPr lang="ru-RU" dirty="0" err="1"/>
-              <a:t>Датаграммный</a:t>
-            </a:r>
-            <a:r>
-              <a:rPr lang="ru-RU" dirty="0"/>
-              <a:t> подход) или </a:t>
-            </a:r>
-            <a:r>
-              <a:rPr lang="ru-RU" b="1" dirty="0"/>
-              <a:t>[ВК]</a:t>
-            </a:r>
-            <a:r>
-              <a:rPr lang="ru-RU" dirty="0"/>
-              <a:t> (Виртуальные каналы):</a:t>
-            </a:r>
-            <a:endParaRPr lang="ru-RU" dirty="0"/>
-          </a:p>
-        </p:txBody>
-      </p:sp>
-      <p:sp>
-        <p:nvSpPr>
-          <p:cNvPr id="3" name="Объект 2"/>
-          <p:cNvSpPr>
-            <a:spLocks noGrp="1"/>
-          </p:cNvSpPr>
-          <p:nvPr>
-            <p:ph idx="1"/>
-          </p:nvPr>
-        </p:nvSpPr>
-        <p:spPr>
-          <a:xfrm>
-            <a:off x="1141412" y="2249486"/>
-            <a:ext cx="9905999" cy="4204067"/>
-          </a:xfrm>
-        </p:spPr>
-        <p:txBody>
-          <a:bodyPr>
-            <a:normAutofit fontScale="92500" lnSpcReduction="10000"/>
-          </a:bodyPr>
-          <a:lstStyle/>
-          <a:p>
-            <a:r>
-              <a:rPr lang="ru-RU" dirty="0"/>
-              <a:t>Требуется предварительная фаза установления соединения перед отправкой данных.</a:t>
-            </a:r>
-          </a:p>
-          <a:p>
-            <a:r>
-              <a:rPr lang="ru-RU" dirty="0"/>
-              <a:t>Каждый кадр содержит полный адрес узла назначения.</a:t>
-            </a:r>
-          </a:p>
-          <a:p>
-            <a:r>
-              <a:rPr lang="ru-RU" dirty="0"/>
-              <a:t>Идентификатор в заголовке кадра (VCI) может меняться от коммутатора к коммутатору.</a:t>
-            </a:r>
-          </a:p>
-          <a:p>
-            <a:r>
-              <a:rPr lang="ru-RU" dirty="0"/>
-              <a:t>Последовательные кадры между одними и теми же узлами могут передаваться разными маршрутами.</a:t>
-            </a:r>
-          </a:p>
-          <a:p>
-            <a:r>
-              <a:rPr lang="ru-RU" dirty="0"/>
-              <a:t>При сбое промежуточного узла достаточно перестроить таблицу пересылки, связь не требует полного пересоздания логического канала.</a:t>
-            </a:r>
-          </a:p>
-          <a:p>
-            <a:endParaRPr lang="ru-RU" dirty="0"/>
-          </a:p>
-        </p:txBody>
-      </p:sp>
+        </p:nvGraphicFramePr>
+        <p:xfrm>
+          <a:off x="1449759" y="781171"/>
+          <a:ext cx="9514248" cy="5443782"/>
+        </p:xfrm>
+        <a:graphic>
+          <a:graphicData uri="http://schemas.openxmlformats.org/drawingml/2006/table">
+            <a:tbl>
+              <a:tblPr/>
+              <a:tblGrid>
+                <a:gridCol w="3171416">
+                  <a:extLst>
+                    <a:ext uri="{9D8B030D-6E8A-4147-A177-3AD203B41FA5}">
+                      <a16:colId xmlns:a16="http://schemas.microsoft.com/office/drawing/2014/main" val="3415095240"/>
+                    </a:ext>
+                  </a:extLst>
+                </a:gridCol>
+                <a:gridCol w="3171416">
+                  <a:extLst>
+                    <a:ext uri="{9D8B030D-6E8A-4147-A177-3AD203B41FA5}">
+                      <a16:colId xmlns:a16="http://schemas.microsoft.com/office/drawing/2014/main" val="2469910561"/>
+                    </a:ext>
+                  </a:extLst>
+                </a:gridCol>
+                <a:gridCol w="3171416">
+                  <a:extLst>
+                    <a:ext uri="{9D8B030D-6E8A-4147-A177-3AD203B41FA5}">
+                      <a16:colId xmlns:a16="http://schemas.microsoft.com/office/drawing/2014/main" val="463297356"/>
+                    </a:ext>
+                  </a:extLst>
+                </a:gridCol>
+              </a:tblGrid>
+              <a:tr h="733067">
+                <a:tc>
+                  <a:txBody>
+                    <a:bodyPr/>
+                    <a:lstStyle/>
+                    <a:p>
+                      <a:pPr algn="l"/>
+                      <a:r>
+                        <a:rPr lang="ru-RU" sz="1300" b="1" dirty="0">
+                          <a:effectLst/>
+                        </a:rPr>
+                        <a:t>Параметр</a:t>
+                      </a:r>
+                    </a:p>
+                  </a:txBody>
+                  <a:tcPr marL="70552" marR="70552" marT="35276" marB="35276" anchor="ctr">
+                    <a:lnL w="12700" cap="flat" cmpd="sng" algn="ctr">
+                      <a:solidFill>
+                        <a:schemeClr val="tx1"/>
+                      </a:solidFill>
+                      <a:prstDash val="solid"/>
+                      <a:round/>
+                      <a:headEnd type="none" w="med" len="med"/>
+                      <a:tailEnd type="none" w="med" len="med"/>
+                    </a:lnL>
+                    <a:lnR w="12700" cap="flat" cmpd="sng" algn="ctr">
+                      <a:solidFill>
+                        <a:schemeClr val="tx1"/>
+                      </a:solidFill>
+                      <a:prstDash val="solid"/>
+                      <a:round/>
+                      <a:headEnd type="none" w="med" len="med"/>
+                      <a:tailEnd type="none" w="med" len="med"/>
+                    </a:lnR>
+                    <a:lnT w="12700" cap="flat" cmpd="sng" algn="ctr">
+                      <a:solidFill>
+                        <a:schemeClr val="tx1"/>
+                      </a:solidFill>
+                      <a:prstDash val="solid"/>
+                      <a:round/>
+                      <a:headEnd type="none" w="med" len="med"/>
+                      <a:tailEnd type="none" w="med" len="med"/>
+                    </a:lnT>
+                    <a:lnB w="12700" cap="flat" cmpd="sng" algn="ctr">
+                      <a:solidFill>
+                        <a:schemeClr val="tx1"/>
+                      </a:solidFill>
+                      <a:prstDash val="solid"/>
+                      <a:round/>
+                      <a:headEnd type="none" w="med" len="med"/>
+                      <a:tailEnd type="none" w="med" len="med"/>
+                    </a:lnB>
+                  </a:tcPr>
+                </a:tc>
+                <a:tc>
+                  <a:txBody>
+                    <a:bodyPr/>
+                    <a:lstStyle/>
+                    <a:p>
+                      <a:pPr algn="l"/>
+                      <a:r>
+                        <a:rPr lang="ru-RU" sz="1300" b="1">
+                          <a:effectLst/>
+                        </a:rPr>
+                        <a:t>Датаграммный подход (</a:t>
+                      </a:r>
+                      <a:r>
+                        <a:rPr lang="af-ZA" sz="1300" b="1">
+                          <a:effectLst/>
+                        </a:rPr>
+                        <a:t>Datagram Switching)</a:t>
+                      </a:r>
+                    </a:p>
+                  </a:txBody>
+                  <a:tcPr marL="70552" marR="70552" marT="35276" marB="35276" anchor="ctr">
+                    <a:lnL w="12700" cap="flat" cmpd="sng" algn="ctr">
+                      <a:solidFill>
+                        <a:schemeClr val="tx1"/>
+                      </a:solidFill>
+                      <a:prstDash val="solid"/>
+                      <a:round/>
+                      <a:headEnd type="none" w="med" len="med"/>
+                      <a:tailEnd type="none" w="med" len="med"/>
+                    </a:lnL>
+                    <a:lnR w="12700" cap="flat" cmpd="sng" algn="ctr">
+                      <a:solidFill>
+                        <a:schemeClr val="tx1"/>
+                      </a:solidFill>
+                      <a:prstDash val="solid"/>
+                      <a:round/>
+                      <a:headEnd type="none" w="med" len="med"/>
+                      <a:tailEnd type="none" w="med" len="med"/>
+                    </a:lnR>
+                    <a:lnT w="12700" cap="flat" cmpd="sng" algn="ctr">
+                      <a:solidFill>
+                        <a:schemeClr val="tx1"/>
+                      </a:solidFill>
+                      <a:prstDash val="solid"/>
+                      <a:round/>
+                      <a:headEnd type="none" w="med" len="med"/>
+                      <a:tailEnd type="none" w="med" len="med"/>
+                    </a:lnT>
+                    <a:lnB w="12700" cap="flat" cmpd="sng" algn="ctr">
+                      <a:solidFill>
+                        <a:schemeClr val="tx1"/>
+                      </a:solidFill>
+                      <a:prstDash val="solid"/>
+                      <a:round/>
+                      <a:headEnd type="none" w="med" len="med"/>
+                      <a:tailEnd type="none" w="med" len="med"/>
+                    </a:lnB>
+                  </a:tcPr>
+                </a:tc>
+                <a:tc>
+                  <a:txBody>
+                    <a:bodyPr/>
+                    <a:lstStyle/>
+                    <a:p>
+                      <a:pPr algn="l"/>
+                      <a:r>
+                        <a:rPr lang="ru-RU" sz="1300" b="1">
+                          <a:effectLst/>
+                        </a:rPr>
+                        <a:t>Виртуальные каналы (Virtual Circuits, VC)</a:t>
+                      </a:r>
+                    </a:p>
+                  </a:txBody>
+                  <a:tcPr marL="70552" marR="70552" marT="35276" marB="35276" anchor="ctr">
+                    <a:lnL w="12700" cap="flat" cmpd="sng" algn="ctr">
+                      <a:solidFill>
+                        <a:schemeClr val="tx1"/>
+                      </a:solidFill>
+                      <a:prstDash val="solid"/>
+                      <a:round/>
+                      <a:headEnd type="none" w="med" len="med"/>
+                      <a:tailEnd type="none" w="med" len="med"/>
+                    </a:lnL>
+                    <a:lnR w="12700" cap="flat" cmpd="sng" algn="ctr">
+                      <a:solidFill>
+                        <a:schemeClr val="tx1"/>
+                      </a:solidFill>
+                      <a:prstDash val="solid"/>
+                      <a:round/>
+                      <a:headEnd type="none" w="med" len="med"/>
+                      <a:tailEnd type="none" w="med" len="med"/>
+                    </a:lnR>
+                    <a:lnT w="12700" cap="flat" cmpd="sng" algn="ctr">
+                      <a:solidFill>
+                        <a:schemeClr val="tx1"/>
+                      </a:solidFill>
+                      <a:prstDash val="solid"/>
+                      <a:round/>
+                      <a:headEnd type="none" w="med" len="med"/>
+                      <a:tailEnd type="none" w="med" len="med"/>
+                    </a:lnT>
+                    <a:lnB w="12700" cap="flat" cmpd="sng" algn="ctr">
+                      <a:solidFill>
+                        <a:schemeClr val="tx1"/>
+                      </a:solidFill>
+                      <a:prstDash val="solid"/>
+                      <a:round/>
+                      <a:headEnd type="none" w="med" len="med"/>
+                      <a:tailEnd type="none" w="med" len="med"/>
+                    </a:lnB>
+                  </a:tcPr>
+                </a:tc>
+                <a:extLst>
+                  <a:ext uri="{0D108BD9-81ED-4DB2-BD59-A6C34878D82A}">
+                    <a16:rowId xmlns:a16="http://schemas.microsoft.com/office/drawing/2014/main" val="4119901875"/>
+                  </a:ext>
+                </a:extLst>
+              </a:tr>
+              <a:tr h="733067">
+                <a:tc>
+                  <a:txBody>
+                    <a:bodyPr/>
+                    <a:lstStyle/>
+                    <a:p>
+                      <a:pPr algn="l"/>
+                      <a:r>
+                        <a:rPr lang="ru-RU" sz="1300" b="1" dirty="0">
+                          <a:effectLst/>
+                        </a:rPr>
+                        <a:t>Установление соединения</a:t>
+                      </a:r>
+                    </a:p>
+                  </a:txBody>
+                  <a:tcPr marL="70552" marR="70552" marT="35276" marB="35276" anchor="ctr">
+                    <a:lnL w="12700" cap="flat" cmpd="sng" algn="ctr">
+                      <a:solidFill>
+                        <a:schemeClr val="tx1"/>
+                      </a:solidFill>
+                      <a:prstDash val="solid"/>
+                      <a:round/>
+                      <a:headEnd type="none" w="med" len="med"/>
+                      <a:tailEnd type="none" w="med" len="med"/>
+                    </a:lnL>
+                    <a:lnR w="12700" cap="flat" cmpd="sng" algn="ctr">
+                      <a:solidFill>
+                        <a:schemeClr val="tx1"/>
+                      </a:solidFill>
+                      <a:prstDash val="solid"/>
+                      <a:round/>
+                      <a:headEnd type="none" w="med" len="med"/>
+                      <a:tailEnd type="none" w="med" len="med"/>
+                    </a:lnR>
+                    <a:lnT w="12700" cap="flat" cmpd="sng" algn="ctr">
+                      <a:solidFill>
+                        <a:schemeClr val="tx1"/>
+                      </a:solidFill>
+                      <a:prstDash val="solid"/>
+                      <a:round/>
+                      <a:headEnd type="none" w="med" len="med"/>
+                      <a:tailEnd type="none" w="med" len="med"/>
+                    </a:lnT>
+                    <a:lnB w="12700" cap="flat" cmpd="sng" algn="ctr">
+                      <a:solidFill>
+                        <a:schemeClr val="tx1"/>
+                      </a:solidFill>
+                      <a:prstDash val="solid"/>
+                      <a:round/>
+                      <a:headEnd type="none" w="med" len="med"/>
+                      <a:tailEnd type="none" w="med" len="med"/>
+                    </a:lnB>
+                  </a:tcPr>
+                </a:tc>
+                <a:tc>
+                  <a:txBody>
+                    <a:bodyPr/>
+                    <a:lstStyle/>
+                    <a:p>
+                      <a:pPr algn="l"/>
+                      <a:r>
+                        <a:rPr lang="ru-RU" sz="1300" b="1">
+                          <a:effectLst/>
+                        </a:rPr>
+                        <a:t>Не требуется (</a:t>
+                      </a:r>
+                      <a:r>
+                        <a:rPr lang="af-ZA" sz="1300" b="1" i="1">
+                          <a:effectLst/>
+                        </a:rPr>
+                        <a:t>Connectionless</a:t>
+                      </a:r>
+                      <a:r>
+                        <a:rPr lang="af-ZA" sz="1300" b="1">
+                          <a:effectLst/>
+                        </a:rPr>
+                        <a:t>)</a:t>
+                      </a:r>
+                    </a:p>
+                  </a:txBody>
+                  <a:tcPr marL="70552" marR="70552" marT="35276" marB="35276" anchor="ctr">
+                    <a:lnL w="12700" cap="flat" cmpd="sng" algn="ctr">
+                      <a:solidFill>
+                        <a:schemeClr val="tx1"/>
+                      </a:solidFill>
+                      <a:prstDash val="solid"/>
+                      <a:round/>
+                      <a:headEnd type="none" w="med" len="med"/>
+                      <a:tailEnd type="none" w="med" len="med"/>
+                    </a:lnL>
+                    <a:lnR w="12700" cap="flat" cmpd="sng" algn="ctr">
+                      <a:solidFill>
+                        <a:schemeClr val="tx1"/>
+                      </a:solidFill>
+                      <a:prstDash val="solid"/>
+                      <a:round/>
+                      <a:headEnd type="none" w="med" len="med"/>
+                      <a:tailEnd type="none" w="med" len="med"/>
+                    </a:lnR>
+                    <a:lnT w="12700" cap="flat" cmpd="sng" algn="ctr">
+                      <a:solidFill>
+                        <a:schemeClr val="tx1"/>
+                      </a:solidFill>
+                      <a:prstDash val="solid"/>
+                      <a:round/>
+                      <a:headEnd type="none" w="med" len="med"/>
+                      <a:tailEnd type="none" w="med" len="med"/>
+                    </a:lnT>
+                    <a:lnB w="12700" cap="flat" cmpd="sng" algn="ctr">
+                      <a:solidFill>
+                        <a:schemeClr val="tx1"/>
+                      </a:solidFill>
+                      <a:prstDash val="solid"/>
+                      <a:round/>
+                      <a:headEnd type="none" w="med" len="med"/>
+                      <a:tailEnd type="none" w="med" len="med"/>
+                    </a:lnB>
+                  </a:tcPr>
+                </a:tc>
+                <a:tc>
+                  <a:txBody>
+                    <a:bodyPr/>
+                    <a:lstStyle/>
+                    <a:p>
+                      <a:pPr algn="l"/>
+                      <a:r>
+                        <a:rPr lang="ru-RU" sz="1300" b="1">
+                          <a:effectLst/>
+                        </a:rPr>
+                        <a:t>Обязательно перед передачей (</a:t>
+                      </a:r>
+                      <a:r>
+                        <a:rPr lang="af-ZA" sz="1300" b="1" i="1">
+                          <a:effectLst/>
+                        </a:rPr>
+                        <a:t>Connection-oriented</a:t>
+                      </a:r>
+                      <a:r>
+                        <a:rPr lang="af-ZA" sz="1300" b="1">
+                          <a:effectLst/>
+                        </a:rPr>
+                        <a:t>)</a:t>
+                      </a:r>
+                    </a:p>
+                  </a:txBody>
+                  <a:tcPr marL="70552" marR="70552" marT="35276" marB="35276" anchor="ctr">
+                    <a:lnL w="12700" cap="flat" cmpd="sng" algn="ctr">
+                      <a:solidFill>
+                        <a:schemeClr val="tx1"/>
+                      </a:solidFill>
+                      <a:prstDash val="solid"/>
+                      <a:round/>
+                      <a:headEnd type="none" w="med" len="med"/>
+                      <a:tailEnd type="none" w="med" len="med"/>
+                    </a:lnL>
+                    <a:lnR w="12700" cap="flat" cmpd="sng" algn="ctr">
+                      <a:solidFill>
+                        <a:schemeClr val="tx1"/>
+                      </a:solidFill>
+                      <a:prstDash val="solid"/>
+                      <a:round/>
+                      <a:headEnd type="none" w="med" len="med"/>
+                      <a:tailEnd type="none" w="med" len="med"/>
+                    </a:lnR>
+                    <a:lnT w="12700" cap="flat" cmpd="sng" algn="ctr">
+                      <a:solidFill>
+                        <a:schemeClr val="tx1"/>
+                      </a:solidFill>
+                      <a:prstDash val="solid"/>
+                      <a:round/>
+                      <a:headEnd type="none" w="med" len="med"/>
+                      <a:tailEnd type="none" w="med" len="med"/>
+                    </a:lnT>
+                    <a:lnB w="12700" cap="flat" cmpd="sng" algn="ctr">
+                      <a:solidFill>
+                        <a:schemeClr val="tx1"/>
+                      </a:solidFill>
+                      <a:prstDash val="solid"/>
+                      <a:round/>
+                      <a:headEnd type="none" w="med" len="med"/>
+                      <a:tailEnd type="none" w="med" len="med"/>
+                    </a:lnB>
+                  </a:tcPr>
+                </a:tc>
+                <a:extLst>
+                  <a:ext uri="{0D108BD9-81ED-4DB2-BD59-A6C34878D82A}">
+                    <a16:rowId xmlns:a16="http://schemas.microsoft.com/office/drawing/2014/main" val="2273791482"/>
+                  </a:ext>
+                </a:extLst>
+              </a:tr>
+              <a:tr h="733067">
+                <a:tc>
+                  <a:txBody>
+                    <a:bodyPr/>
+                    <a:lstStyle/>
+                    <a:p>
+                      <a:pPr algn="l"/>
+                      <a:r>
+                        <a:rPr lang="ru-RU" sz="1300" b="1" dirty="0">
+                          <a:effectLst/>
+                        </a:rPr>
+                        <a:t>Адресация в заголовке</a:t>
+                      </a:r>
+                    </a:p>
+                  </a:txBody>
+                  <a:tcPr marL="70552" marR="70552" marT="35276" marB="35276" anchor="ctr">
+                    <a:lnL w="12700" cap="flat" cmpd="sng" algn="ctr">
+                      <a:solidFill>
+                        <a:schemeClr val="tx1"/>
+                      </a:solidFill>
+                      <a:prstDash val="solid"/>
+                      <a:round/>
+                      <a:headEnd type="none" w="med" len="med"/>
+                      <a:tailEnd type="none" w="med" len="med"/>
+                    </a:lnL>
+                    <a:lnR w="12700" cap="flat" cmpd="sng" algn="ctr">
+                      <a:solidFill>
+                        <a:schemeClr val="tx1"/>
+                      </a:solidFill>
+                      <a:prstDash val="solid"/>
+                      <a:round/>
+                      <a:headEnd type="none" w="med" len="med"/>
+                      <a:tailEnd type="none" w="med" len="med"/>
+                    </a:lnR>
+                    <a:lnT w="12700" cap="flat" cmpd="sng" algn="ctr">
+                      <a:solidFill>
+                        <a:schemeClr val="tx1"/>
+                      </a:solidFill>
+                      <a:prstDash val="solid"/>
+                      <a:round/>
+                      <a:headEnd type="none" w="med" len="med"/>
+                      <a:tailEnd type="none" w="med" len="med"/>
+                    </a:lnT>
+                    <a:lnB w="12700" cap="flat" cmpd="sng" algn="ctr">
+                      <a:solidFill>
+                        <a:schemeClr val="tx1"/>
+                      </a:solidFill>
+                      <a:prstDash val="solid"/>
+                      <a:round/>
+                      <a:headEnd type="none" w="med" len="med"/>
+                      <a:tailEnd type="none" w="med" len="med"/>
+                    </a:lnB>
+                  </a:tcPr>
+                </a:tc>
+                <a:tc>
+                  <a:txBody>
+                    <a:bodyPr/>
+                    <a:lstStyle/>
+                    <a:p>
+                      <a:pPr algn="l"/>
+                      <a:r>
+                        <a:rPr lang="ru-RU" sz="1300" b="1" dirty="0">
+                          <a:effectLst/>
+                        </a:rPr>
+                        <a:t>Полный глобальный адрес назначения (напр., MAC-адрес)</a:t>
+                      </a:r>
+                    </a:p>
+                  </a:txBody>
+                  <a:tcPr marL="70552" marR="70552" marT="35276" marB="35276" anchor="ctr">
+                    <a:lnL w="12700" cap="flat" cmpd="sng" algn="ctr">
+                      <a:solidFill>
+                        <a:schemeClr val="tx1"/>
+                      </a:solidFill>
+                      <a:prstDash val="solid"/>
+                      <a:round/>
+                      <a:headEnd type="none" w="med" len="med"/>
+                      <a:tailEnd type="none" w="med" len="med"/>
+                    </a:lnL>
+                    <a:lnR w="12700" cap="flat" cmpd="sng" algn="ctr">
+                      <a:solidFill>
+                        <a:schemeClr val="tx1"/>
+                      </a:solidFill>
+                      <a:prstDash val="solid"/>
+                      <a:round/>
+                      <a:headEnd type="none" w="med" len="med"/>
+                      <a:tailEnd type="none" w="med" len="med"/>
+                    </a:lnR>
+                    <a:lnT w="12700" cap="flat" cmpd="sng" algn="ctr">
+                      <a:solidFill>
+                        <a:schemeClr val="tx1"/>
+                      </a:solidFill>
+                      <a:prstDash val="solid"/>
+                      <a:round/>
+                      <a:headEnd type="none" w="med" len="med"/>
+                      <a:tailEnd type="none" w="med" len="med"/>
+                    </a:lnT>
+                    <a:lnB w="12700" cap="flat" cmpd="sng" algn="ctr">
+                      <a:solidFill>
+                        <a:schemeClr val="tx1"/>
+                      </a:solidFill>
+                      <a:prstDash val="solid"/>
+                      <a:round/>
+                      <a:headEnd type="none" w="med" len="med"/>
+                      <a:tailEnd type="none" w="med" len="med"/>
+                    </a:lnB>
+                  </a:tcPr>
+                </a:tc>
+                <a:tc>
+                  <a:txBody>
+                    <a:bodyPr/>
+                    <a:lstStyle/>
+                    <a:p>
+                      <a:pPr algn="l"/>
+                      <a:r>
+                        <a:rPr lang="ru-RU" sz="1300" b="1">
+                          <a:effectLst/>
+                        </a:rPr>
+                        <a:t>Короткий локальный идентификатор (</a:t>
+                      </a:r>
+                      <a:r>
+                        <a:rPr lang="af-ZA" sz="1300" b="1">
+                          <a:effectLst/>
+                        </a:rPr>
+                        <a:t>VCI)</a:t>
+                      </a:r>
+                    </a:p>
+                  </a:txBody>
+                  <a:tcPr marL="70552" marR="70552" marT="35276" marB="35276" anchor="ctr">
+                    <a:lnL w="12700" cap="flat" cmpd="sng" algn="ctr">
+                      <a:solidFill>
+                        <a:schemeClr val="tx1"/>
+                      </a:solidFill>
+                      <a:prstDash val="solid"/>
+                      <a:round/>
+                      <a:headEnd type="none" w="med" len="med"/>
+                      <a:tailEnd type="none" w="med" len="med"/>
+                    </a:lnL>
+                    <a:lnR w="12700" cap="flat" cmpd="sng" algn="ctr">
+                      <a:solidFill>
+                        <a:schemeClr val="tx1"/>
+                      </a:solidFill>
+                      <a:prstDash val="solid"/>
+                      <a:round/>
+                      <a:headEnd type="none" w="med" len="med"/>
+                      <a:tailEnd type="none" w="med" len="med"/>
+                    </a:lnR>
+                    <a:lnT w="12700" cap="flat" cmpd="sng" algn="ctr">
+                      <a:solidFill>
+                        <a:schemeClr val="tx1"/>
+                      </a:solidFill>
+                      <a:prstDash val="solid"/>
+                      <a:round/>
+                      <a:headEnd type="none" w="med" len="med"/>
+                      <a:tailEnd type="none" w="med" len="med"/>
+                    </a:lnT>
+                    <a:lnB w="12700" cap="flat" cmpd="sng" algn="ctr">
+                      <a:solidFill>
+                        <a:schemeClr val="tx1"/>
+                      </a:solidFill>
+                      <a:prstDash val="solid"/>
+                      <a:round/>
+                      <a:headEnd type="none" w="med" len="med"/>
+                      <a:tailEnd type="none" w="med" len="med"/>
+                    </a:lnB>
+                  </a:tcPr>
+                </a:tc>
+                <a:extLst>
+                  <a:ext uri="{0D108BD9-81ED-4DB2-BD59-A6C34878D82A}">
+                    <a16:rowId xmlns:a16="http://schemas.microsoft.com/office/drawing/2014/main" val="4068177151"/>
+                  </a:ext>
+                </a:extLst>
+              </a:tr>
+              <a:tr h="733067">
+                <a:tc>
+                  <a:txBody>
+                    <a:bodyPr/>
+                    <a:lstStyle/>
+                    <a:p>
+                      <a:pPr algn="l"/>
+                      <a:r>
+                        <a:rPr lang="ru-RU" sz="1300" b="1">
+                          <a:effectLst/>
+                        </a:rPr>
+                        <a:t>Таблица коммутатора</a:t>
+                      </a:r>
+                    </a:p>
+                  </a:txBody>
+                  <a:tcPr marL="70552" marR="70552" marT="35276" marB="35276" anchor="ctr">
+                    <a:lnL w="12700" cap="flat" cmpd="sng" algn="ctr">
+                      <a:solidFill>
+                        <a:schemeClr val="tx1"/>
+                      </a:solidFill>
+                      <a:prstDash val="solid"/>
+                      <a:round/>
+                      <a:headEnd type="none" w="med" len="med"/>
+                      <a:tailEnd type="none" w="med" len="med"/>
+                    </a:lnL>
+                    <a:lnR w="12700" cap="flat" cmpd="sng" algn="ctr">
+                      <a:solidFill>
+                        <a:schemeClr val="tx1"/>
+                      </a:solidFill>
+                      <a:prstDash val="solid"/>
+                      <a:round/>
+                      <a:headEnd type="none" w="med" len="med"/>
+                      <a:tailEnd type="none" w="med" len="med"/>
+                    </a:lnR>
+                    <a:lnT w="12700" cap="flat" cmpd="sng" algn="ctr">
+                      <a:solidFill>
+                        <a:schemeClr val="tx1"/>
+                      </a:solidFill>
+                      <a:prstDash val="solid"/>
+                      <a:round/>
+                      <a:headEnd type="none" w="med" len="med"/>
+                      <a:tailEnd type="none" w="med" len="med"/>
+                    </a:lnT>
+                    <a:lnB w="12700" cap="flat" cmpd="sng" algn="ctr">
+                      <a:solidFill>
+                        <a:schemeClr val="tx1"/>
+                      </a:solidFill>
+                      <a:prstDash val="solid"/>
+                      <a:round/>
+                      <a:headEnd type="none" w="med" len="med"/>
+                      <a:tailEnd type="none" w="med" len="med"/>
+                    </a:lnB>
+                  </a:tcPr>
+                </a:tc>
+                <a:tc>
+                  <a:txBody>
+                    <a:bodyPr/>
+                    <a:lstStyle/>
+                    <a:p>
+                      <a:pPr algn="l"/>
+                      <a:r>
+                        <a:rPr lang="ru-RU" sz="1300" b="1" dirty="0">
+                          <a:effectLst/>
+                        </a:rPr>
+                        <a:t>Таблица коммутации: [Адрес назначения → Порт]</a:t>
+                      </a:r>
+                    </a:p>
+                  </a:txBody>
+                  <a:tcPr marL="70552" marR="70552" marT="35276" marB="35276" anchor="ctr">
+                    <a:lnL w="12700" cap="flat" cmpd="sng" algn="ctr">
+                      <a:solidFill>
+                        <a:schemeClr val="tx1"/>
+                      </a:solidFill>
+                      <a:prstDash val="solid"/>
+                      <a:round/>
+                      <a:headEnd type="none" w="med" len="med"/>
+                      <a:tailEnd type="none" w="med" len="med"/>
+                    </a:lnL>
+                    <a:lnR w="12700" cap="flat" cmpd="sng" algn="ctr">
+                      <a:solidFill>
+                        <a:schemeClr val="tx1"/>
+                      </a:solidFill>
+                      <a:prstDash val="solid"/>
+                      <a:round/>
+                      <a:headEnd type="none" w="med" len="med"/>
+                      <a:tailEnd type="none" w="med" len="med"/>
+                    </a:lnR>
+                    <a:lnT w="12700" cap="flat" cmpd="sng" algn="ctr">
+                      <a:solidFill>
+                        <a:schemeClr val="tx1"/>
+                      </a:solidFill>
+                      <a:prstDash val="solid"/>
+                      <a:round/>
+                      <a:headEnd type="none" w="med" len="med"/>
+                      <a:tailEnd type="none" w="med" len="med"/>
+                    </a:lnT>
+                    <a:lnB w="12700" cap="flat" cmpd="sng" algn="ctr">
+                      <a:solidFill>
+                        <a:schemeClr val="tx1"/>
+                      </a:solidFill>
+                      <a:prstDash val="solid"/>
+                      <a:round/>
+                      <a:headEnd type="none" w="med" len="med"/>
+                      <a:tailEnd type="none" w="med" len="med"/>
+                    </a:lnB>
+                  </a:tcPr>
+                </a:tc>
+                <a:tc>
+                  <a:txBody>
+                    <a:bodyPr/>
+                    <a:lstStyle/>
+                    <a:p>
+                      <a:pPr algn="l"/>
+                      <a:r>
+                        <a:rPr lang="ru-RU" sz="1300" b="1">
+                          <a:effectLst/>
+                        </a:rPr>
+                        <a:t>Таблица VC: [Порт вх., VCI вх. → Порт вых., VCI вых.]</a:t>
+                      </a:r>
+                    </a:p>
+                  </a:txBody>
+                  <a:tcPr marL="70552" marR="70552" marT="35276" marB="35276" anchor="ctr">
+                    <a:lnL w="12700" cap="flat" cmpd="sng" algn="ctr">
+                      <a:solidFill>
+                        <a:schemeClr val="tx1"/>
+                      </a:solidFill>
+                      <a:prstDash val="solid"/>
+                      <a:round/>
+                      <a:headEnd type="none" w="med" len="med"/>
+                      <a:tailEnd type="none" w="med" len="med"/>
+                    </a:lnL>
+                    <a:lnR w="12700" cap="flat" cmpd="sng" algn="ctr">
+                      <a:solidFill>
+                        <a:schemeClr val="tx1"/>
+                      </a:solidFill>
+                      <a:prstDash val="solid"/>
+                      <a:round/>
+                      <a:headEnd type="none" w="med" len="med"/>
+                      <a:tailEnd type="none" w="med" len="med"/>
+                    </a:lnR>
+                    <a:lnT w="12700" cap="flat" cmpd="sng" algn="ctr">
+                      <a:solidFill>
+                        <a:schemeClr val="tx1"/>
+                      </a:solidFill>
+                      <a:prstDash val="solid"/>
+                      <a:round/>
+                      <a:headEnd type="none" w="med" len="med"/>
+                      <a:tailEnd type="none" w="med" len="med"/>
+                    </a:lnT>
+                    <a:lnB w="12700" cap="flat" cmpd="sng" algn="ctr">
+                      <a:solidFill>
+                        <a:schemeClr val="tx1"/>
+                      </a:solidFill>
+                      <a:prstDash val="solid"/>
+                      <a:round/>
+                      <a:headEnd type="none" w="med" len="med"/>
+                      <a:tailEnd type="none" w="med" len="med"/>
+                    </a:lnB>
+                  </a:tcPr>
+                </a:tc>
+                <a:extLst>
+                  <a:ext uri="{0D108BD9-81ED-4DB2-BD59-A6C34878D82A}">
+                    <a16:rowId xmlns:a16="http://schemas.microsoft.com/office/drawing/2014/main" val="191536145"/>
+                  </a:ext>
+                </a:extLst>
+              </a:tr>
+              <a:tr h="1045380">
+                <a:tc>
+                  <a:txBody>
+                    <a:bodyPr/>
+                    <a:lstStyle/>
+                    <a:p>
+                      <a:pPr algn="l"/>
+                      <a:r>
+                        <a:rPr lang="ru-RU" sz="1300" b="1">
+                          <a:effectLst/>
+                        </a:rPr>
+                        <a:t>Маршрут пакетов/кадров</a:t>
+                      </a:r>
+                    </a:p>
+                  </a:txBody>
+                  <a:tcPr marL="70552" marR="70552" marT="35276" marB="35276" anchor="ctr">
+                    <a:lnL w="12700" cap="flat" cmpd="sng" algn="ctr">
+                      <a:solidFill>
+                        <a:schemeClr val="tx1"/>
+                      </a:solidFill>
+                      <a:prstDash val="solid"/>
+                      <a:round/>
+                      <a:headEnd type="none" w="med" len="med"/>
+                      <a:tailEnd type="none" w="med" len="med"/>
+                    </a:lnL>
+                    <a:lnR w="12700" cap="flat" cmpd="sng" algn="ctr">
+                      <a:solidFill>
+                        <a:schemeClr val="tx1"/>
+                      </a:solidFill>
+                      <a:prstDash val="solid"/>
+                      <a:round/>
+                      <a:headEnd type="none" w="med" len="med"/>
+                      <a:tailEnd type="none" w="med" len="med"/>
+                    </a:lnR>
+                    <a:lnT w="12700" cap="flat" cmpd="sng" algn="ctr">
+                      <a:solidFill>
+                        <a:schemeClr val="tx1"/>
+                      </a:solidFill>
+                      <a:prstDash val="solid"/>
+                      <a:round/>
+                      <a:headEnd type="none" w="med" len="med"/>
+                      <a:tailEnd type="none" w="med" len="med"/>
+                    </a:lnT>
+                    <a:lnB w="12700" cap="flat" cmpd="sng" algn="ctr">
+                      <a:solidFill>
+                        <a:schemeClr val="tx1"/>
+                      </a:solidFill>
+                      <a:prstDash val="solid"/>
+                      <a:round/>
+                      <a:headEnd type="none" w="med" len="med"/>
+                      <a:tailEnd type="none" w="med" len="med"/>
+                    </a:lnB>
+                  </a:tcPr>
+                </a:tc>
+                <a:tc>
+                  <a:txBody>
+                    <a:bodyPr/>
+                    <a:lstStyle/>
+                    <a:p>
+                      <a:pPr algn="l"/>
+                      <a:r>
+                        <a:rPr lang="ru-RU" sz="1300" b="1" dirty="0">
+                          <a:effectLst/>
+                        </a:rPr>
+                        <a:t>Каждый кадр маршрутизируется независимо (пути могут различаться)</a:t>
+                      </a:r>
+                    </a:p>
+                  </a:txBody>
+                  <a:tcPr marL="70552" marR="70552" marT="35276" marB="35276" anchor="ctr">
+                    <a:lnL w="12700" cap="flat" cmpd="sng" algn="ctr">
+                      <a:solidFill>
+                        <a:schemeClr val="tx1"/>
+                      </a:solidFill>
+                      <a:prstDash val="solid"/>
+                      <a:round/>
+                      <a:headEnd type="none" w="med" len="med"/>
+                      <a:tailEnd type="none" w="med" len="med"/>
+                    </a:lnL>
+                    <a:lnR w="12700" cap="flat" cmpd="sng" algn="ctr">
+                      <a:solidFill>
+                        <a:schemeClr val="tx1"/>
+                      </a:solidFill>
+                      <a:prstDash val="solid"/>
+                      <a:round/>
+                      <a:headEnd type="none" w="med" len="med"/>
+                      <a:tailEnd type="none" w="med" len="med"/>
+                    </a:lnR>
+                    <a:lnT w="12700" cap="flat" cmpd="sng" algn="ctr">
+                      <a:solidFill>
+                        <a:schemeClr val="tx1"/>
+                      </a:solidFill>
+                      <a:prstDash val="solid"/>
+                      <a:round/>
+                      <a:headEnd type="none" w="med" len="med"/>
+                      <a:tailEnd type="none" w="med" len="med"/>
+                    </a:lnT>
+                    <a:lnB w="12700" cap="flat" cmpd="sng" algn="ctr">
+                      <a:solidFill>
+                        <a:schemeClr val="tx1"/>
+                      </a:solidFill>
+                      <a:prstDash val="solid"/>
+                      <a:round/>
+                      <a:headEnd type="none" w="med" len="med"/>
+                      <a:tailEnd type="none" w="med" len="med"/>
+                    </a:lnB>
+                  </a:tcPr>
+                </a:tc>
+                <a:tc>
+                  <a:txBody>
+                    <a:bodyPr/>
+                    <a:lstStyle/>
+                    <a:p>
+                      <a:pPr algn="l"/>
+                      <a:r>
+                        <a:rPr lang="ru-RU" sz="1300" b="1" dirty="0">
+                          <a:effectLst/>
+                        </a:rPr>
+                        <a:t>Все кадры одного соединения строго идут по заданному пути</a:t>
+                      </a:r>
+                    </a:p>
+                  </a:txBody>
+                  <a:tcPr marL="70552" marR="70552" marT="35276" marB="35276" anchor="ctr">
+                    <a:lnL w="12700" cap="flat" cmpd="sng" algn="ctr">
+                      <a:solidFill>
+                        <a:schemeClr val="tx1"/>
+                      </a:solidFill>
+                      <a:prstDash val="solid"/>
+                      <a:round/>
+                      <a:headEnd type="none" w="med" len="med"/>
+                      <a:tailEnd type="none" w="med" len="med"/>
+                    </a:lnL>
+                    <a:lnR w="12700" cap="flat" cmpd="sng" algn="ctr">
+                      <a:solidFill>
+                        <a:schemeClr val="tx1"/>
+                      </a:solidFill>
+                      <a:prstDash val="solid"/>
+                      <a:round/>
+                      <a:headEnd type="none" w="med" len="med"/>
+                      <a:tailEnd type="none" w="med" len="med"/>
+                    </a:lnR>
+                    <a:lnT w="12700" cap="flat" cmpd="sng" algn="ctr">
+                      <a:solidFill>
+                        <a:schemeClr val="tx1"/>
+                      </a:solidFill>
+                      <a:prstDash val="solid"/>
+                      <a:round/>
+                      <a:headEnd type="none" w="med" len="med"/>
+                      <a:tailEnd type="none" w="med" len="med"/>
+                    </a:lnT>
+                    <a:lnB w="12700" cap="flat" cmpd="sng" algn="ctr">
+                      <a:solidFill>
+                        <a:schemeClr val="tx1"/>
+                      </a:solidFill>
+                      <a:prstDash val="solid"/>
+                      <a:round/>
+                      <a:headEnd type="none" w="med" len="med"/>
+                      <a:tailEnd type="none" w="med" len="med"/>
+                    </a:lnB>
+                  </a:tcPr>
+                </a:tc>
+                <a:extLst>
+                  <a:ext uri="{0D108BD9-81ED-4DB2-BD59-A6C34878D82A}">
+                    <a16:rowId xmlns:a16="http://schemas.microsoft.com/office/drawing/2014/main" val="697335990"/>
+                  </a:ext>
+                </a:extLst>
+              </a:tr>
+              <a:tr h="1045380">
+                <a:tc>
+                  <a:txBody>
+                    <a:bodyPr/>
+                    <a:lstStyle/>
+                    <a:p>
+                      <a:pPr algn="l"/>
+                      <a:r>
+                        <a:rPr lang="ru-RU" sz="1300" b="1">
+                          <a:effectLst/>
+                        </a:rPr>
+                        <a:t>Устойчивость к сбоям</a:t>
+                      </a:r>
+                    </a:p>
+                  </a:txBody>
+                  <a:tcPr marL="70552" marR="70552" marT="35276" marB="35276" anchor="ctr">
+                    <a:lnL w="12700" cap="flat" cmpd="sng" algn="ctr">
+                      <a:solidFill>
+                        <a:schemeClr val="tx1"/>
+                      </a:solidFill>
+                      <a:prstDash val="solid"/>
+                      <a:round/>
+                      <a:headEnd type="none" w="med" len="med"/>
+                      <a:tailEnd type="none" w="med" len="med"/>
+                    </a:lnL>
+                    <a:lnR w="12700" cap="flat" cmpd="sng" algn="ctr">
+                      <a:solidFill>
+                        <a:schemeClr val="tx1"/>
+                      </a:solidFill>
+                      <a:prstDash val="solid"/>
+                      <a:round/>
+                      <a:headEnd type="none" w="med" len="med"/>
+                      <a:tailEnd type="none" w="med" len="med"/>
+                    </a:lnR>
+                    <a:lnT w="12700" cap="flat" cmpd="sng" algn="ctr">
+                      <a:solidFill>
+                        <a:schemeClr val="tx1"/>
+                      </a:solidFill>
+                      <a:prstDash val="solid"/>
+                      <a:round/>
+                      <a:headEnd type="none" w="med" len="med"/>
+                      <a:tailEnd type="none" w="med" len="med"/>
+                    </a:lnT>
+                    <a:lnB w="12700" cap="flat" cmpd="sng" algn="ctr">
+                      <a:solidFill>
+                        <a:schemeClr val="tx1"/>
+                      </a:solidFill>
+                      <a:prstDash val="solid"/>
+                      <a:round/>
+                      <a:headEnd type="none" w="med" len="med"/>
+                      <a:tailEnd type="none" w="med" len="med"/>
+                    </a:lnB>
+                  </a:tcPr>
+                </a:tc>
+                <a:tc>
+                  <a:txBody>
+                    <a:bodyPr/>
+                    <a:lstStyle/>
+                    <a:p>
+                      <a:pPr algn="l"/>
+                      <a:r>
+                        <a:rPr lang="ru-RU" sz="1300" b="1">
+                          <a:effectLst/>
+                        </a:rPr>
+                        <a:t>Высокая (динамическая перемаршрутизация при сбое узла/канала)</a:t>
+                      </a:r>
+                    </a:p>
+                  </a:txBody>
+                  <a:tcPr marL="70552" marR="70552" marT="35276" marB="35276" anchor="ctr">
+                    <a:lnL w="12700" cap="flat" cmpd="sng" algn="ctr">
+                      <a:solidFill>
+                        <a:schemeClr val="tx1"/>
+                      </a:solidFill>
+                      <a:prstDash val="solid"/>
+                      <a:round/>
+                      <a:headEnd type="none" w="med" len="med"/>
+                      <a:tailEnd type="none" w="med" len="med"/>
+                    </a:lnL>
+                    <a:lnR w="12700" cap="flat" cmpd="sng" algn="ctr">
+                      <a:solidFill>
+                        <a:schemeClr val="tx1"/>
+                      </a:solidFill>
+                      <a:prstDash val="solid"/>
+                      <a:round/>
+                      <a:headEnd type="none" w="med" len="med"/>
+                      <a:tailEnd type="none" w="med" len="med"/>
+                    </a:lnR>
+                    <a:lnT w="12700" cap="flat" cmpd="sng" algn="ctr">
+                      <a:solidFill>
+                        <a:schemeClr val="tx1"/>
+                      </a:solidFill>
+                      <a:prstDash val="solid"/>
+                      <a:round/>
+                      <a:headEnd type="none" w="med" len="med"/>
+                      <a:tailEnd type="none" w="med" len="med"/>
+                    </a:lnT>
+                    <a:lnB w="12700" cap="flat" cmpd="sng" algn="ctr">
+                      <a:solidFill>
+                        <a:schemeClr val="tx1"/>
+                      </a:solidFill>
+                      <a:prstDash val="solid"/>
+                      <a:round/>
+                      <a:headEnd type="none" w="med" len="med"/>
+                      <a:tailEnd type="none" w="med" len="med"/>
+                    </a:lnB>
+                  </a:tcPr>
+                </a:tc>
+                <a:tc>
+                  <a:txBody>
+                    <a:bodyPr/>
+                    <a:lstStyle/>
+                    <a:p>
+                      <a:pPr algn="l"/>
+                      <a:r>
+                        <a:rPr lang="ru-RU" sz="1300" b="1" dirty="0">
+                          <a:effectLst/>
+                        </a:rPr>
+                        <a:t>Требуется полное </a:t>
+                      </a:r>
+                      <a:r>
+                        <a:rPr lang="ru-RU" sz="1300" b="1" dirty="0" err="1">
+                          <a:effectLst/>
+                        </a:rPr>
+                        <a:t>переустановление</a:t>
+                      </a:r>
+                      <a:r>
+                        <a:rPr lang="ru-RU" sz="1300" b="1" dirty="0">
+                          <a:effectLst/>
+                        </a:rPr>
+                        <a:t> виртуального канала при сбое</a:t>
+                      </a:r>
+                    </a:p>
+                  </a:txBody>
+                  <a:tcPr marL="70552" marR="70552" marT="35276" marB="35276" anchor="ctr">
+                    <a:lnL w="12700" cap="flat" cmpd="sng" algn="ctr">
+                      <a:solidFill>
+                        <a:schemeClr val="tx1"/>
+                      </a:solidFill>
+                      <a:prstDash val="solid"/>
+                      <a:round/>
+                      <a:headEnd type="none" w="med" len="med"/>
+                      <a:tailEnd type="none" w="med" len="med"/>
+                    </a:lnL>
+                    <a:lnR w="12700" cap="flat" cmpd="sng" algn="ctr">
+                      <a:solidFill>
+                        <a:schemeClr val="tx1"/>
+                      </a:solidFill>
+                      <a:prstDash val="solid"/>
+                      <a:round/>
+                      <a:headEnd type="none" w="med" len="med"/>
+                      <a:tailEnd type="none" w="med" len="med"/>
+                    </a:lnR>
+                    <a:lnT w="12700" cap="flat" cmpd="sng" algn="ctr">
+                      <a:solidFill>
+                        <a:schemeClr val="tx1"/>
+                      </a:solidFill>
+                      <a:prstDash val="solid"/>
+                      <a:round/>
+                      <a:headEnd type="none" w="med" len="med"/>
+                      <a:tailEnd type="none" w="med" len="med"/>
+                    </a:lnT>
+                    <a:lnB w="12700" cap="flat" cmpd="sng" algn="ctr">
+                      <a:solidFill>
+                        <a:schemeClr val="tx1"/>
+                      </a:solidFill>
+                      <a:prstDash val="solid"/>
+                      <a:round/>
+                      <a:headEnd type="none" w="med" len="med"/>
+                      <a:tailEnd type="none" w="med" len="med"/>
+                    </a:lnB>
+                  </a:tcPr>
+                </a:tc>
+                <a:extLst>
+                  <a:ext uri="{0D108BD9-81ED-4DB2-BD59-A6C34878D82A}">
+                    <a16:rowId xmlns:a16="http://schemas.microsoft.com/office/drawing/2014/main" val="996016214"/>
+                  </a:ext>
+                </a:extLst>
+              </a:tr>
+              <a:tr h="420754">
+                <a:tc>
+                  <a:txBody>
+                    <a:bodyPr/>
+                    <a:lstStyle/>
+                    <a:p>
+                      <a:pPr algn="l"/>
+                      <a:r>
+                        <a:rPr lang="ru-RU" sz="1300" b="1">
+                          <a:effectLst/>
+                        </a:rPr>
+                        <a:t>Примеры технологий</a:t>
+                      </a:r>
+                    </a:p>
+                  </a:txBody>
+                  <a:tcPr marL="70552" marR="70552" marT="35276" marB="35276" anchor="ctr">
+                    <a:lnL w="12700" cap="flat" cmpd="sng" algn="ctr">
+                      <a:solidFill>
+                        <a:schemeClr val="tx1"/>
+                      </a:solidFill>
+                      <a:prstDash val="solid"/>
+                      <a:round/>
+                      <a:headEnd type="none" w="med" len="med"/>
+                      <a:tailEnd type="none" w="med" len="med"/>
+                    </a:lnL>
+                    <a:lnR w="12700" cap="flat" cmpd="sng" algn="ctr">
+                      <a:solidFill>
+                        <a:schemeClr val="tx1"/>
+                      </a:solidFill>
+                      <a:prstDash val="solid"/>
+                      <a:round/>
+                      <a:headEnd type="none" w="med" len="med"/>
+                      <a:tailEnd type="none" w="med" len="med"/>
+                    </a:lnR>
+                    <a:lnT w="12700" cap="flat" cmpd="sng" algn="ctr">
+                      <a:solidFill>
+                        <a:schemeClr val="tx1"/>
+                      </a:solidFill>
+                      <a:prstDash val="solid"/>
+                      <a:round/>
+                      <a:headEnd type="none" w="med" len="med"/>
+                      <a:tailEnd type="none" w="med" len="med"/>
+                    </a:lnT>
+                    <a:lnB w="12700" cap="flat" cmpd="sng" algn="ctr">
+                      <a:solidFill>
+                        <a:schemeClr val="tx1"/>
+                      </a:solidFill>
+                      <a:prstDash val="solid"/>
+                      <a:round/>
+                      <a:headEnd type="none" w="med" len="med"/>
+                      <a:tailEnd type="none" w="med" len="med"/>
+                    </a:lnB>
+                  </a:tcPr>
+                </a:tc>
+                <a:tc>
+                  <a:txBody>
+                    <a:bodyPr/>
+                    <a:lstStyle/>
+                    <a:p>
+                      <a:pPr algn="l"/>
+                      <a:r>
+                        <a:rPr lang="af-ZA" sz="1300" b="1">
+                          <a:effectLst/>
+                        </a:rPr>
+                        <a:t>Ethernet, IP</a:t>
+                      </a:r>
+                    </a:p>
+                  </a:txBody>
+                  <a:tcPr marL="70552" marR="70552" marT="35276" marB="35276" anchor="ctr">
+                    <a:lnL w="12700" cap="flat" cmpd="sng" algn="ctr">
+                      <a:solidFill>
+                        <a:schemeClr val="tx1"/>
+                      </a:solidFill>
+                      <a:prstDash val="solid"/>
+                      <a:round/>
+                      <a:headEnd type="none" w="med" len="med"/>
+                      <a:tailEnd type="none" w="med" len="med"/>
+                    </a:lnL>
+                    <a:lnR w="12700" cap="flat" cmpd="sng" algn="ctr">
+                      <a:solidFill>
+                        <a:schemeClr val="tx1"/>
+                      </a:solidFill>
+                      <a:prstDash val="solid"/>
+                      <a:round/>
+                      <a:headEnd type="none" w="med" len="med"/>
+                      <a:tailEnd type="none" w="med" len="med"/>
+                    </a:lnR>
+                    <a:lnT w="12700" cap="flat" cmpd="sng" algn="ctr">
+                      <a:solidFill>
+                        <a:schemeClr val="tx1"/>
+                      </a:solidFill>
+                      <a:prstDash val="solid"/>
+                      <a:round/>
+                      <a:headEnd type="none" w="med" len="med"/>
+                      <a:tailEnd type="none" w="med" len="med"/>
+                    </a:lnT>
+                    <a:lnB w="12700" cap="flat" cmpd="sng" algn="ctr">
+                      <a:solidFill>
+                        <a:schemeClr val="tx1"/>
+                      </a:solidFill>
+                      <a:prstDash val="solid"/>
+                      <a:round/>
+                      <a:headEnd type="none" w="med" len="med"/>
+                      <a:tailEnd type="none" w="med" len="med"/>
+                    </a:lnB>
+                  </a:tcPr>
+                </a:tc>
+                <a:tc>
+                  <a:txBody>
+                    <a:bodyPr/>
+                    <a:lstStyle/>
+                    <a:p>
+                      <a:pPr algn="l"/>
+                      <a:r>
+                        <a:rPr lang="af-ZA" sz="1300" b="1" dirty="0">
+                          <a:effectLst/>
+                        </a:rPr>
+                        <a:t>ATM, Frame Relay, X.25, MPLS</a:t>
+                      </a:r>
+                    </a:p>
+                  </a:txBody>
+                  <a:tcPr marL="70552" marR="70552" marT="35276" marB="35276" anchor="ctr">
+                    <a:lnL w="12700" cap="flat" cmpd="sng" algn="ctr">
+                      <a:solidFill>
+                        <a:schemeClr val="tx1"/>
+                      </a:solidFill>
+                      <a:prstDash val="solid"/>
+                      <a:round/>
+                      <a:headEnd type="none" w="med" len="med"/>
+                      <a:tailEnd type="none" w="med" len="med"/>
+                    </a:lnL>
+                    <a:lnR w="12700" cap="flat" cmpd="sng" algn="ctr">
+                      <a:solidFill>
+                        <a:schemeClr val="tx1"/>
+                      </a:solidFill>
+                      <a:prstDash val="solid"/>
+                      <a:round/>
+                      <a:headEnd type="none" w="med" len="med"/>
+                      <a:tailEnd type="none" w="med" len="med"/>
+                    </a:lnR>
+                    <a:lnT w="12700" cap="flat" cmpd="sng" algn="ctr">
+                      <a:solidFill>
+                        <a:schemeClr val="tx1"/>
+                      </a:solidFill>
+                      <a:prstDash val="solid"/>
+                      <a:round/>
+                      <a:headEnd type="none" w="med" len="med"/>
+                      <a:tailEnd type="none" w="med" len="med"/>
+                    </a:lnT>
+                    <a:lnB w="12700" cap="flat" cmpd="sng" algn="ctr">
+                      <a:solidFill>
+                        <a:schemeClr val="tx1"/>
+                      </a:solidFill>
+                      <a:prstDash val="solid"/>
+                      <a:round/>
+                      <a:headEnd type="none" w="med" len="med"/>
+                      <a:tailEnd type="none" w="med" len="med"/>
+                    </a:lnB>
+                  </a:tcPr>
+                </a:tc>
+                <a:extLst>
+                  <a:ext uri="{0D108BD9-81ED-4DB2-BD59-A6C34878D82A}">
+                    <a16:rowId xmlns:a16="http://schemas.microsoft.com/office/drawing/2014/main" val="2921308919"/>
+                  </a:ext>
+                </a:extLst>
+              </a:tr>
+            </a:tbl>
+          </a:graphicData>
+        </a:graphic>
+      </p:graphicFrame>
     </p:spTree>
     <p:extLst>
       <p:ext uri="{BB962C8B-B14F-4D97-AF65-F5344CB8AC3E}">
-        <p14:creationId xmlns:p14="http://schemas.microsoft.com/office/powerpoint/2010/main" val="3268469599"/>
+        <p14:creationId xmlns:p14="http://schemas.microsoft.com/office/powerpoint/2010/main" val="3792789440"/>
       </p:ext>
     </p:extLst>
   </p:cSld>
   <p:clrMapOvr>
     <a:masterClrMapping/>
   </p:clrMapOvr>
+  <p:timing>
+    <p:tnLst>
+      <p:par>
+        <p:cTn id="1" dur="indefinite" restart="never" nodeType="tmRoot"/>
+      </p:par>
+    </p:tnLst>
+  </p:timing>
 </p:sld>
 </file>
 
@@ -12650,6 +13811,140 @@
         </p:nvSpPr>
         <p:spPr/>
         <p:txBody>
+          <a:bodyPr>
+            <a:normAutofit fontScale="90000"/>
+          </a:bodyPr>
+          <a:lstStyle/>
+          <a:p>
+            <a:r>
+              <a:rPr lang="ru-RU" dirty="0"/>
+              <a:t>Распределите утверждения по двум колонкам — </a:t>
+            </a:r>
+            <a:r>
+              <a:rPr lang="ru-RU" b="1" dirty="0"/>
+              <a:t>[Д]</a:t>
+            </a:r>
+            <a:r>
+              <a:rPr lang="ru-RU" dirty="0"/>
+              <a:t> (</a:t>
+            </a:r>
+            <a:r>
+              <a:rPr lang="ru-RU" dirty="0" err="1"/>
+              <a:t>Датаграммный</a:t>
+            </a:r>
+            <a:r>
+              <a:rPr lang="ru-RU" dirty="0"/>
+              <a:t> подход) или </a:t>
+            </a:r>
+            <a:r>
+              <a:rPr lang="ru-RU" b="1" dirty="0"/>
+              <a:t>[ВК]</a:t>
+            </a:r>
+            <a:r>
+              <a:rPr lang="ru-RU" dirty="0"/>
+              <a:t> (Виртуальные каналы):</a:t>
+            </a:r>
+          </a:p>
+        </p:txBody>
+      </p:sp>
+      <p:sp>
+        <p:nvSpPr>
+          <p:cNvPr id="3" name="Объект 2"/>
+          <p:cNvSpPr>
+            <a:spLocks noGrp="1"/>
+          </p:cNvSpPr>
+          <p:nvPr>
+            <p:ph idx="1"/>
+          </p:nvPr>
+        </p:nvSpPr>
+        <p:spPr>
+          <a:xfrm>
+            <a:off x="1141412" y="2249486"/>
+            <a:ext cx="9905999" cy="4204067"/>
+          </a:xfrm>
+        </p:spPr>
+        <p:txBody>
+          <a:bodyPr>
+            <a:normAutofit fontScale="92500" lnSpcReduction="10000"/>
+          </a:bodyPr>
+          <a:lstStyle/>
+          <a:p>
+            <a:r>
+              <a:rPr lang="ru-RU" dirty="0"/>
+              <a:t>Требуется предварительная фаза установления соединения перед отправкой данных.</a:t>
+            </a:r>
+          </a:p>
+          <a:p>
+            <a:r>
+              <a:rPr lang="ru-RU" dirty="0"/>
+              <a:t>Каждый кадр содержит полный адрес узла назначения.</a:t>
+            </a:r>
+          </a:p>
+          <a:p>
+            <a:r>
+              <a:rPr lang="ru-RU" dirty="0"/>
+              <a:t>Идентификатор в заголовке кадра (VCI) может меняться от коммутатора к коммутатору.</a:t>
+            </a:r>
+          </a:p>
+          <a:p>
+            <a:r>
+              <a:rPr lang="ru-RU" dirty="0"/>
+              <a:t>Последовательные кадры между одними и теми же узлами могут передаваться разными маршрутами.</a:t>
+            </a:r>
+          </a:p>
+          <a:p>
+            <a:r>
+              <a:rPr lang="ru-RU" dirty="0"/>
+              <a:t>При сбое промежуточного узла достаточно перестроить таблицу пересылки, связь не требует полного пересоздания логического канала.</a:t>
+            </a:r>
+          </a:p>
+          <a:p>
+            <a:endParaRPr lang="ru-RU" dirty="0"/>
+          </a:p>
+        </p:txBody>
+      </p:sp>
+    </p:spTree>
+    <p:extLst>
+      <p:ext uri="{BB962C8B-B14F-4D97-AF65-F5344CB8AC3E}">
+        <p14:creationId xmlns:p14="http://schemas.microsoft.com/office/powerpoint/2010/main" val="3268469599"/>
+      </p:ext>
+    </p:extLst>
+  </p:cSld>
+  <p:clrMapOvr>
+    <a:masterClrMapping/>
+  </p:clrMapOvr>
+</p:sld>
+</file>
+
+<file path=ppt/slides/slide12.xml><?xml version="1.0" encoding="utf-8"?>
+<p:sld xmlns:a="http://schemas.openxmlformats.org/drawingml/2006/main" xmlns:r="http://schemas.openxmlformats.org/officeDocument/2006/relationships" xmlns:p="http://schemas.openxmlformats.org/presentationml/2006/main">
+  <p:cSld>
+    <p:spTree>
+      <p:nvGrpSpPr>
+        <p:cNvPr id="1" name=""/>
+        <p:cNvGrpSpPr/>
+        <p:nvPr/>
+      </p:nvGrpSpPr>
+      <p:grpSpPr>
+        <a:xfrm>
+          <a:off x="0" y="0"/>
+          <a:ext cx="0" cy="0"/>
+          <a:chOff x="0" y="0"/>
+          <a:chExt cx="0" cy="0"/>
+        </a:xfrm>
+      </p:grpSpPr>
+      <p:sp>
+        <p:nvSpPr>
+          <p:cNvPr id="2" name="Заголовок 1"/>
+          <p:cNvSpPr>
+            <a:spLocks noGrp="1"/>
+          </p:cNvSpPr>
+          <p:nvPr>
+            <p:ph type="title"/>
+          </p:nvPr>
+        </p:nvSpPr>
+        <p:spPr/>
+        <p:txBody>
           <a:bodyPr/>
           <a:lstStyle/>
           <a:p>
@@ -12657,7 +13952,6 @@
               <a:rPr lang="ru-RU" dirty="0"/>
               <a:t>Взгляните на фрагмент таблицы коммутатора и ответьте на вопрос:</a:t>
             </a:r>
-            <a:endParaRPr lang="ru-RU" dirty="0"/>
           </a:p>
         </p:txBody>
       </p:sp>
@@ -12714,7 +14008,6 @@
               <a:rPr lang="ru-RU" dirty="0"/>
               <a:t> Через какой интерфейс коммутатор отправит этот кадр и какое значение VCI будет записано в его заголовке на выходе?</a:t>
             </a:r>
-            <a:endParaRPr lang="ru-RU" dirty="0"/>
           </a:p>
         </p:txBody>
       </p:sp>
@@ -13570,7 +14863,7 @@
 </p:sld>
 </file>
 
-<file path=ppt/slides/slide12.xml><?xml version="1.0" encoding="utf-8"?>
+<file path=ppt/slides/slide13.xml><?xml version="1.0" encoding="utf-8"?>
 <p:sld xmlns:a="http://schemas.openxmlformats.org/drawingml/2006/main" xmlns:r="http://schemas.openxmlformats.org/officeDocument/2006/relationships" xmlns:p="http://schemas.openxmlformats.org/presentationml/2006/main">
   <p:cSld>
     <p:spTree>
@@ -13606,7 +14899,6 @@
               <a:rPr lang="ru-RU" dirty="0"/>
               <a:t>Определите, верны ли следующие утверждения:</a:t>
             </a:r>
-            <a:endParaRPr lang="ru-RU" dirty="0"/>
           </a:p>
         </p:txBody>
       </p:sp>
@@ -13666,98 +14958,6 @@
     <p:extLst>
       <p:ext uri="{BB962C8B-B14F-4D97-AF65-F5344CB8AC3E}">
         <p14:creationId xmlns:p14="http://schemas.microsoft.com/office/powerpoint/2010/main" val="3076644338"/>
-      </p:ext>
-    </p:extLst>
-  </p:cSld>
-  <p:clrMapOvr>
-    <a:masterClrMapping/>
-  </p:clrMapOvr>
-</p:sld>
-</file>
-
-<file path=ppt/slides/slide13.xml><?xml version="1.0" encoding="utf-8"?>
-<p:sld xmlns:a="http://schemas.openxmlformats.org/drawingml/2006/main" xmlns:r="http://schemas.openxmlformats.org/officeDocument/2006/relationships" xmlns:p="http://schemas.openxmlformats.org/presentationml/2006/main">
-  <p:cSld>
-    <p:spTree>
-      <p:nvGrpSpPr>
-        <p:cNvPr id="1" name=""/>
-        <p:cNvGrpSpPr/>
-        <p:nvPr/>
-      </p:nvGrpSpPr>
-      <p:grpSpPr>
-        <a:xfrm>
-          <a:off x="0" y="0"/>
-          <a:ext cx="0" cy="0"/>
-          <a:chOff x="0" y="0"/>
-          <a:chExt cx="0" cy="0"/>
-        </a:xfrm>
-      </p:grpSpPr>
-      <p:sp>
-        <p:nvSpPr>
-          <p:cNvPr id="2" name="Заголовок 1"/>
-          <p:cNvSpPr>
-            <a:spLocks noGrp="1"/>
-          </p:cNvSpPr>
-          <p:nvPr>
-            <p:ph type="title"/>
-          </p:nvPr>
-        </p:nvSpPr>
-        <p:spPr/>
-        <p:txBody>
-          <a:bodyPr/>
-          <a:lstStyle/>
-          <a:p>
-            <a:r>
-              <a:rPr lang="ru-RU" dirty="0"/>
-              <a:t>Вставьте пропущенные ключевые термины вместо многоточий:</a:t>
-            </a:r>
-            <a:endParaRPr lang="ru-RU" dirty="0"/>
-          </a:p>
-        </p:txBody>
-      </p:sp>
-      <p:sp>
-        <p:nvSpPr>
-          <p:cNvPr id="3" name="Объект 2"/>
-          <p:cNvSpPr>
-            <a:spLocks noGrp="1"/>
-          </p:cNvSpPr>
-          <p:nvPr>
-            <p:ph idx="1"/>
-          </p:nvPr>
-        </p:nvSpPr>
-        <p:spPr>
-          <a:xfrm>
-            <a:off x="1141413" y="3093548"/>
-            <a:ext cx="10209457" cy="1944444"/>
-          </a:xfrm>
-        </p:spPr>
-        <p:txBody>
-          <a:bodyPr/>
-          <a:lstStyle/>
-          <a:p>
-            <a:pPr marL="0" indent="0">
-              <a:buNone/>
-            </a:pPr>
-            <a:r>
-              <a:rPr lang="ru-RU" dirty="0"/>
-              <a:t>«В отличие от сетей виртуальных каналов, </a:t>
-            </a:r>
-            <a:r>
-              <a:rPr lang="ru-RU" dirty="0" err="1"/>
-              <a:t>датаграммные</a:t>
-            </a:r>
-            <a:r>
-              <a:rPr lang="ru-RU" dirty="0"/>
-              <a:t> сети работают без предварительного ............ соединения. При этом коммутатор принимает решение о пересылке каждого кадра на основе таблицы ............ .»</a:t>
-            </a:r>
-            <a:endParaRPr lang="ru-RU" dirty="0"/>
-          </a:p>
-        </p:txBody>
-      </p:sp>
-    </p:spTree>
-    <p:extLst>
-      <p:ext uri="{BB962C8B-B14F-4D97-AF65-F5344CB8AC3E}">
-        <p14:creationId xmlns:p14="http://schemas.microsoft.com/office/powerpoint/2010/main" val="3761616292"/>
       </p:ext>
     </p:extLst>
   </p:cSld>
@@ -13954,12 +15154,8 @@
               <a:t>L2-</a:t>
             </a:r>
             <a:r>
-              <a:rPr lang="ru-RU" b="1" dirty="0"/>
-              <a:t>коммутатор и топология «Звезда</a:t>
-            </a:r>
-            <a:r>
               <a:rPr lang="ru-RU" b="1" dirty="0" smtClean="0"/>
-              <a:t>»</a:t>
+              <a:t>коммутатор</a:t>
             </a:r>
             <a:endParaRPr lang="ru-RU" dirty="0"/>
           </a:p>
@@ -13983,7 +15179,7 @@
         </p:spPr>
         <p:txBody>
           <a:bodyPr>
-            <a:normAutofit fontScale="92500"/>
+            <a:normAutofit/>
           </a:bodyPr>
           <a:lstStyle/>
           <a:p>
@@ -14012,38 +15208,6 @@
             <a:r>
               <a:rPr lang="ru-RU" dirty="0"/>
               <a:t> прием кадра на входной порт и его перенаправление (коммутация) на соответствующий выходной порт на основе анализа заголовка.</a:t>
-            </a:r>
-          </a:p>
-          <a:p>
-            <a:r>
-              <a:rPr lang="ru-RU" b="1" dirty="0" smtClean="0"/>
-              <a:t>Преимущества </a:t>
-            </a:r>
-            <a:r>
-              <a:rPr lang="ru-RU" b="1" dirty="0"/>
-              <a:t>топологии «Звезда» на базе коммутатора:</a:t>
-            </a:r>
-            <a:endParaRPr lang="ru-RU" dirty="0"/>
-          </a:p>
-          <a:p>
-            <a:pPr lvl="1"/>
-            <a:r>
-              <a:rPr lang="ru-RU" dirty="0"/>
-              <a:t>Изоляция коллизий: каждый порт — отдельный домен коллизий.</a:t>
-            </a:r>
-          </a:p>
-          <a:p>
-            <a:pPr lvl="1"/>
-            <a:r>
-              <a:rPr lang="ru-RU" dirty="0"/>
-              <a:t>Выделенная скорость для каждого абонента.</a:t>
-            </a:r>
-          </a:p>
-          <a:p>
-            <a:pPr lvl="1"/>
-            <a:r>
-              <a:rPr lang="ru-RU" dirty="0"/>
-              <a:t>Иерархическое объединение коммутаторов.</a:t>
             </a:r>
           </a:p>
           <a:p>
@@ -14090,7 +15254,7 @@
       </p:grpSpPr>
       <p:sp>
         <p:nvSpPr>
-          <p:cNvPr id="2" name="Заголовок 1"/>
+          <p:cNvPr id="4" name="Заголовок 3"/>
           <p:cNvSpPr>
             <a:spLocks noGrp="1"/>
           </p:cNvSpPr>
@@ -14100,18 +15264,12 @@
         </p:nvSpPr>
         <p:spPr/>
         <p:txBody>
-          <a:bodyPr>
-            <a:normAutofit/>
-          </a:bodyPr>
+          <a:bodyPr/>
           <a:lstStyle/>
           <a:p>
             <a:r>
               <a:rPr lang="ru-RU" b="1" dirty="0"/>
-              <a:t>Два фундаментальных подхода к </a:t>
-            </a:r>
-            <a:r>
-              <a:rPr lang="ru-RU" b="1" dirty="0" smtClean="0"/>
-              <a:t>коммутации</a:t>
+              <a:t>топология «Звезда»</a:t>
             </a:r>
             <a:endParaRPr lang="ru-RU" dirty="0"/>
           </a:p>
@@ -14119,12 +15277,12 @@
       </p:sp>
       <p:sp>
         <p:nvSpPr>
-          <p:cNvPr id="3" name="Объект 2"/>
+          <p:cNvPr id="5" name="Объект 4"/>
           <p:cNvSpPr>
             <a:spLocks noGrp="1"/>
           </p:cNvSpPr>
           <p:nvPr>
-            <p:ph idx="1"/>
+            <p:ph sz="half" idx="1"/>
           </p:nvPr>
         </p:nvSpPr>
         <p:spPr/>
@@ -14132,33 +15290,12 @@
           <a:bodyPr/>
           <a:lstStyle/>
           <a:p>
+            <a:pPr marL="0" indent="0">
+              <a:buNone/>
+            </a:pPr>
             <a:r>
               <a:rPr lang="ru-RU" b="1" dirty="0"/>
-              <a:t>1. </a:t>
-            </a:r>
-            <a:r>
-              <a:rPr lang="ru-RU" b="1" dirty="0" err="1"/>
-              <a:t>Датаграммная</a:t>
-            </a:r>
-            <a:r>
-              <a:rPr lang="ru-RU" b="1" dirty="0"/>
-              <a:t> коммутация (</a:t>
-            </a:r>
-            <a:r>
-              <a:rPr lang="ru-RU" b="1" dirty="0" err="1"/>
-              <a:t>Datagram</a:t>
-            </a:r>
-            <a:r>
-              <a:rPr lang="ru-RU" b="1" dirty="0"/>
-              <a:t> </a:t>
-            </a:r>
-            <a:r>
-              <a:rPr lang="ru-RU" b="1" dirty="0" err="1"/>
-              <a:t>Switching</a:t>
-            </a:r>
-            <a:r>
-              <a:rPr lang="ru-RU" b="1" dirty="0"/>
-              <a:t>):</a:t>
+              <a:t>Преимущества топологии «Звезда» на базе коммутатора:</a:t>
             </a:r>
             <a:endParaRPr lang="ru-RU" dirty="0"/>
           </a:p>
@@ -14166,101 +15303,64 @@
             <a:pPr lvl="1"/>
             <a:r>
               <a:rPr lang="ru-RU" dirty="0"/>
-              <a:t>Передача без установления соединения (</a:t>
-            </a:r>
-            <a:r>
-              <a:rPr lang="ru-RU" i="1" dirty="0" err="1"/>
-              <a:t>Connectionless</a:t>
-            </a:r>
+              <a:t>Изоляция коллизий: каждый порт — отдельный домен коллизий.</a:t>
+            </a:r>
+          </a:p>
+          <a:p>
+            <a:pPr lvl="1"/>
             <a:r>
               <a:rPr lang="ru-RU" dirty="0"/>
-              <a:t>).</a:t>
+              <a:t>Выделенная скорость для каждого абонента.</a:t>
             </a:r>
           </a:p>
           <a:p>
             <a:pPr lvl="1"/>
             <a:r>
               <a:rPr lang="ru-RU" dirty="0"/>
-              <a:t>Каждый кадр содержит полный адрес получателя.</a:t>
-            </a:r>
-          </a:p>
-          <a:p>
-            <a:r>
-              <a:rPr lang="ru-RU" b="1" dirty="0"/>
-              <a:t>2. Коммутация виртуальных каналов (</a:t>
-            </a:r>
-            <a:r>
-              <a:rPr lang="ru-RU" b="1" dirty="0" err="1"/>
-              <a:t>Virtual</a:t>
-            </a:r>
-            <a:r>
-              <a:rPr lang="ru-RU" b="1" dirty="0"/>
-              <a:t> </a:t>
-            </a:r>
-            <a:r>
-              <a:rPr lang="ru-RU" b="1" dirty="0" err="1"/>
-              <a:t>Circuit</a:t>
-            </a:r>
-            <a:r>
-              <a:rPr lang="ru-RU" b="1" dirty="0"/>
-              <a:t> </a:t>
-            </a:r>
-            <a:r>
-              <a:rPr lang="ru-RU" b="1" dirty="0" err="1"/>
-              <a:t>Switching</a:t>
-            </a:r>
-            <a:r>
-              <a:rPr lang="ru-RU" b="1" dirty="0"/>
-              <a:t>):</a:t>
-            </a:r>
-            <a:endParaRPr lang="ru-RU" dirty="0"/>
-          </a:p>
-          <a:p>
-            <a:pPr lvl="1"/>
-            <a:r>
-              <a:rPr lang="ru-RU" dirty="0"/>
-              <a:t>Передача с предварительным установлением соединения (</a:t>
-            </a:r>
-            <a:r>
-              <a:rPr lang="ru-RU" i="1" dirty="0" err="1"/>
-              <a:t>Connection-oriented</a:t>
-            </a:r>
-            <a:r>
-              <a:rPr lang="ru-RU" dirty="0"/>
-              <a:t>).</a:t>
-            </a:r>
-          </a:p>
-          <a:p>
-            <a:pPr lvl="1"/>
-            <a:r>
-              <a:rPr lang="ru-RU" dirty="0"/>
-              <a:t>Кадр содержит метку виртуального канала (VCI</a:t>
-            </a:r>
-            <a:r>
-              <a:rPr lang="ru-RU" dirty="0" smtClean="0"/>
-              <a:t>).</a:t>
-            </a:r>
+              <a:t>Иерархическое объединение коммутаторов.</a:t>
+            </a:r>
+          </a:p>
+          <a:p>
             <a:endParaRPr lang="ru-RU" dirty="0"/>
           </a:p>
         </p:txBody>
       </p:sp>
+      <p:pic>
+        <p:nvPicPr>
+          <p:cNvPr id="7" name="Объект 6"/>
+          <p:cNvPicPr>
+            <a:picLocks noGrp="1" noChangeAspect="1"/>
+          </p:cNvPicPr>
+          <p:nvPr>
+            <p:ph sz="half" idx="2"/>
+          </p:nvPr>
+        </p:nvPicPr>
+        <p:blipFill>
+          <a:blip r:embed="rId2"/>
+          <a:stretch>
+            <a:fillRect/>
+          </a:stretch>
+        </p:blipFill>
+        <p:spPr>
+          <a:xfrm>
+            <a:off x="6652098" y="2249488"/>
+            <a:ext cx="3915417" cy="3541712"/>
+          </a:xfrm>
+          <a:prstGeom prst="rect">
+            <a:avLst/>
+          </a:prstGeom>
+        </p:spPr>
+      </p:pic>
     </p:spTree>
     <p:extLst>
       <p:ext uri="{BB962C8B-B14F-4D97-AF65-F5344CB8AC3E}">
-        <p14:creationId xmlns:p14="http://schemas.microsoft.com/office/powerpoint/2010/main" val="1655670648"/>
+        <p14:creationId xmlns:p14="http://schemas.microsoft.com/office/powerpoint/2010/main" val="313837943"/>
       </p:ext>
     </p:extLst>
   </p:cSld>
   <p:clrMapOvr>
     <a:masterClrMapping/>
   </p:clrMapOvr>
-  <p:timing>
-    <p:tnLst>
-      <p:par>
-        <p:cTn id="1" dur="indefinite" restart="never" nodeType="tmRoot"/>
-      </p:par>
-    </p:tnLst>
-  </p:timing>
 </p:sld>
 </file>
 
@@ -14293,28 +15393,18 @@
         </p:nvSpPr>
         <p:spPr/>
         <p:txBody>
-          <a:bodyPr/>
+          <a:bodyPr>
+            <a:normAutofit/>
+          </a:bodyPr>
           <a:lstStyle/>
           <a:p>
             <a:r>
-              <a:rPr lang="ru-RU" b="1" dirty="0" err="1"/>
-              <a:t>Датаграммные</a:t>
-            </a:r>
-            <a:r>
               <a:rPr lang="ru-RU" b="1" dirty="0"/>
-              <a:t> сети (</a:t>
-            </a:r>
-            <a:r>
-              <a:rPr lang="af-ZA" b="1" dirty="0"/>
-              <a:t>Ethernet-</a:t>
-            </a:r>
-            <a:r>
-              <a:rPr lang="ru-RU" b="1" dirty="0"/>
-              <a:t>модель</a:t>
+              <a:t>Два фундаментальных подхода к </a:t>
             </a:r>
             <a:r>
               <a:rPr lang="ru-RU" b="1" dirty="0" smtClean="0"/>
-              <a:t>)</a:t>
+              <a:t>коммутации</a:t>
             </a:r>
             <a:endParaRPr lang="ru-RU" dirty="0"/>
           </a:p>
@@ -14330,50 +15420,50 @@
             <p:ph idx="1"/>
           </p:nvPr>
         </p:nvSpPr>
-        <p:spPr>
-          <a:xfrm>
-            <a:off x="490782" y="2363787"/>
-            <a:ext cx="7378334" cy="3541714"/>
-          </a:xfrm>
-        </p:spPr>
+        <p:spPr/>
         <p:txBody>
-          <a:bodyPr>
-            <a:normAutofit fontScale="92500" lnSpcReduction="10000"/>
-          </a:bodyPr>
+          <a:bodyPr/>
           <a:lstStyle/>
           <a:p>
             <a:r>
               <a:rPr lang="ru-RU" b="1" dirty="0"/>
-              <a:t>Принцип:</a:t>
-            </a:r>
+              <a:t>1. </a:t>
+            </a:r>
+            <a:r>
+              <a:rPr lang="ru-RU" b="1" dirty="0" err="1"/>
+              <a:t>Датаграммная</a:t>
+            </a:r>
+            <a:r>
+              <a:rPr lang="ru-RU" b="1" dirty="0"/>
+              <a:t> коммутация (</a:t>
+            </a:r>
+            <a:r>
+              <a:rPr lang="ru-RU" b="1" dirty="0" err="1"/>
+              <a:t>Datagram</a:t>
+            </a:r>
+            <a:r>
+              <a:rPr lang="ru-RU" b="1" dirty="0"/>
+              <a:t> </a:t>
+            </a:r>
+            <a:r>
+              <a:rPr lang="ru-RU" b="1" dirty="0" err="1"/>
+              <a:t>Switching</a:t>
+            </a:r>
+            <a:r>
+              <a:rPr lang="ru-RU" b="1" dirty="0"/>
+              <a:t>):</a:t>
+            </a:r>
+            <a:endParaRPr lang="ru-RU" dirty="0"/>
+          </a:p>
+          <a:p>
+            <a:pPr lvl="1"/>
             <a:r>
               <a:rPr lang="ru-RU" dirty="0"/>
-              <a:t> коммутатор читает глобальный адрес получателя и сопоставляет его с портом в таблице коммутации (MAC-таблице).</a:t>
-            </a:r>
-          </a:p>
-          <a:p>
-            <a:r>
-              <a:rPr lang="ru-RU" b="1" dirty="0"/>
-              <a:t>Свойства:</a:t>
-            </a:r>
-            <a:endParaRPr lang="ru-RU" dirty="0"/>
-          </a:p>
-          <a:p>
-            <a:pPr lvl="1"/>
-            <a:r>
-              <a:rPr lang="ru-RU" dirty="0"/>
-              <a:t>Независимая пересылка каждого кадра.</a:t>
-            </a:r>
-          </a:p>
-          <a:p>
-            <a:pPr lvl="1"/>
-            <a:r>
-              <a:rPr lang="ru-RU" dirty="0"/>
-              <a:t>Высокая отказоустойчивость (основа архитектуры ARPANET/</a:t>
-            </a:r>
-            <a:r>
-              <a:rPr lang="ru-RU" dirty="0" err="1"/>
-              <a:t>Internet</a:t>
+              <a:t>Передача без установления соединения (</a:t>
+            </a:r>
+            <a:r>
+              <a:rPr lang="ru-RU" i="1" dirty="0" err="1"/>
+              <a:t>Connectionless</a:t>
             </a:r>
             <a:r>
               <a:rPr lang="ru-RU" dirty="0"/>
@@ -14384,534 +15474,73 @@
             <a:pPr lvl="1"/>
             <a:r>
               <a:rPr lang="ru-RU" dirty="0"/>
-              <a:t>Отсутствие гарантий доставки на канальном уровне («</a:t>
-            </a:r>
-            <a:r>
-              <a:rPr lang="ru-RU" dirty="0" err="1"/>
-              <a:t>Best</a:t>
-            </a:r>
+              <a:t>Каждый кадр содержит полный адрес получателя.</a:t>
+            </a:r>
+          </a:p>
+          <a:p>
+            <a:r>
+              <a:rPr lang="ru-RU" b="1" dirty="0"/>
+              <a:t>2. Коммутация виртуальных каналов (</a:t>
+            </a:r>
+            <a:r>
+              <a:rPr lang="ru-RU" b="1" dirty="0" err="1"/>
+              <a:t>Virtual</a:t>
+            </a:r>
+            <a:r>
+              <a:rPr lang="ru-RU" b="1" dirty="0"/>
+              <a:t> </a:t>
+            </a:r>
+            <a:r>
+              <a:rPr lang="ru-RU" b="1" dirty="0" err="1"/>
+              <a:t>Circuit</a:t>
+            </a:r>
+            <a:r>
+              <a:rPr lang="ru-RU" b="1" dirty="0"/>
+              <a:t> </a:t>
+            </a:r>
+            <a:r>
+              <a:rPr lang="ru-RU" b="1" dirty="0" err="1"/>
+              <a:t>Switching</a:t>
+            </a:r>
+            <a:r>
+              <a:rPr lang="ru-RU" b="1" dirty="0"/>
+              <a:t>):</a:t>
+            </a:r>
+            <a:endParaRPr lang="ru-RU" dirty="0"/>
+          </a:p>
+          <a:p>
+            <a:pPr lvl="1"/>
             <a:r>
               <a:rPr lang="ru-RU" dirty="0"/>
-              <a:t> </a:t>
-            </a:r>
-            <a:r>
-              <a:rPr lang="ru-RU" dirty="0" err="1"/>
-              <a:t>Effort</a:t>
+              <a:t>Передача с предварительным установлением соединения (</a:t>
+            </a:r>
+            <a:r>
+              <a:rPr lang="ru-RU" i="1" dirty="0" err="1"/>
+              <a:t>Connection-oriented</a:t>
             </a:r>
             <a:r>
               <a:rPr lang="ru-RU" dirty="0"/>
-              <a:t>»).</a:t>
-            </a:r>
-          </a:p>
-          <a:p>
+              <a:t>).</a:t>
+            </a:r>
+          </a:p>
+          <a:p>
+            <a:pPr lvl="1"/>
+            <a:r>
+              <a:rPr lang="ru-RU" dirty="0"/>
+              <a:t>Кадр содержит метку виртуального канала (VCI</a:t>
+            </a:r>
+            <a:r>
+              <a:rPr lang="ru-RU" dirty="0" smtClean="0"/>
+              <a:t>).</a:t>
+            </a:r>
             <a:endParaRPr lang="ru-RU" dirty="0"/>
           </a:p>
         </p:txBody>
       </p:sp>
-      <p:graphicFrame>
-        <p:nvGraphicFramePr>
-          <p:cNvPr id="4" name="Таблица 3"/>
-          <p:cNvGraphicFramePr>
-            <a:graphicFrameLocks noGrp="1"/>
-          </p:cNvGraphicFramePr>
-          <p:nvPr>
-            <p:extLst>
-              <p:ext uri="{D42A27DB-BD31-4B8C-83A1-F6EECF244321}">
-                <p14:modId xmlns:p14="http://schemas.microsoft.com/office/powerpoint/2010/main" val="1699374137"/>
-              </p:ext>
-            </p:extLst>
-          </p:nvPr>
-        </p:nvGraphicFramePr>
-        <p:xfrm>
-          <a:off x="8012477" y="3193282"/>
-          <a:ext cx="3034934" cy="1752600"/>
-        </p:xfrm>
-        <a:graphic>
-          <a:graphicData uri="http://schemas.openxmlformats.org/drawingml/2006/table">
-            <a:tbl>
-              <a:tblPr/>
-              <a:tblGrid>
-                <a:gridCol w="1517467">
-                  <a:extLst>
-                    <a:ext uri="{9D8B030D-6E8A-4147-A177-3AD203B41FA5}">
-                      <a16:colId xmlns:a16="http://schemas.microsoft.com/office/drawing/2014/main" val="1344350392"/>
-                    </a:ext>
-                  </a:extLst>
-                </a:gridCol>
-                <a:gridCol w="1517467">
-                  <a:extLst>
-                    <a:ext uri="{9D8B030D-6E8A-4147-A177-3AD203B41FA5}">
-                      <a16:colId xmlns:a16="http://schemas.microsoft.com/office/drawing/2014/main" val="3248290192"/>
-                    </a:ext>
-                  </a:extLst>
-                </a:gridCol>
-              </a:tblGrid>
-              <a:tr h="0">
-                <a:tc>
-                  <a:txBody>
-                    <a:bodyPr/>
-                    <a:lstStyle/>
-                    <a:p>
-                      <a:pPr algn="ctr"/>
-                      <a:r>
-                        <a:rPr lang="ru-RU" dirty="0">
-                          <a:effectLst/>
-                        </a:rPr>
-                        <a:t>Назначение (</a:t>
-                      </a:r>
-                      <a:r>
-                        <a:rPr lang="af-ZA" dirty="0">
-                          <a:effectLst/>
-                        </a:rPr>
-                        <a:t>Host/MAC)</a:t>
-                      </a:r>
-                    </a:p>
-                  </a:txBody>
-                  <a:tcPr marL="95250" marR="95250" marT="47625" marB="47625" anchor="ctr">
-                    <a:lnL w="12700" cap="flat" cmpd="sng" algn="ctr">
-                      <a:solidFill>
-                        <a:schemeClr val="tx1"/>
-                      </a:solidFill>
-                      <a:prstDash val="solid"/>
-                      <a:round/>
-                      <a:headEnd type="none" w="med" len="med"/>
-                      <a:tailEnd type="none" w="med" len="med"/>
-                    </a:lnL>
-                    <a:lnR w="12700" cap="flat" cmpd="sng" algn="ctr">
-                      <a:solidFill>
-                        <a:schemeClr val="tx1"/>
-                      </a:solidFill>
-                      <a:prstDash val="solid"/>
-                      <a:round/>
-                      <a:headEnd type="none" w="med" len="med"/>
-                      <a:tailEnd type="none" w="med" len="med"/>
-                    </a:lnR>
-                    <a:lnT w="12700" cap="flat" cmpd="sng" algn="ctr">
-                      <a:solidFill>
-                        <a:schemeClr val="tx1"/>
-                      </a:solidFill>
-                      <a:prstDash val="solid"/>
-                      <a:round/>
-                      <a:headEnd type="none" w="med" len="med"/>
-                      <a:tailEnd type="none" w="med" len="med"/>
-                    </a:lnT>
-                    <a:lnB w="12700" cap="flat" cmpd="sng" algn="ctr">
-                      <a:solidFill>
-                        <a:schemeClr val="tx1"/>
-                      </a:solidFill>
-                      <a:prstDash val="solid"/>
-                      <a:round/>
-                      <a:headEnd type="none" w="med" len="med"/>
-                      <a:tailEnd type="none" w="med" len="med"/>
-                    </a:lnB>
-                  </a:tcPr>
-                </a:tc>
-                <a:tc>
-                  <a:txBody>
-                    <a:bodyPr/>
-                    <a:lstStyle/>
-                    <a:p>
-                      <a:pPr algn="ctr"/>
-                      <a:r>
-                        <a:rPr lang="ru-RU">
-                          <a:effectLst/>
-                        </a:rPr>
-                        <a:t>Порт</a:t>
-                      </a:r>
-                    </a:p>
-                  </a:txBody>
-                  <a:tcPr marL="95250" marR="95250" marT="47625" marB="47625" anchor="ctr">
-                    <a:lnL w="12700" cap="flat" cmpd="sng" algn="ctr">
-                      <a:solidFill>
-                        <a:schemeClr val="tx1"/>
-                      </a:solidFill>
-                      <a:prstDash val="solid"/>
-                      <a:round/>
-                      <a:headEnd type="none" w="med" len="med"/>
-                      <a:tailEnd type="none" w="med" len="med"/>
-                    </a:lnL>
-                    <a:lnR w="12700" cap="flat" cmpd="sng" algn="ctr">
-                      <a:solidFill>
-                        <a:schemeClr val="tx1"/>
-                      </a:solidFill>
-                      <a:prstDash val="solid"/>
-                      <a:round/>
-                      <a:headEnd type="none" w="med" len="med"/>
-                      <a:tailEnd type="none" w="med" len="med"/>
-                    </a:lnR>
-                    <a:lnT w="12700" cap="flat" cmpd="sng" algn="ctr">
-                      <a:solidFill>
-                        <a:schemeClr val="tx1"/>
-                      </a:solidFill>
-                      <a:prstDash val="solid"/>
-                      <a:round/>
-                      <a:headEnd type="none" w="med" len="med"/>
-                      <a:tailEnd type="none" w="med" len="med"/>
-                    </a:lnT>
-                    <a:lnB w="12700" cap="flat" cmpd="sng" algn="ctr">
-                      <a:solidFill>
-                        <a:schemeClr val="tx1"/>
-                      </a:solidFill>
-                      <a:prstDash val="solid"/>
-                      <a:round/>
-                      <a:headEnd type="none" w="med" len="med"/>
-                      <a:tailEnd type="none" w="med" len="med"/>
-                    </a:lnB>
-                  </a:tcPr>
-                </a:tc>
-                <a:extLst>
-                  <a:ext uri="{0D108BD9-81ED-4DB2-BD59-A6C34878D82A}">
-                    <a16:rowId xmlns:a16="http://schemas.microsoft.com/office/drawing/2014/main" val="4156300158"/>
-                  </a:ext>
-                </a:extLst>
-              </a:tr>
-              <a:tr h="0">
-                <a:tc>
-                  <a:txBody>
-                    <a:bodyPr/>
-                    <a:lstStyle/>
-                    <a:p>
-                      <a:pPr algn="ctr"/>
-                      <a:r>
-                        <a:rPr lang="af-ZA">
-                          <a:effectLst/>
-                        </a:rPr>
-                        <a:t>Host A</a:t>
-                      </a:r>
-                    </a:p>
-                  </a:txBody>
-                  <a:tcPr marL="95250" marR="95250" marT="47625" marB="47625" anchor="ctr">
-                    <a:lnL w="12700" cap="flat" cmpd="sng" algn="ctr">
-                      <a:solidFill>
-                        <a:schemeClr val="tx1"/>
-                      </a:solidFill>
-                      <a:prstDash val="solid"/>
-                      <a:round/>
-                      <a:headEnd type="none" w="med" len="med"/>
-                      <a:tailEnd type="none" w="med" len="med"/>
-                    </a:lnL>
-                    <a:lnR w="12700" cap="flat" cmpd="sng" algn="ctr">
-                      <a:solidFill>
-                        <a:schemeClr val="tx1"/>
-                      </a:solidFill>
-                      <a:prstDash val="solid"/>
-                      <a:round/>
-                      <a:headEnd type="none" w="med" len="med"/>
-                      <a:tailEnd type="none" w="med" len="med"/>
-                    </a:lnR>
-                    <a:lnT w="12700" cap="flat" cmpd="sng" algn="ctr">
-                      <a:solidFill>
-                        <a:schemeClr val="tx1"/>
-                      </a:solidFill>
-                      <a:prstDash val="solid"/>
-                      <a:round/>
-                      <a:headEnd type="none" w="med" len="med"/>
-                      <a:tailEnd type="none" w="med" len="med"/>
-                    </a:lnT>
-                    <a:lnB w="12700" cap="flat" cmpd="sng" algn="ctr">
-                      <a:solidFill>
-                        <a:schemeClr val="tx1"/>
-                      </a:solidFill>
-                      <a:prstDash val="solid"/>
-                      <a:round/>
-                      <a:headEnd type="none" w="med" len="med"/>
-                      <a:tailEnd type="none" w="med" len="med"/>
-                    </a:lnB>
-                  </a:tcPr>
-                </a:tc>
-                <a:tc>
-                  <a:txBody>
-                    <a:bodyPr/>
-                    <a:lstStyle/>
-                    <a:p>
-                      <a:pPr algn="ctr"/>
-                      <a:r>
-                        <a:rPr lang="af-ZA">
-                          <a:effectLst/>
-                        </a:rPr>
-                        <a:t>Port 2</a:t>
-                      </a:r>
-                    </a:p>
-                  </a:txBody>
-                  <a:tcPr marL="95250" marR="95250" marT="47625" marB="47625" anchor="ctr">
-                    <a:lnL w="12700" cap="flat" cmpd="sng" algn="ctr">
-                      <a:solidFill>
-                        <a:schemeClr val="tx1"/>
-                      </a:solidFill>
-                      <a:prstDash val="solid"/>
-                      <a:round/>
-                      <a:headEnd type="none" w="med" len="med"/>
-                      <a:tailEnd type="none" w="med" len="med"/>
-                    </a:lnL>
-                    <a:lnR w="12700" cap="flat" cmpd="sng" algn="ctr">
-                      <a:solidFill>
-                        <a:schemeClr val="tx1"/>
-                      </a:solidFill>
-                      <a:prstDash val="solid"/>
-                      <a:round/>
-                      <a:headEnd type="none" w="med" len="med"/>
-                      <a:tailEnd type="none" w="med" len="med"/>
-                    </a:lnR>
-                    <a:lnT w="12700" cap="flat" cmpd="sng" algn="ctr">
-                      <a:solidFill>
-                        <a:schemeClr val="tx1"/>
-                      </a:solidFill>
-                      <a:prstDash val="solid"/>
-                      <a:round/>
-                      <a:headEnd type="none" w="med" len="med"/>
-                      <a:tailEnd type="none" w="med" len="med"/>
-                    </a:lnT>
-                    <a:lnB w="12700" cap="flat" cmpd="sng" algn="ctr">
-                      <a:solidFill>
-                        <a:schemeClr val="tx1"/>
-                      </a:solidFill>
-                      <a:prstDash val="solid"/>
-                      <a:round/>
-                      <a:headEnd type="none" w="med" len="med"/>
-                      <a:tailEnd type="none" w="med" len="med"/>
-                    </a:lnB>
-                  </a:tcPr>
-                </a:tc>
-                <a:extLst>
-                  <a:ext uri="{0D108BD9-81ED-4DB2-BD59-A6C34878D82A}">
-                    <a16:rowId xmlns:a16="http://schemas.microsoft.com/office/drawing/2014/main" val="2323713434"/>
-                  </a:ext>
-                </a:extLst>
-              </a:tr>
-              <a:tr h="0">
-                <a:tc>
-                  <a:txBody>
-                    <a:bodyPr/>
-                    <a:lstStyle/>
-                    <a:p>
-                      <a:pPr algn="ctr"/>
-                      <a:r>
-                        <a:rPr lang="af-ZA">
-                          <a:effectLst/>
-                        </a:rPr>
-                        <a:t>Host B</a:t>
-                      </a:r>
-                    </a:p>
-                  </a:txBody>
-                  <a:tcPr marL="95250" marR="95250" marT="47625" marB="47625" anchor="ctr">
-                    <a:lnL w="12700" cap="flat" cmpd="sng" algn="ctr">
-                      <a:solidFill>
-                        <a:schemeClr val="tx1"/>
-                      </a:solidFill>
-                      <a:prstDash val="solid"/>
-                      <a:round/>
-                      <a:headEnd type="none" w="med" len="med"/>
-                      <a:tailEnd type="none" w="med" len="med"/>
-                    </a:lnL>
-                    <a:lnR w="12700" cap="flat" cmpd="sng" algn="ctr">
-                      <a:solidFill>
-                        <a:schemeClr val="tx1"/>
-                      </a:solidFill>
-                      <a:prstDash val="solid"/>
-                      <a:round/>
-                      <a:headEnd type="none" w="med" len="med"/>
-                      <a:tailEnd type="none" w="med" len="med"/>
-                    </a:lnR>
-                    <a:lnT w="12700" cap="flat" cmpd="sng" algn="ctr">
-                      <a:solidFill>
-                        <a:schemeClr val="tx1"/>
-                      </a:solidFill>
-                      <a:prstDash val="solid"/>
-                      <a:round/>
-                      <a:headEnd type="none" w="med" len="med"/>
-                      <a:tailEnd type="none" w="med" len="med"/>
-                    </a:lnT>
-                    <a:lnB w="12700" cap="flat" cmpd="sng" algn="ctr">
-                      <a:solidFill>
-                        <a:schemeClr val="tx1"/>
-                      </a:solidFill>
-                      <a:prstDash val="solid"/>
-                      <a:round/>
-                      <a:headEnd type="none" w="med" len="med"/>
-                      <a:tailEnd type="none" w="med" len="med"/>
-                    </a:lnB>
-                  </a:tcPr>
-                </a:tc>
-                <a:tc>
-                  <a:txBody>
-                    <a:bodyPr/>
-                    <a:lstStyle/>
-                    <a:p>
-                      <a:pPr algn="ctr"/>
-                      <a:r>
-                        <a:rPr lang="af-ZA">
-                          <a:effectLst/>
-                        </a:rPr>
-                        <a:t>Port 0</a:t>
-                      </a:r>
-                    </a:p>
-                  </a:txBody>
-                  <a:tcPr marL="95250" marR="95250" marT="47625" marB="47625" anchor="ctr">
-                    <a:lnL w="12700" cap="flat" cmpd="sng" algn="ctr">
-                      <a:solidFill>
-                        <a:schemeClr val="tx1"/>
-                      </a:solidFill>
-                      <a:prstDash val="solid"/>
-                      <a:round/>
-                      <a:headEnd type="none" w="med" len="med"/>
-                      <a:tailEnd type="none" w="med" len="med"/>
-                    </a:lnL>
-                    <a:lnR w="12700" cap="flat" cmpd="sng" algn="ctr">
-                      <a:solidFill>
-                        <a:schemeClr val="tx1"/>
-                      </a:solidFill>
-                      <a:prstDash val="solid"/>
-                      <a:round/>
-                      <a:headEnd type="none" w="med" len="med"/>
-                      <a:tailEnd type="none" w="med" len="med"/>
-                    </a:lnR>
-                    <a:lnT w="12700" cap="flat" cmpd="sng" algn="ctr">
-                      <a:solidFill>
-                        <a:schemeClr val="tx1"/>
-                      </a:solidFill>
-                      <a:prstDash val="solid"/>
-                      <a:round/>
-                      <a:headEnd type="none" w="med" len="med"/>
-                      <a:tailEnd type="none" w="med" len="med"/>
-                    </a:lnT>
-                    <a:lnB w="12700" cap="flat" cmpd="sng" algn="ctr">
-                      <a:solidFill>
-                        <a:schemeClr val="tx1"/>
-                      </a:solidFill>
-                      <a:prstDash val="solid"/>
-                      <a:round/>
-                      <a:headEnd type="none" w="med" len="med"/>
-                      <a:tailEnd type="none" w="med" len="med"/>
-                    </a:lnB>
-                  </a:tcPr>
-                </a:tc>
-                <a:extLst>
-                  <a:ext uri="{0D108BD9-81ED-4DB2-BD59-A6C34878D82A}">
-                    <a16:rowId xmlns:a16="http://schemas.microsoft.com/office/drawing/2014/main" val="3173424703"/>
-                  </a:ext>
-                </a:extLst>
-              </a:tr>
-              <a:tr h="0">
-                <a:tc>
-                  <a:txBody>
-                    <a:bodyPr/>
-                    <a:lstStyle/>
-                    <a:p>
-                      <a:pPr algn="ctr"/>
-                      <a:r>
-                        <a:rPr lang="af-ZA">
-                          <a:effectLst/>
-                        </a:rPr>
-                        <a:t>Host C</a:t>
-                      </a:r>
-                    </a:p>
-                  </a:txBody>
-                  <a:tcPr marL="95250" marR="95250" marT="47625" marB="47625" anchor="ctr">
-                    <a:lnL w="12700" cap="flat" cmpd="sng" algn="ctr">
-                      <a:solidFill>
-                        <a:schemeClr val="tx1"/>
-                      </a:solidFill>
-                      <a:prstDash val="solid"/>
-                      <a:round/>
-                      <a:headEnd type="none" w="med" len="med"/>
-                      <a:tailEnd type="none" w="med" len="med"/>
-                    </a:lnL>
-                    <a:lnR w="12700" cap="flat" cmpd="sng" algn="ctr">
-                      <a:solidFill>
-                        <a:schemeClr val="tx1"/>
-                      </a:solidFill>
-                      <a:prstDash val="solid"/>
-                      <a:round/>
-                      <a:headEnd type="none" w="med" len="med"/>
-                      <a:tailEnd type="none" w="med" len="med"/>
-                    </a:lnR>
-                    <a:lnT w="12700" cap="flat" cmpd="sng" algn="ctr">
-                      <a:solidFill>
-                        <a:schemeClr val="tx1"/>
-                      </a:solidFill>
-                      <a:prstDash val="solid"/>
-                      <a:round/>
-                      <a:headEnd type="none" w="med" len="med"/>
-                      <a:tailEnd type="none" w="med" len="med"/>
-                    </a:lnT>
-                    <a:lnB w="12700" cap="flat" cmpd="sng" algn="ctr">
-                      <a:solidFill>
-                        <a:schemeClr val="tx1"/>
-                      </a:solidFill>
-                      <a:prstDash val="solid"/>
-                      <a:round/>
-                      <a:headEnd type="none" w="med" len="med"/>
-                      <a:tailEnd type="none" w="med" len="med"/>
-                    </a:lnB>
-                  </a:tcPr>
-                </a:tc>
-                <a:tc>
-                  <a:txBody>
-                    <a:bodyPr/>
-                    <a:lstStyle/>
-                    <a:p>
-                      <a:pPr algn="ctr"/>
-                      <a:r>
-                        <a:rPr lang="af-ZA" dirty="0">
-                          <a:effectLst/>
-                        </a:rPr>
-                        <a:t>Port 3</a:t>
-                      </a:r>
-                    </a:p>
-                  </a:txBody>
-                  <a:tcPr marL="95250" marR="95250" marT="47625" marB="47625" anchor="ctr">
-                    <a:lnL w="12700" cap="flat" cmpd="sng" algn="ctr">
-                      <a:solidFill>
-                        <a:schemeClr val="tx1"/>
-                      </a:solidFill>
-                      <a:prstDash val="solid"/>
-                      <a:round/>
-                      <a:headEnd type="none" w="med" len="med"/>
-                      <a:tailEnd type="none" w="med" len="med"/>
-                    </a:lnL>
-                    <a:lnR w="12700" cap="flat" cmpd="sng" algn="ctr">
-                      <a:solidFill>
-                        <a:schemeClr val="tx1"/>
-                      </a:solidFill>
-                      <a:prstDash val="solid"/>
-                      <a:round/>
-                      <a:headEnd type="none" w="med" len="med"/>
-                      <a:tailEnd type="none" w="med" len="med"/>
-                    </a:lnR>
-                    <a:lnT w="12700" cap="flat" cmpd="sng" algn="ctr">
-                      <a:solidFill>
-                        <a:schemeClr val="tx1"/>
-                      </a:solidFill>
-                      <a:prstDash val="solid"/>
-                      <a:round/>
-                      <a:headEnd type="none" w="med" len="med"/>
-                      <a:tailEnd type="none" w="med" len="med"/>
-                    </a:lnT>
-                    <a:lnB w="12700" cap="flat" cmpd="sng" algn="ctr">
-                      <a:solidFill>
-                        <a:schemeClr val="tx1"/>
-                      </a:solidFill>
-                      <a:prstDash val="solid"/>
-                      <a:round/>
-                      <a:headEnd type="none" w="med" len="med"/>
-                      <a:tailEnd type="none" w="med" len="med"/>
-                    </a:lnB>
-                  </a:tcPr>
-                </a:tc>
-                <a:extLst>
-                  <a:ext uri="{0D108BD9-81ED-4DB2-BD59-A6C34878D82A}">
-                    <a16:rowId xmlns:a16="http://schemas.microsoft.com/office/drawing/2014/main" val="3269794006"/>
-                  </a:ext>
-                </a:extLst>
-              </a:tr>
-            </a:tbl>
-          </a:graphicData>
-        </a:graphic>
-      </p:graphicFrame>
     </p:spTree>
     <p:extLst>
       <p:ext uri="{BB962C8B-B14F-4D97-AF65-F5344CB8AC3E}">
-        <p14:creationId xmlns:p14="http://schemas.microsoft.com/office/powerpoint/2010/main" val="2926595142"/>
+        <p14:creationId xmlns:p14="http://schemas.microsoft.com/office/powerpoint/2010/main" val="1655670648"/>
       </p:ext>
     </p:extLst>
   </p:cSld>
@@ -16106,15 +16735,23 @@
           <a:lstStyle/>
           <a:p>
             <a:r>
+              <a:rPr lang="ru-RU" b="1" dirty="0" err="1"/>
+              <a:t>Датаграммные</a:t>
+            </a:r>
+            <a:r>
               <a:rPr lang="ru-RU" b="1" dirty="0"/>
-              <a:t>Сети виртуальных каналов (</a:t>
+              <a:t> сети (</a:t>
             </a:r>
             <a:r>
               <a:rPr lang="af-ZA" b="1" dirty="0"/>
-              <a:t>VC</a:t>
-            </a:r>
-            <a:r>
-              <a:rPr lang="af-ZA" b="1" dirty="0" smtClean="0"/>
+              <a:t>Ethernet-</a:t>
+            </a:r>
+            <a:r>
+              <a:rPr lang="ru-RU" b="1" dirty="0"/>
+              <a:t>модель</a:t>
+            </a:r>
+            <a:r>
+              <a:rPr lang="ru-RU" b="1" dirty="0" smtClean="0"/>
               <a:t>)</a:t>
             </a:r>
             <a:endParaRPr lang="ru-RU" dirty="0"/>
@@ -16131,117 +16768,65 @@
             <p:ph idx="1"/>
           </p:nvPr>
         </p:nvSpPr>
-        <p:spPr/>
+        <p:spPr>
+          <a:xfrm>
+            <a:off x="490782" y="2363787"/>
+            <a:ext cx="7378334" cy="3541714"/>
+          </a:xfrm>
+        </p:spPr>
         <p:txBody>
-          <a:bodyPr/>
+          <a:bodyPr>
+            <a:normAutofit fontScale="92500" lnSpcReduction="10000"/>
+          </a:bodyPr>
           <a:lstStyle/>
           <a:p>
             <a:r>
               <a:rPr lang="ru-RU" b="1" dirty="0"/>
-              <a:t>3 фазы работы:</a:t>
+              <a:t>Принцип:</a:t>
+            </a:r>
+            <a:r>
+              <a:rPr lang="ru-RU" dirty="0"/>
+              <a:t> коммутатор читает глобальный адрес получателя и сопоставляет его с портом в таблице коммутации (MAC-таблице).</a:t>
+            </a:r>
+          </a:p>
+          <a:p>
+            <a:r>
+              <a:rPr lang="ru-RU" b="1" dirty="0"/>
+              <a:t>Свойства:</a:t>
             </a:r>
             <a:endParaRPr lang="ru-RU" dirty="0"/>
           </a:p>
           <a:p>
             <a:pPr lvl="1"/>
             <a:r>
-              <a:rPr lang="ru-RU" i="1" dirty="0" err="1"/>
-              <a:t>Setup</a:t>
-            </a:r>
-            <a:r>
-              <a:rPr lang="ru-RU" i="1" dirty="0"/>
-              <a:t>:</a:t>
-            </a:r>
-            <a:r>
               <a:rPr lang="ru-RU" dirty="0"/>
-              <a:t> построение сквозного пути и заполнение таблиц VC.</a:t>
+              <a:t>Независимая пересылка каждого кадра.</a:t>
             </a:r>
           </a:p>
           <a:p>
             <a:pPr lvl="1"/>
             <a:r>
-              <a:rPr lang="ru-RU" i="1" dirty="0" err="1"/>
-              <a:t>Data</a:t>
-            </a:r>
-            <a:r>
-              <a:rPr lang="ru-RU" i="1" dirty="0"/>
-              <a:t>:</a:t>
-            </a:r>
-            <a:r>
               <a:rPr lang="ru-RU" dirty="0"/>
-              <a:t> передача кадров по созданному каналу.</a:t>
+              <a:t>Высокая отказоустойчивость (основа архитектуры ARPANET/</a:t>
+            </a:r>
+            <a:r>
+              <a:rPr lang="ru-RU" dirty="0" err="1"/>
+              <a:t>Internet</a:t>
+            </a:r>
+            <a:r>
+              <a:rPr lang="ru-RU" dirty="0"/>
+              <a:t>).</a:t>
             </a:r>
           </a:p>
           <a:p>
             <a:pPr lvl="1"/>
             <a:r>
-              <a:rPr lang="ru-RU" i="1" dirty="0" err="1"/>
-              <a:t>Teardown</a:t>
-            </a:r>
-            <a:r>
-              <a:rPr lang="ru-RU" i="1" dirty="0"/>
-              <a:t>:</a:t>
-            </a:r>
-            <a:r>
               <a:rPr lang="ru-RU" dirty="0"/>
-              <a:t> очистка таблиц и освобождение ресурсов.</a:t>
-            </a:r>
-          </a:p>
-          <a:p>
-            <a:r>
-              <a:rPr lang="ru-RU" b="1" dirty="0"/>
-              <a:t>Концепция VCI (</a:t>
-            </a:r>
-            <a:r>
-              <a:rPr lang="ru-RU" b="1" dirty="0" err="1"/>
-              <a:t>Virtual</a:t>
-            </a:r>
-            <a:r>
-              <a:rPr lang="ru-RU" b="1" dirty="0"/>
-              <a:t> </a:t>
-            </a:r>
-            <a:r>
-              <a:rPr lang="ru-RU" b="1" dirty="0" err="1"/>
-              <a:t>Circuit</a:t>
-            </a:r>
-            <a:r>
-              <a:rPr lang="ru-RU" b="1" dirty="0"/>
-              <a:t> </a:t>
-            </a:r>
-            <a:r>
-              <a:rPr lang="ru-RU" b="1" dirty="0" err="1"/>
-              <a:t>Identifier</a:t>
-            </a:r>
-            <a:r>
-              <a:rPr lang="ru-RU" b="1" dirty="0"/>
-              <a:t>):</a:t>
-            </a:r>
-            <a:endParaRPr lang="ru-RU" dirty="0"/>
-          </a:p>
-          <a:p>
-            <a:pPr lvl="1"/>
-            <a:r>
-              <a:rPr lang="ru-RU" dirty="0"/>
-              <a:t>VCI имеет </a:t>
-            </a:r>
-            <a:r>
-              <a:rPr lang="ru-RU" b="1" dirty="0"/>
-              <a:t>локальное значение</a:t>
-            </a:r>
-            <a:r>
-              <a:rPr lang="ru-RU" dirty="0"/>
-              <a:t> (не глобальное!).</a:t>
-            </a:r>
-          </a:p>
-          <a:p>
-            <a:pPr lvl="1"/>
-            <a:r>
-              <a:rPr lang="ru-RU" dirty="0"/>
-              <a:t>Коммутатор заменяет входящий VCI на исходящий при передаче (</a:t>
+              <a:t>Отсутствие гарантий доставки на канальном уровне («</a:t>
             </a:r>
             <a:r>
               <a:rPr lang="ru-RU" dirty="0" err="1"/>
-              <a:t>Label</a:t>
+              <a:t>Best</a:t>
             </a:r>
             <a:r>
               <a:rPr lang="ru-RU" dirty="0"/>
@@ -16249,20 +16834,522 @@
             </a:r>
             <a:r>
               <a:rPr lang="ru-RU" dirty="0" err="1"/>
-              <a:t>Switching</a:t>
-            </a:r>
-            <a:r>
-              <a:rPr lang="ru-RU" dirty="0" smtClean="0"/>
-              <a:t>).</a:t>
-            </a:r>
+              <a:t>Effort</a:t>
+            </a:r>
+            <a:r>
+              <a:rPr lang="ru-RU" dirty="0"/>
+              <a:t>»).</a:t>
+            </a:r>
+          </a:p>
+          <a:p>
             <a:endParaRPr lang="ru-RU" dirty="0"/>
           </a:p>
         </p:txBody>
       </p:sp>
+      <p:graphicFrame>
+        <p:nvGraphicFramePr>
+          <p:cNvPr id="4" name="Таблица 3"/>
+          <p:cNvGraphicFramePr>
+            <a:graphicFrameLocks noGrp="1"/>
+          </p:cNvGraphicFramePr>
+          <p:nvPr>
+            <p:extLst>
+              <p:ext uri="{D42A27DB-BD31-4B8C-83A1-F6EECF244321}">
+                <p14:modId xmlns:p14="http://schemas.microsoft.com/office/powerpoint/2010/main" val="1699374137"/>
+              </p:ext>
+            </p:extLst>
+          </p:nvPr>
+        </p:nvGraphicFramePr>
+        <p:xfrm>
+          <a:off x="8012477" y="3193282"/>
+          <a:ext cx="3034934" cy="1752600"/>
+        </p:xfrm>
+        <a:graphic>
+          <a:graphicData uri="http://schemas.openxmlformats.org/drawingml/2006/table">
+            <a:tbl>
+              <a:tblPr/>
+              <a:tblGrid>
+                <a:gridCol w="1517467">
+                  <a:extLst>
+                    <a:ext uri="{9D8B030D-6E8A-4147-A177-3AD203B41FA5}">
+                      <a16:colId xmlns:a16="http://schemas.microsoft.com/office/drawing/2014/main" val="1344350392"/>
+                    </a:ext>
+                  </a:extLst>
+                </a:gridCol>
+                <a:gridCol w="1517467">
+                  <a:extLst>
+                    <a:ext uri="{9D8B030D-6E8A-4147-A177-3AD203B41FA5}">
+                      <a16:colId xmlns:a16="http://schemas.microsoft.com/office/drawing/2014/main" val="3248290192"/>
+                    </a:ext>
+                  </a:extLst>
+                </a:gridCol>
+              </a:tblGrid>
+              <a:tr h="0">
+                <a:tc>
+                  <a:txBody>
+                    <a:bodyPr/>
+                    <a:lstStyle/>
+                    <a:p>
+                      <a:pPr algn="ctr"/>
+                      <a:r>
+                        <a:rPr lang="ru-RU" dirty="0">
+                          <a:effectLst/>
+                        </a:rPr>
+                        <a:t>Назначение (</a:t>
+                      </a:r>
+                      <a:r>
+                        <a:rPr lang="af-ZA" dirty="0">
+                          <a:effectLst/>
+                        </a:rPr>
+                        <a:t>Host/MAC)</a:t>
+                      </a:r>
+                    </a:p>
+                  </a:txBody>
+                  <a:tcPr marL="95250" marR="95250" marT="47625" marB="47625" anchor="ctr">
+                    <a:lnL w="12700" cap="flat" cmpd="sng" algn="ctr">
+                      <a:solidFill>
+                        <a:schemeClr val="tx1"/>
+                      </a:solidFill>
+                      <a:prstDash val="solid"/>
+                      <a:round/>
+                      <a:headEnd type="none" w="med" len="med"/>
+                      <a:tailEnd type="none" w="med" len="med"/>
+                    </a:lnL>
+                    <a:lnR w="12700" cap="flat" cmpd="sng" algn="ctr">
+                      <a:solidFill>
+                        <a:schemeClr val="tx1"/>
+                      </a:solidFill>
+                      <a:prstDash val="solid"/>
+                      <a:round/>
+                      <a:headEnd type="none" w="med" len="med"/>
+                      <a:tailEnd type="none" w="med" len="med"/>
+                    </a:lnR>
+                    <a:lnT w="12700" cap="flat" cmpd="sng" algn="ctr">
+                      <a:solidFill>
+                        <a:schemeClr val="tx1"/>
+                      </a:solidFill>
+                      <a:prstDash val="solid"/>
+                      <a:round/>
+                      <a:headEnd type="none" w="med" len="med"/>
+                      <a:tailEnd type="none" w="med" len="med"/>
+                    </a:lnT>
+                    <a:lnB w="12700" cap="flat" cmpd="sng" algn="ctr">
+                      <a:solidFill>
+                        <a:schemeClr val="tx1"/>
+                      </a:solidFill>
+                      <a:prstDash val="solid"/>
+                      <a:round/>
+                      <a:headEnd type="none" w="med" len="med"/>
+                      <a:tailEnd type="none" w="med" len="med"/>
+                    </a:lnB>
+                  </a:tcPr>
+                </a:tc>
+                <a:tc>
+                  <a:txBody>
+                    <a:bodyPr/>
+                    <a:lstStyle/>
+                    <a:p>
+                      <a:pPr algn="ctr"/>
+                      <a:r>
+                        <a:rPr lang="ru-RU">
+                          <a:effectLst/>
+                        </a:rPr>
+                        <a:t>Порт</a:t>
+                      </a:r>
+                    </a:p>
+                  </a:txBody>
+                  <a:tcPr marL="95250" marR="95250" marT="47625" marB="47625" anchor="ctr">
+                    <a:lnL w="12700" cap="flat" cmpd="sng" algn="ctr">
+                      <a:solidFill>
+                        <a:schemeClr val="tx1"/>
+                      </a:solidFill>
+                      <a:prstDash val="solid"/>
+                      <a:round/>
+                      <a:headEnd type="none" w="med" len="med"/>
+                      <a:tailEnd type="none" w="med" len="med"/>
+                    </a:lnL>
+                    <a:lnR w="12700" cap="flat" cmpd="sng" algn="ctr">
+                      <a:solidFill>
+                        <a:schemeClr val="tx1"/>
+                      </a:solidFill>
+                      <a:prstDash val="solid"/>
+                      <a:round/>
+                      <a:headEnd type="none" w="med" len="med"/>
+                      <a:tailEnd type="none" w="med" len="med"/>
+                    </a:lnR>
+                    <a:lnT w="12700" cap="flat" cmpd="sng" algn="ctr">
+                      <a:solidFill>
+                        <a:schemeClr val="tx1"/>
+                      </a:solidFill>
+                      <a:prstDash val="solid"/>
+                      <a:round/>
+                      <a:headEnd type="none" w="med" len="med"/>
+                      <a:tailEnd type="none" w="med" len="med"/>
+                    </a:lnT>
+                    <a:lnB w="12700" cap="flat" cmpd="sng" algn="ctr">
+                      <a:solidFill>
+                        <a:schemeClr val="tx1"/>
+                      </a:solidFill>
+                      <a:prstDash val="solid"/>
+                      <a:round/>
+                      <a:headEnd type="none" w="med" len="med"/>
+                      <a:tailEnd type="none" w="med" len="med"/>
+                    </a:lnB>
+                  </a:tcPr>
+                </a:tc>
+                <a:extLst>
+                  <a:ext uri="{0D108BD9-81ED-4DB2-BD59-A6C34878D82A}">
+                    <a16:rowId xmlns:a16="http://schemas.microsoft.com/office/drawing/2014/main" val="4156300158"/>
+                  </a:ext>
+                </a:extLst>
+              </a:tr>
+              <a:tr h="0">
+                <a:tc>
+                  <a:txBody>
+                    <a:bodyPr/>
+                    <a:lstStyle/>
+                    <a:p>
+                      <a:pPr algn="ctr"/>
+                      <a:r>
+                        <a:rPr lang="af-ZA">
+                          <a:effectLst/>
+                        </a:rPr>
+                        <a:t>Host A</a:t>
+                      </a:r>
+                    </a:p>
+                  </a:txBody>
+                  <a:tcPr marL="95250" marR="95250" marT="47625" marB="47625" anchor="ctr">
+                    <a:lnL w="12700" cap="flat" cmpd="sng" algn="ctr">
+                      <a:solidFill>
+                        <a:schemeClr val="tx1"/>
+                      </a:solidFill>
+                      <a:prstDash val="solid"/>
+                      <a:round/>
+                      <a:headEnd type="none" w="med" len="med"/>
+                      <a:tailEnd type="none" w="med" len="med"/>
+                    </a:lnL>
+                    <a:lnR w="12700" cap="flat" cmpd="sng" algn="ctr">
+                      <a:solidFill>
+                        <a:schemeClr val="tx1"/>
+                      </a:solidFill>
+                      <a:prstDash val="solid"/>
+                      <a:round/>
+                      <a:headEnd type="none" w="med" len="med"/>
+                      <a:tailEnd type="none" w="med" len="med"/>
+                    </a:lnR>
+                    <a:lnT w="12700" cap="flat" cmpd="sng" algn="ctr">
+                      <a:solidFill>
+                        <a:schemeClr val="tx1"/>
+                      </a:solidFill>
+                      <a:prstDash val="solid"/>
+                      <a:round/>
+                      <a:headEnd type="none" w="med" len="med"/>
+                      <a:tailEnd type="none" w="med" len="med"/>
+                    </a:lnT>
+                    <a:lnB w="12700" cap="flat" cmpd="sng" algn="ctr">
+                      <a:solidFill>
+                        <a:schemeClr val="tx1"/>
+                      </a:solidFill>
+                      <a:prstDash val="solid"/>
+                      <a:round/>
+                      <a:headEnd type="none" w="med" len="med"/>
+                      <a:tailEnd type="none" w="med" len="med"/>
+                    </a:lnB>
+                  </a:tcPr>
+                </a:tc>
+                <a:tc>
+                  <a:txBody>
+                    <a:bodyPr/>
+                    <a:lstStyle/>
+                    <a:p>
+                      <a:pPr algn="ctr"/>
+                      <a:r>
+                        <a:rPr lang="af-ZA">
+                          <a:effectLst/>
+                        </a:rPr>
+                        <a:t>Port 2</a:t>
+                      </a:r>
+                    </a:p>
+                  </a:txBody>
+                  <a:tcPr marL="95250" marR="95250" marT="47625" marB="47625" anchor="ctr">
+                    <a:lnL w="12700" cap="flat" cmpd="sng" algn="ctr">
+                      <a:solidFill>
+                        <a:schemeClr val="tx1"/>
+                      </a:solidFill>
+                      <a:prstDash val="solid"/>
+                      <a:round/>
+                      <a:headEnd type="none" w="med" len="med"/>
+                      <a:tailEnd type="none" w="med" len="med"/>
+                    </a:lnL>
+                    <a:lnR w="12700" cap="flat" cmpd="sng" algn="ctr">
+                      <a:solidFill>
+                        <a:schemeClr val="tx1"/>
+                      </a:solidFill>
+                      <a:prstDash val="solid"/>
+                      <a:round/>
+                      <a:headEnd type="none" w="med" len="med"/>
+                      <a:tailEnd type="none" w="med" len="med"/>
+                    </a:lnR>
+                    <a:lnT w="12700" cap="flat" cmpd="sng" algn="ctr">
+                      <a:solidFill>
+                        <a:schemeClr val="tx1"/>
+                      </a:solidFill>
+                      <a:prstDash val="solid"/>
+                      <a:round/>
+                      <a:headEnd type="none" w="med" len="med"/>
+                      <a:tailEnd type="none" w="med" len="med"/>
+                    </a:lnT>
+                    <a:lnB w="12700" cap="flat" cmpd="sng" algn="ctr">
+                      <a:solidFill>
+                        <a:schemeClr val="tx1"/>
+                      </a:solidFill>
+                      <a:prstDash val="solid"/>
+                      <a:round/>
+                      <a:headEnd type="none" w="med" len="med"/>
+                      <a:tailEnd type="none" w="med" len="med"/>
+                    </a:lnB>
+                  </a:tcPr>
+                </a:tc>
+                <a:extLst>
+                  <a:ext uri="{0D108BD9-81ED-4DB2-BD59-A6C34878D82A}">
+                    <a16:rowId xmlns:a16="http://schemas.microsoft.com/office/drawing/2014/main" val="2323713434"/>
+                  </a:ext>
+                </a:extLst>
+              </a:tr>
+              <a:tr h="0">
+                <a:tc>
+                  <a:txBody>
+                    <a:bodyPr/>
+                    <a:lstStyle/>
+                    <a:p>
+                      <a:pPr algn="ctr"/>
+                      <a:r>
+                        <a:rPr lang="af-ZA">
+                          <a:effectLst/>
+                        </a:rPr>
+                        <a:t>Host B</a:t>
+                      </a:r>
+                    </a:p>
+                  </a:txBody>
+                  <a:tcPr marL="95250" marR="95250" marT="47625" marB="47625" anchor="ctr">
+                    <a:lnL w="12700" cap="flat" cmpd="sng" algn="ctr">
+                      <a:solidFill>
+                        <a:schemeClr val="tx1"/>
+                      </a:solidFill>
+                      <a:prstDash val="solid"/>
+                      <a:round/>
+                      <a:headEnd type="none" w="med" len="med"/>
+                      <a:tailEnd type="none" w="med" len="med"/>
+                    </a:lnL>
+                    <a:lnR w="12700" cap="flat" cmpd="sng" algn="ctr">
+                      <a:solidFill>
+                        <a:schemeClr val="tx1"/>
+                      </a:solidFill>
+                      <a:prstDash val="solid"/>
+                      <a:round/>
+                      <a:headEnd type="none" w="med" len="med"/>
+                      <a:tailEnd type="none" w="med" len="med"/>
+                    </a:lnR>
+                    <a:lnT w="12700" cap="flat" cmpd="sng" algn="ctr">
+                      <a:solidFill>
+                        <a:schemeClr val="tx1"/>
+                      </a:solidFill>
+                      <a:prstDash val="solid"/>
+                      <a:round/>
+                      <a:headEnd type="none" w="med" len="med"/>
+                      <a:tailEnd type="none" w="med" len="med"/>
+                    </a:lnT>
+                    <a:lnB w="12700" cap="flat" cmpd="sng" algn="ctr">
+                      <a:solidFill>
+                        <a:schemeClr val="tx1"/>
+                      </a:solidFill>
+                      <a:prstDash val="solid"/>
+                      <a:round/>
+                      <a:headEnd type="none" w="med" len="med"/>
+                      <a:tailEnd type="none" w="med" len="med"/>
+                    </a:lnB>
+                  </a:tcPr>
+                </a:tc>
+                <a:tc>
+                  <a:txBody>
+                    <a:bodyPr/>
+                    <a:lstStyle/>
+                    <a:p>
+                      <a:pPr algn="ctr"/>
+                      <a:r>
+                        <a:rPr lang="af-ZA">
+                          <a:effectLst/>
+                        </a:rPr>
+                        <a:t>Port 0</a:t>
+                      </a:r>
+                    </a:p>
+                  </a:txBody>
+                  <a:tcPr marL="95250" marR="95250" marT="47625" marB="47625" anchor="ctr">
+                    <a:lnL w="12700" cap="flat" cmpd="sng" algn="ctr">
+                      <a:solidFill>
+                        <a:schemeClr val="tx1"/>
+                      </a:solidFill>
+                      <a:prstDash val="solid"/>
+                      <a:round/>
+                      <a:headEnd type="none" w="med" len="med"/>
+                      <a:tailEnd type="none" w="med" len="med"/>
+                    </a:lnL>
+                    <a:lnR w="12700" cap="flat" cmpd="sng" algn="ctr">
+                      <a:solidFill>
+                        <a:schemeClr val="tx1"/>
+                      </a:solidFill>
+                      <a:prstDash val="solid"/>
+                      <a:round/>
+                      <a:headEnd type="none" w="med" len="med"/>
+                      <a:tailEnd type="none" w="med" len="med"/>
+                    </a:lnR>
+                    <a:lnT w="12700" cap="flat" cmpd="sng" algn="ctr">
+                      <a:solidFill>
+                        <a:schemeClr val="tx1"/>
+                      </a:solidFill>
+                      <a:prstDash val="solid"/>
+                      <a:round/>
+                      <a:headEnd type="none" w="med" len="med"/>
+                      <a:tailEnd type="none" w="med" len="med"/>
+                    </a:lnT>
+                    <a:lnB w="12700" cap="flat" cmpd="sng" algn="ctr">
+                      <a:solidFill>
+                        <a:schemeClr val="tx1"/>
+                      </a:solidFill>
+                      <a:prstDash val="solid"/>
+                      <a:round/>
+                      <a:headEnd type="none" w="med" len="med"/>
+                      <a:tailEnd type="none" w="med" len="med"/>
+                    </a:lnB>
+                  </a:tcPr>
+                </a:tc>
+                <a:extLst>
+                  <a:ext uri="{0D108BD9-81ED-4DB2-BD59-A6C34878D82A}">
+                    <a16:rowId xmlns:a16="http://schemas.microsoft.com/office/drawing/2014/main" val="3173424703"/>
+                  </a:ext>
+                </a:extLst>
+              </a:tr>
+              <a:tr h="0">
+                <a:tc>
+                  <a:txBody>
+                    <a:bodyPr/>
+                    <a:lstStyle/>
+                    <a:p>
+                      <a:pPr algn="ctr"/>
+                      <a:r>
+                        <a:rPr lang="af-ZA">
+                          <a:effectLst/>
+                        </a:rPr>
+                        <a:t>Host C</a:t>
+                      </a:r>
+                    </a:p>
+                  </a:txBody>
+                  <a:tcPr marL="95250" marR="95250" marT="47625" marB="47625" anchor="ctr">
+                    <a:lnL w="12700" cap="flat" cmpd="sng" algn="ctr">
+                      <a:solidFill>
+                        <a:schemeClr val="tx1"/>
+                      </a:solidFill>
+                      <a:prstDash val="solid"/>
+                      <a:round/>
+                      <a:headEnd type="none" w="med" len="med"/>
+                      <a:tailEnd type="none" w="med" len="med"/>
+                    </a:lnL>
+                    <a:lnR w="12700" cap="flat" cmpd="sng" algn="ctr">
+                      <a:solidFill>
+                        <a:schemeClr val="tx1"/>
+                      </a:solidFill>
+                      <a:prstDash val="solid"/>
+                      <a:round/>
+                      <a:headEnd type="none" w="med" len="med"/>
+                      <a:tailEnd type="none" w="med" len="med"/>
+                    </a:lnR>
+                    <a:lnT w="12700" cap="flat" cmpd="sng" algn="ctr">
+                      <a:solidFill>
+                        <a:schemeClr val="tx1"/>
+                      </a:solidFill>
+                      <a:prstDash val="solid"/>
+                      <a:round/>
+                      <a:headEnd type="none" w="med" len="med"/>
+                      <a:tailEnd type="none" w="med" len="med"/>
+                    </a:lnT>
+                    <a:lnB w="12700" cap="flat" cmpd="sng" algn="ctr">
+                      <a:solidFill>
+                        <a:schemeClr val="tx1"/>
+                      </a:solidFill>
+                      <a:prstDash val="solid"/>
+                      <a:round/>
+                      <a:headEnd type="none" w="med" len="med"/>
+                      <a:tailEnd type="none" w="med" len="med"/>
+                    </a:lnB>
+                  </a:tcPr>
+                </a:tc>
+                <a:tc>
+                  <a:txBody>
+                    <a:bodyPr/>
+                    <a:lstStyle/>
+                    <a:p>
+                      <a:pPr algn="ctr"/>
+                      <a:r>
+                        <a:rPr lang="af-ZA" dirty="0">
+                          <a:effectLst/>
+                        </a:rPr>
+                        <a:t>Port 3</a:t>
+                      </a:r>
+                    </a:p>
+                  </a:txBody>
+                  <a:tcPr marL="95250" marR="95250" marT="47625" marB="47625" anchor="ctr">
+                    <a:lnL w="12700" cap="flat" cmpd="sng" algn="ctr">
+                      <a:solidFill>
+                        <a:schemeClr val="tx1"/>
+                      </a:solidFill>
+                      <a:prstDash val="solid"/>
+                      <a:round/>
+                      <a:headEnd type="none" w="med" len="med"/>
+                      <a:tailEnd type="none" w="med" len="med"/>
+                    </a:lnL>
+                    <a:lnR w="12700" cap="flat" cmpd="sng" algn="ctr">
+                      <a:solidFill>
+                        <a:schemeClr val="tx1"/>
+                      </a:solidFill>
+                      <a:prstDash val="solid"/>
+                      <a:round/>
+                      <a:headEnd type="none" w="med" len="med"/>
+                      <a:tailEnd type="none" w="med" len="med"/>
+                    </a:lnR>
+                    <a:lnT w="12700" cap="flat" cmpd="sng" algn="ctr">
+                      <a:solidFill>
+                        <a:schemeClr val="tx1"/>
+                      </a:solidFill>
+                      <a:prstDash val="solid"/>
+                      <a:round/>
+                      <a:headEnd type="none" w="med" len="med"/>
+                      <a:tailEnd type="none" w="med" len="med"/>
+                    </a:lnT>
+                    <a:lnB w="12700" cap="flat" cmpd="sng" algn="ctr">
+                      <a:solidFill>
+                        <a:schemeClr val="tx1"/>
+                      </a:solidFill>
+                      <a:prstDash val="solid"/>
+                      <a:round/>
+                      <a:headEnd type="none" w="med" len="med"/>
+                      <a:tailEnd type="none" w="med" len="med"/>
+                    </a:lnB>
+                  </a:tcPr>
+                </a:tc>
+                <a:extLst>
+                  <a:ext uri="{0D108BD9-81ED-4DB2-BD59-A6C34878D82A}">
+                    <a16:rowId xmlns:a16="http://schemas.microsoft.com/office/drawing/2014/main" val="3269794006"/>
+                  </a:ext>
+                </a:extLst>
+              </a:tr>
+            </a:tbl>
+          </a:graphicData>
+        </a:graphic>
+      </p:graphicFrame>
     </p:spTree>
     <p:extLst>
       <p:ext uri="{BB962C8B-B14F-4D97-AF65-F5344CB8AC3E}">
-        <p14:creationId xmlns:p14="http://schemas.microsoft.com/office/powerpoint/2010/main" val="1300332924"/>
+        <p14:creationId xmlns:p14="http://schemas.microsoft.com/office/powerpoint/2010/main" val="2926595142"/>
       </p:ext>
     </p:extLst>
   </p:cSld>
@@ -18297,1269 +19384,176 @@
           <a:chExt cx="0" cy="0"/>
         </a:xfrm>
       </p:grpSpPr>
-      <p:graphicFrame>
-        <p:nvGraphicFramePr>
-          <p:cNvPr id="5" name="Таблица 4"/>
-          <p:cNvGraphicFramePr>
-            <a:graphicFrameLocks noGrp="1"/>
-          </p:cNvGraphicFramePr>
+      <p:sp>
+        <p:nvSpPr>
+          <p:cNvPr id="2" name="Заголовок 1"/>
+          <p:cNvSpPr>
+            <a:spLocks noGrp="1"/>
+          </p:cNvSpPr>
           <p:nvPr>
-            <p:extLst>
-              <p:ext uri="{D42A27DB-BD31-4B8C-83A1-F6EECF244321}">
-                <p14:modId xmlns:p14="http://schemas.microsoft.com/office/powerpoint/2010/main" val="1588240456"/>
-              </p:ext>
-            </p:extLst>
+            <p:ph type="title"/>
           </p:nvPr>
-        </p:nvGraphicFramePr>
-        <p:xfrm>
-          <a:off x="1449759" y="781171"/>
-          <a:ext cx="9514248" cy="5443782"/>
-        </p:xfrm>
-        <a:graphic>
-          <a:graphicData uri="http://schemas.openxmlformats.org/drawingml/2006/table">
-            <a:tbl>
-              <a:tblPr/>
-              <a:tblGrid>
-                <a:gridCol w="3171416">
-                  <a:extLst>
-                    <a:ext uri="{9D8B030D-6E8A-4147-A177-3AD203B41FA5}">
-                      <a16:colId xmlns:a16="http://schemas.microsoft.com/office/drawing/2014/main" val="3415095240"/>
-                    </a:ext>
-                  </a:extLst>
-                </a:gridCol>
-                <a:gridCol w="3171416">
-                  <a:extLst>
-                    <a:ext uri="{9D8B030D-6E8A-4147-A177-3AD203B41FA5}">
-                      <a16:colId xmlns:a16="http://schemas.microsoft.com/office/drawing/2014/main" val="2469910561"/>
-                    </a:ext>
-                  </a:extLst>
-                </a:gridCol>
-                <a:gridCol w="3171416">
-                  <a:extLst>
-                    <a:ext uri="{9D8B030D-6E8A-4147-A177-3AD203B41FA5}">
-                      <a16:colId xmlns:a16="http://schemas.microsoft.com/office/drawing/2014/main" val="463297356"/>
-                    </a:ext>
-                  </a:extLst>
-                </a:gridCol>
-              </a:tblGrid>
-              <a:tr h="733067">
-                <a:tc>
-                  <a:txBody>
-                    <a:bodyPr/>
-                    <a:lstStyle/>
-                    <a:p>
-                      <a:pPr algn="l"/>
-                      <a:r>
-                        <a:rPr lang="ru-RU" sz="1300" b="1" dirty="0">
-                          <a:effectLst/>
-                        </a:rPr>
-                        <a:t>Параметр</a:t>
-                      </a:r>
-                    </a:p>
-                  </a:txBody>
-                  <a:tcPr marL="70552" marR="70552" marT="35276" marB="35276" anchor="ctr">
-                    <a:lnL w="12700" cap="flat" cmpd="sng" algn="ctr">
-                      <a:solidFill>
-                        <a:schemeClr val="tx1"/>
-                      </a:solidFill>
-                      <a:prstDash val="solid"/>
-                      <a:round/>
-                      <a:headEnd type="none" w="med" len="med"/>
-                      <a:tailEnd type="none" w="med" len="med"/>
-                    </a:lnL>
-                    <a:lnR w="12700" cap="flat" cmpd="sng" algn="ctr">
-                      <a:solidFill>
-                        <a:schemeClr val="tx1"/>
-                      </a:solidFill>
-                      <a:prstDash val="solid"/>
-                      <a:round/>
-                      <a:headEnd type="none" w="med" len="med"/>
-                      <a:tailEnd type="none" w="med" len="med"/>
-                    </a:lnR>
-                    <a:lnT w="12700" cap="flat" cmpd="sng" algn="ctr">
-                      <a:solidFill>
-                        <a:schemeClr val="tx1"/>
-                      </a:solidFill>
-                      <a:prstDash val="solid"/>
-                      <a:round/>
-                      <a:headEnd type="none" w="med" len="med"/>
-                      <a:tailEnd type="none" w="med" len="med"/>
-                    </a:lnT>
-                    <a:lnB w="12700" cap="flat" cmpd="sng" algn="ctr">
-                      <a:solidFill>
-                        <a:schemeClr val="tx1"/>
-                      </a:solidFill>
-                      <a:prstDash val="solid"/>
-                      <a:round/>
-                      <a:headEnd type="none" w="med" len="med"/>
-                      <a:tailEnd type="none" w="med" len="med"/>
-                    </a:lnB>
-                  </a:tcPr>
-                </a:tc>
-                <a:tc>
-                  <a:txBody>
-                    <a:bodyPr/>
-                    <a:lstStyle/>
-                    <a:p>
-                      <a:pPr algn="l"/>
-                      <a:r>
-                        <a:rPr lang="ru-RU" sz="1300" b="1">
-                          <a:effectLst/>
-                        </a:rPr>
-                        <a:t>Датаграммный подход (</a:t>
-                      </a:r>
-                      <a:r>
-                        <a:rPr lang="af-ZA" sz="1300" b="1">
-                          <a:effectLst/>
-                        </a:rPr>
-                        <a:t>Datagram Switching)</a:t>
-                      </a:r>
-                    </a:p>
-                  </a:txBody>
-                  <a:tcPr marL="70552" marR="70552" marT="35276" marB="35276" anchor="ctr">
-                    <a:lnL w="12700" cap="flat" cmpd="sng" algn="ctr">
-                      <a:solidFill>
-                        <a:schemeClr val="tx1"/>
-                      </a:solidFill>
-                      <a:prstDash val="solid"/>
-                      <a:round/>
-                      <a:headEnd type="none" w="med" len="med"/>
-                      <a:tailEnd type="none" w="med" len="med"/>
-                    </a:lnL>
-                    <a:lnR w="12700" cap="flat" cmpd="sng" algn="ctr">
-                      <a:solidFill>
-                        <a:schemeClr val="tx1"/>
-                      </a:solidFill>
-                      <a:prstDash val="solid"/>
-                      <a:round/>
-                      <a:headEnd type="none" w="med" len="med"/>
-                      <a:tailEnd type="none" w="med" len="med"/>
-                    </a:lnR>
-                    <a:lnT w="12700" cap="flat" cmpd="sng" algn="ctr">
-                      <a:solidFill>
-                        <a:schemeClr val="tx1"/>
-                      </a:solidFill>
-                      <a:prstDash val="solid"/>
-                      <a:round/>
-                      <a:headEnd type="none" w="med" len="med"/>
-                      <a:tailEnd type="none" w="med" len="med"/>
-                    </a:lnT>
-                    <a:lnB w="12700" cap="flat" cmpd="sng" algn="ctr">
-                      <a:solidFill>
-                        <a:schemeClr val="tx1"/>
-                      </a:solidFill>
-                      <a:prstDash val="solid"/>
-                      <a:round/>
-                      <a:headEnd type="none" w="med" len="med"/>
-                      <a:tailEnd type="none" w="med" len="med"/>
-                    </a:lnB>
-                  </a:tcPr>
-                </a:tc>
-                <a:tc>
-                  <a:txBody>
-                    <a:bodyPr/>
-                    <a:lstStyle/>
-                    <a:p>
-                      <a:pPr algn="l"/>
-                      <a:r>
-                        <a:rPr lang="ru-RU" sz="1300" b="1">
-                          <a:effectLst/>
-                        </a:rPr>
-                        <a:t>Виртуальные каналы (Virtual Circuits, VC)</a:t>
-                      </a:r>
-                    </a:p>
-                  </a:txBody>
-                  <a:tcPr marL="70552" marR="70552" marT="35276" marB="35276" anchor="ctr">
-                    <a:lnL w="12700" cap="flat" cmpd="sng" algn="ctr">
-                      <a:solidFill>
-                        <a:schemeClr val="tx1"/>
-                      </a:solidFill>
-                      <a:prstDash val="solid"/>
-                      <a:round/>
-                      <a:headEnd type="none" w="med" len="med"/>
-                      <a:tailEnd type="none" w="med" len="med"/>
-                    </a:lnL>
-                    <a:lnR w="12700" cap="flat" cmpd="sng" algn="ctr">
-                      <a:solidFill>
-                        <a:schemeClr val="tx1"/>
-                      </a:solidFill>
-                      <a:prstDash val="solid"/>
-                      <a:round/>
-                      <a:headEnd type="none" w="med" len="med"/>
-                      <a:tailEnd type="none" w="med" len="med"/>
-                    </a:lnR>
-                    <a:lnT w="12700" cap="flat" cmpd="sng" algn="ctr">
-                      <a:solidFill>
-                        <a:schemeClr val="tx1"/>
-                      </a:solidFill>
-                      <a:prstDash val="solid"/>
-                      <a:round/>
-                      <a:headEnd type="none" w="med" len="med"/>
-                      <a:tailEnd type="none" w="med" len="med"/>
-                    </a:lnT>
-                    <a:lnB w="12700" cap="flat" cmpd="sng" algn="ctr">
-                      <a:solidFill>
-                        <a:schemeClr val="tx1"/>
-                      </a:solidFill>
-                      <a:prstDash val="solid"/>
-                      <a:round/>
-                      <a:headEnd type="none" w="med" len="med"/>
-                      <a:tailEnd type="none" w="med" len="med"/>
-                    </a:lnB>
-                  </a:tcPr>
-                </a:tc>
-                <a:extLst>
-                  <a:ext uri="{0D108BD9-81ED-4DB2-BD59-A6C34878D82A}">
-                    <a16:rowId xmlns:a16="http://schemas.microsoft.com/office/drawing/2014/main" val="4119901875"/>
-                  </a:ext>
-                </a:extLst>
-              </a:tr>
-              <a:tr h="733067">
-                <a:tc>
-                  <a:txBody>
-                    <a:bodyPr/>
-                    <a:lstStyle/>
-                    <a:p>
-                      <a:pPr algn="l"/>
-                      <a:r>
-                        <a:rPr lang="ru-RU" sz="1300" b="1" dirty="0">
-                          <a:effectLst/>
-                        </a:rPr>
-                        <a:t>Установление соединения</a:t>
-                      </a:r>
-                    </a:p>
-                  </a:txBody>
-                  <a:tcPr marL="70552" marR="70552" marT="35276" marB="35276" anchor="ctr">
-                    <a:lnL w="12700" cap="flat" cmpd="sng" algn="ctr">
-                      <a:solidFill>
-                        <a:schemeClr val="tx1"/>
-                      </a:solidFill>
-                      <a:prstDash val="solid"/>
-                      <a:round/>
-                      <a:headEnd type="none" w="med" len="med"/>
-                      <a:tailEnd type="none" w="med" len="med"/>
-                    </a:lnL>
-                    <a:lnR w="12700" cap="flat" cmpd="sng" algn="ctr">
-                      <a:solidFill>
-                        <a:schemeClr val="tx1"/>
-                      </a:solidFill>
-                      <a:prstDash val="solid"/>
-                      <a:round/>
-                      <a:headEnd type="none" w="med" len="med"/>
-                      <a:tailEnd type="none" w="med" len="med"/>
-                    </a:lnR>
-                    <a:lnT w="12700" cap="flat" cmpd="sng" algn="ctr">
-                      <a:solidFill>
-                        <a:schemeClr val="tx1"/>
-                      </a:solidFill>
-                      <a:prstDash val="solid"/>
-                      <a:round/>
-                      <a:headEnd type="none" w="med" len="med"/>
-                      <a:tailEnd type="none" w="med" len="med"/>
-                    </a:lnT>
-                    <a:lnB w="12700" cap="flat" cmpd="sng" algn="ctr">
-                      <a:solidFill>
-                        <a:schemeClr val="tx1"/>
-                      </a:solidFill>
-                      <a:prstDash val="solid"/>
-                      <a:round/>
-                      <a:headEnd type="none" w="med" len="med"/>
-                      <a:tailEnd type="none" w="med" len="med"/>
-                    </a:lnB>
-                  </a:tcPr>
-                </a:tc>
-                <a:tc>
-                  <a:txBody>
-                    <a:bodyPr/>
-                    <a:lstStyle/>
-                    <a:p>
-                      <a:pPr algn="l"/>
-                      <a:r>
-                        <a:rPr lang="ru-RU" sz="1300" b="1">
-                          <a:effectLst/>
-                        </a:rPr>
-                        <a:t>Не требуется (</a:t>
-                      </a:r>
-                      <a:r>
-                        <a:rPr lang="af-ZA" sz="1300" b="1" i="1">
-                          <a:effectLst/>
-                        </a:rPr>
-                        <a:t>Connectionless</a:t>
-                      </a:r>
-                      <a:r>
-                        <a:rPr lang="af-ZA" sz="1300" b="1">
-                          <a:effectLst/>
-                        </a:rPr>
-                        <a:t>)</a:t>
-                      </a:r>
-                    </a:p>
-                  </a:txBody>
-                  <a:tcPr marL="70552" marR="70552" marT="35276" marB="35276" anchor="ctr">
-                    <a:lnL w="12700" cap="flat" cmpd="sng" algn="ctr">
-                      <a:solidFill>
-                        <a:schemeClr val="tx1"/>
-                      </a:solidFill>
-                      <a:prstDash val="solid"/>
-                      <a:round/>
-                      <a:headEnd type="none" w="med" len="med"/>
-                      <a:tailEnd type="none" w="med" len="med"/>
-                    </a:lnL>
-                    <a:lnR w="12700" cap="flat" cmpd="sng" algn="ctr">
-                      <a:solidFill>
-                        <a:schemeClr val="tx1"/>
-                      </a:solidFill>
-                      <a:prstDash val="solid"/>
-                      <a:round/>
-                      <a:headEnd type="none" w="med" len="med"/>
-                      <a:tailEnd type="none" w="med" len="med"/>
-                    </a:lnR>
-                    <a:lnT w="12700" cap="flat" cmpd="sng" algn="ctr">
-                      <a:solidFill>
-                        <a:schemeClr val="tx1"/>
-                      </a:solidFill>
-                      <a:prstDash val="solid"/>
-                      <a:round/>
-                      <a:headEnd type="none" w="med" len="med"/>
-                      <a:tailEnd type="none" w="med" len="med"/>
-                    </a:lnT>
-                    <a:lnB w="12700" cap="flat" cmpd="sng" algn="ctr">
-                      <a:solidFill>
-                        <a:schemeClr val="tx1"/>
-                      </a:solidFill>
-                      <a:prstDash val="solid"/>
-                      <a:round/>
-                      <a:headEnd type="none" w="med" len="med"/>
-                      <a:tailEnd type="none" w="med" len="med"/>
-                    </a:lnB>
-                  </a:tcPr>
-                </a:tc>
-                <a:tc>
-                  <a:txBody>
-                    <a:bodyPr/>
-                    <a:lstStyle/>
-                    <a:p>
-                      <a:pPr algn="l"/>
-                      <a:r>
-                        <a:rPr lang="ru-RU" sz="1300" b="1">
-                          <a:effectLst/>
-                        </a:rPr>
-                        <a:t>Обязательно перед передачей (</a:t>
-                      </a:r>
-                      <a:r>
-                        <a:rPr lang="af-ZA" sz="1300" b="1" i="1">
-                          <a:effectLst/>
-                        </a:rPr>
-                        <a:t>Connection-oriented</a:t>
-                      </a:r>
-                      <a:r>
-                        <a:rPr lang="af-ZA" sz="1300" b="1">
-                          <a:effectLst/>
-                        </a:rPr>
-                        <a:t>)</a:t>
-                      </a:r>
-                    </a:p>
-                  </a:txBody>
-                  <a:tcPr marL="70552" marR="70552" marT="35276" marB="35276" anchor="ctr">
-                    <a:lnL w="12700" cap="flat" cmpd="sng" algn="ctr">
-                      <a:solidFill>
-                        <a:schemeClr val="tx1"/>
-                      </a:solidFill>
-                      <a:prstDash val="solid"/>
-                      <a:round/>
-                      <a:headEnd type="none" w="med" len="med"/>
-                      <a:tailEnd type="none" w="med" len="med"/>
-                    </a:lnL>
-                    <a:lnR w="12700" cap="flat" cmpd="sng" algn="ctr">
-                      <a:solidFill>
-                        <a:schemeClr val="tx1"/>
-                      </a:solidFill>
-                      <a:prstDash val="solid"/>
-                      <a:round/>
-                      <a:headEnd type="none" w="med" len="med"/>
-                      <a:tailEnd type="none" w="med" len="med"/>
-                    </a:lnR>
-                    <a:lnT w="12700" cap="flat" cmpd="sng" algn="ctr">
-                      <a:solidFill>
-                        <a:schemeClr val="tx1"/>
-                      </a:solidFill>
-                      <a:prstDash val="solid"/>
-                      <a:round/>
-                      <a:headEnd type="none" w="med" len="med"/>
-                      <a:tailEnd type="none" w="med" len="med"/>
-                    </a:lnT>
-                    <a:lnB w="12700" cap="flat" cmpd="sng" algn="ctr">
-                      <a:solidFill>
-                        <a:schemeClr val="tx1"/>
-                      </a:solidFill>
-                      <a:prstDash val="solid"/>
-                      <a:round/>
-                      <a:headEnd type="none" w="med" len="med"/>
-                      <a:tailEnd type="none" w="med" len="med"/>
-                    </a:lnB>
-                  </a:tcPr>
-                </a:tc>
-                <a:extLst>
-                  <a:ext uri="{0D108BD9-81ED-4DB2-BD59-A6C34878D82A}">
-                    <a16:rowId xmlns:a16="http://schemas.microsoft.com/office/drawing/2014/main" val="2273791482"/>
-                  </a:ext>
-                </a:extLst>
-              </a:tr>
-              <a:tr h="733067">
-                <a:tc>
-                  <a:txBody>
-                    <a:bodyPr/>
-                    <a:lstStyle/>
-                    <a:p>
-                      <a:pPr algn="l"/>
-                      <a:r>
-                        <a:rPr lang="ru-RU" sz="1300" b="1" dirty="0">
-                          <a:effectLst/>
-                        </a:rPr>
-                        <a:t>Адресация в заголовке</a:t>
-                      </a:r>
-                    </a:p>
-                  </a:txBody>
-                  <a:tcPr marL="70552" marR="70552" marT="35276" marB="35276" anchor="ctr">
-                    <a:lnL w="12700" cap="flat" cmpd="sng" algn="ctr">
-                      <a:solidFill>
-                        <a:schemeClr val="tx1"/>
-                      </a:solidFill>
-                      <a:prstDash val="solid"/>
-                      <a:round/>
-                      <a:headEnd type="none" w="med" len="med"/>
-                      <a:tailEnd type="none" w="med" len="med"/>
-                    </a:lnL>
-                    <a:lnR w="12700" cap="flat" cmpd="sng" algn="ctr">
-                      <a:solidFill>
-                        <a:schemeClr val="tx1"/>
-                      </a:solidFill>
-                      <a:prstDash val="solid"/>
-                      <a:round/>
-                      <a:headEnd type="none" w="med" len="med"/>
-                      <a:tailEnd type="none" w="med" len="med"/>
-                    </a:lnR>
-                    <a:lnT w="12700" cap="flat" cmpd="sng" algn="ctr">
-                      <a:solidFill>
-                        <a:schemeClr val="tx1"/>
-                      </a:solidFill>
-                      <a:prstDash val="solid"/>
-                      <a:round/>
-                      <a:headEnd type="none" w="med" len="med"/>
-                      <a:tailEnd type="none" w="med" len="med"/>
-                    </a:lnT>
-                    <a:lnB w="12700" cap="flat" cmpd="sng" algn="ctr">
-                      <a:solidFill>
-                        <a:schemeClr val="tx1"/>
-                      </a:solidFill>
-                      <a:prstDash val="solid"/>
-                      <a:round/>
-                      <a:headEnd type="none" w="med" len="med"/>
-                      <a:tailEnd type="none" w="med" len="med"/>
-                    </a:lnB>
-                  </a:tcPr>
-                </a:tc>
-                <a:tc>
-                  <a:txBody>
-                    <a:bodyPr/>
-                    <a:lstStyle/>
-                    <a:p>
-                      <a:pPr algn="l"/>
-                      <a:r>
-                        <a:rPr lang="ru-RU" sz="1300" b="1" dirty="0">
-                          <a:effectLst/>
-                        </a:rPr>
-                        <a:t>Полный глобальный адрес назначения (напр., MAC-адрес)</a:t>
-                      </a:r>
-                    </a:p>
-                  </a:txBody>
-                  <a:tcPr marL="70552" marR="70552" marT="35276" marB="35276" anchor="ctr">
-                    <a:lnL w="12700" cap="flat" cmpd="sng" algn="ctr">
-                      <a:solidFill>
-                        <a:schemeClr val="tx1"/>
-                      </a:solidFill>
-                      <a:prstDash val="solid"/>
-                      <a:round/>
-                      <a:headEnd type="none" w="med" len="med"/>
-                      <a:tailEnd type="none" w="med" len="med"/>
-                    </a:lnL>
-                    <a:lnR w="12700" cap="flat" cmpd="sng" algn="ctr">
-                      <a:solidFill>
-                        <a:schemeClr val="tx1"/>
-                      </a:solidFill>
-                      <a:prstDash val="solid"/>
-                      <a:round/>
-                      <a:headEnd type="none" w="med" len="med"/>
-                      <a:tailEnd type="none" w="med" len="med"/>
-                    </a:lnR>
-                    <a:lnT w="12700" cap="flat" cmpd="sng" algn="ctr">
-                      <a:solidFill>
-                        <a:schemeClr val="tx1"/>
-                      </a:solidFill>
-                      <a:prstDash val="solid"/>
-                      <a:round/>
-                      <a:headEnd type="none" w="med" len="med"/>
-                      <a:tailEnd type="none" w="med" len="med"/>
-                    </a:lnT>
-                    <a:lnB w="12700" cap="flat" cmpd="sng" algn="ctr">
-                      <a:solidFill>
-                        <a:schemeClr val="tx1"/>
-                      </a:solidFill>
-                      <a:prstDash val="solid"/>
-                      <a:round/>
-                      <a:headEnd type="none" w="med" len="med"/>
-                      <a:tailEnd type="none" w="med" len="med"/>
-                    </a:lnB>
-                  </a:tcPr>
-                </a:tc>
-                <a:tc>
-                  <a:txBody>
-                    <a:bodyPr/>
-                    <a:lstStyle/>
-                    <a:p>
-                      <a:pPr algn="l"/>
-                      <a:r>
-                        <a:rPr lang="ru-RU" sz="1300" b="1">
-                          <a:effectLst/>
-                        </a:rPr>
-                        <a:t>Короткий локальный идентификатор (</a:t>
-                      </a:r>
-                      <a:r>
-                        <a:rPr lang="af-ZA" sz="1300" b="1">
-                          <a:effectLst/>
-                        </a:rPr>
-                        <a:t>VCI)</a:t>
-                      </a:r>
-                    </a:p>
-                  </a:txBody>
-                  <a:tcPr marL="70552" marR="70552" marT="35276" marB="35276" anchor="ctr">
-                    <a:lnL w="12700" cap="flat" cmpd="sng" algn="ctr">
-                      <a:solidFill>
-                        <a:schemeClr val="tx1"/>
-                      </a:solidFill>
-                      <a:prstDash val="solid"/>
-                      <a:round/>
-                      <a:headEnd type="none" w="med" len="med"/>
-                      <a:tailEnd type="none" w="med" len="med"/>
-                    </a:lnL>
-                    <a:lnR w="12700" cap="flat" cmpd="sng" algn="ctr">
-                      <a:solidFill>
-                        <a:schemeClr val="tx1"/>
-                      </a:solidFill>
-                      <a:prstDash val="solid"/>
-                      <a:round/>
-                      <a:headEnd type="none" w="med" len="med"/>
-                      <a:tailEnd type="none" w="med" len="med"/>
-                    </a:lnR>
-                    <a:lnT w="12700" cap="flat" cmpd="sng" algn="ctr">
-                      <a:solidFill>
-                        <a:schemeClr val="tx1"/>
-                      </a:solidFill>
-                      <a:prstDash val="solid"/>
-                      <a:round/>
-                      <a:headEnd type="none" w="med" len="med"/>
-                      <a:tailEnd type="none" w="med" len="med"/>
-                    </a:lnT>
-                    <a:lnB w="12700" cap="flat" cmpd="sng" algn="ctr">
-                      <a:solidFill>
-                        <a:schemeClr val="tx1"/>
-                      </a:solidFill>
-                      <a:prstDash val="solid"/>
-                      <a:round/>
-                      <a:headEnd type="none" w="med" len="med"/>
-                      <a:tailEnd type="none" w="med" len="med"/>
-                    </a:lnB>
-                  </a:tcPr>
-                </a:tc>
-                <a:extLst>
-                  <a:ext uri="{0D108BD9-81ED-4DB2-BD59-A6C34878D82A}">
-                    <a16:rowId xmlns:a16="http://schemas.microsoft.com/office/drawing/2014/main" val="4068177151"/>
-                  </a:ext>
-                </a:extLst>
-              </a:tr>
-              <a:tr h="733067">
-                <a:tc>
-                  <a:txBody>
-                    <a:bodyPr/>
-                    <a:lstStyle/>
-                    <a:p>
-                      <a:pPr algn="l"/>
-                      <a:r>
-                        <a:rPr lang="ru-RU" sz="1300" b="1">
-                          <a:effectLst/>
-                        </a:rPr>
-                        <a:t>Таблица коммутатора</a:t>
-                      </a:r>
-                    </a:p>
-                  </a:txBody>
-                  <a:tcPr marL="70552" marR="70552" marT="35276" marB="35276" anchor="ctr">
-                    <a:lnL w="12700" cap="flat" cmpd="sng" algn="ctr">
-                      <a:solidFill>
-                        <a:schemeClr val="tx1"/>
-                      </a:solidFill>
-                      <a:prstDash val="solid"/>
-                      <a:round/>
-                      <a:headEnd type="none" w="med" len="med"/>
-                      <a:tailEnd type="none" w="med" len="med"/>
-                    </a:lnL>
-                    <a:lnR w="12700" cap="flat" cmpd="sng" algn="ctr">
-                      <a:solidFill>
-                        <a:schemeClr val="tx1"/>
-                      </a:solidFill>
-                      <a:prstDash val="solid"/>
-                      <a:round/>
-                      <a:headEnd type="none" w="med" len="med"/>
-                      <a:tailEnd type="none" w="med" len="med"/>
-                    </a:lnR>
-                    <a:lnT w="12700" cap="flat" cmpd="sng" algn="ctr">
-                      <a:solidFill>
-                        <a:schemeClr val="tx1"/>
-                      </a:solidFill>
-                      <a:prstDash val="solid"/>
-                      <a:round/>
-                      <a:headEnd type="none" w="med" len="med"/>
-                      <a:tailEnd type="none" w="med" len="med"/>
-                    </a:lnT>
-                    <a:lnB w="12700" cap="flat" cmpd="sng" algn="ctr">
-                      <a:solidFill>
-                        <a:schemeClr val="tx1"/>
-                      </a:solidFill>
-                      <a:prstDash val="solid"/>
-                      <a:round/>
-                      <a:headEnd type="none" w="med" len="med"/>
-                      <a:tailEnd type="none" w="med" len="med"/>
-                    </a:lnB>
-                  </a:tcPr>
-                </a:tc>
-                <a:tc>
-                  <a:txBody>
-                    <a:bodyPr/>
-                    <a:lstStyle/>
-                    <a:p>
-                      <a:pPr algn="l"/>
-                      <a:r>
-                        <a:rPr lang="ru-RU" sz="1300" b="1" dirty="0">
-                          <a:effectLst/>
-                        </a:rPr>
-                        <a:t>Таблица коммутации: [Адрес назначения → Порт]</a:t>
-                      </a:r>
-                    </a:p>
-                  </a:txBody>
-                  <a:tcPr marL="70552" marR="70552" marT="35276" marB="35276" anchor="ctr">
-                    <a:lnL w="12700" cap="flat" cmpd="sng" algn="ctr">
-                      <a:solidFill>
-                        <a:schemeClr val="tx1"/>
-                      </a:solidFill>
-                      <a:prstDash val="solid"/>
-                      <a:round/>
-                      <a:headEnd type="none" w="med" len="med"/>
-                      <a:tailEnd type="none" w="med" len="med"/>
-                    </a:lnL>
-                    <a:lnR w="12700" cap="flat" cmpd="sng" algn="ctr">
-                      <a:solidFill>
-                        <a:schemeClr val="tx1"/>
-                      </a:solidFill>
-                      <a:prstDash val="solid"/>
-                      <a:round/>
-                      <a:headEnd type="none" w="med" len="med"/>
-                      <a:tailEnd type="none" w="med" len="med"/>
-                    </a:lnR>
-                    <a:lnT w="12700" cap="flat" cmpd="sng" algn="ctr">
-                      <a:solidFill>
-                        <a:schemeClr val="tx1"/>
-                      </a:solidFill>
-                      <a:prstDash val="solid"/>
-                      <a:round/>
-                      <a:headEnd type="none" w="med" len="med"/>
-                      <a:tailEnd type="none" w="med" len="med"/>
-                    </a:lnT>
-                    <a:lnB w="12700" cap="flat" cmpd="sng" algn="ctr">
-                      <a:solidFill>
-                        <a:schemeClr val="tx1"/>
-                      </a:solidFill>
-                      <a:prstDash val="solid"/>
-                      <a:round/>
-                      <a:headEnd type="none" w="med" len="med"/>
-                      <a:tailEnd type="none" w="med" len="med"/>
-                    </a:lnB>
-                  </a:tcPr>
-                </a:tc>
-                <a:tc>
-                  <a:txBody>
-                    <a:bodyPr/>
-                    <a:lstStyle/>
-                    <a:p>
-                      <a:pPr algn="l"/>
-                      <a:r>
-                        <a:rPr lang="ru-RU" sz="1300" b="1">
-                          <a:effectLst/>
-                        </a:rPr>
-                        <a:t>Таблица VC: [Порт вх., VCI вх. → Порт вых., VCI вых.]</a:t>
-                      </a:r>
-                    </a:p>
-                  </a:txBody>
-                  <a:tcPr marL="70552" marR="70552" marT="35276" marB="35276" anchor="ctr">
-                    <a:lnL w="12700" cap="flat" cmpd="sng" algn="ctr">
-                      <a:solidFill>
-                        <a:schemeClr val="tx1"/>
-                      </a:solidFill>
-                      <a:prstDash val="solid"/>
-                      <a:round/>
-                      <a:headEnd type="none" w="med" len="med"/>
-                      <a:tailEnd type="none" w="med" len="med"/>
-                    </a:lnL>
-                    <a:lnR w="12700" cap="flat" cmpd="sng" algn="ctr">
-                      <a:solidFill>
-                        <a:schemeClr val="tx1"/>
-                      </a:solidFill>
-                      <a:prstDash val="solid"/>
-                      <a:round/>
-                      <a:headEnd type="none" w="med" len="med"/>
-                      <a:tailEnd type="none" w="med" len="med"/>
-                    </a:lnR>
-                    <a:lnT w="12700" cap="flat" cmpd="sng" algn="ctr">
-                      <a:solidFill>
-                        <a:schemeClr val="tx1"/>
-                      </a:solidFill>
-                      <a:prstDash val="solid"/>
-                      <a:round/>
-                      <a:headEnd type="none" w="med" len="med"/>
-                      <a:tailEnd type="none" w="med" len="med"/>
-                    </a:lnT>
-                    <a:lnB w="12700" cap="flat" cmpd="sng" algn="ctr">
-                      <a:solidFill>
-                        <a:schemeClr val="tx1"/>
-                      </a:solidFill>
-                      <a:prstDash val="solid"/>
-                      <a:round/>
-                      <a:headEnd type="none" w="med" len="med"/>
-                      <a:tailEnd type="none" w="med" len="med"/>
-                    </a:lnB>
-                  </a:tcPr>
-                </a:tc>
-                <a:extLst>
-                  <a:ext uri="{0D108BD9-81ED-4DB2-BD59-A6C34878D82A}">
-                    <a16:rowId xmlns:a16="http://schemas.microsoft.com/office/drawing/2014/main" val="191536145"/>
-                  </a:ext>
-                </a:extLst>
-              </a:tr>
-              <a:tr h="1045380">
-                <a:tc>
-                  <a:txBody>
-                    <a:bodyPr/>
-                    <a:lstStyle/>
-                    <a:p>
-                      <a:pPr algn="l"/>
-                      <a:r>
-                        <a:rPr lang="ru-RU" sz="1300" b="1">
-                          <a:effectLst/>
-                        </a:rPr>
-                        <a:t>Маршрут пакетов/кадров</a:t>
-                      </a:r>
-                    </a:p>
-                  </a:txBody>
-                  <a:tcPr marL="70552" marR="70552" marT="35276" marB="35276" anchor="ctr">
-                    <a:lnL w="12700" cap="flat" cmpd="sng" algn="ctr">
-                      <a:solidFill>
-                        <a:schemeClr val="tx1"/>
-                      </a:solidFill>
-                      <a:prstDash val="solid"/>
-                      <a:round/>
-                      <a:headEnd type="none" w="med" len="med"/>
-                      <a:tailEnd type="none" w="med" len="med"/>
-                    </a:lnL>
-                    <a:lnR w="12700" cap="flat" cmpd="sng" algn="ctr">
-                      <a:solidFill>
-                        <a:schemeClr val="tx1"/>
-                      </a:solidFill>
-                      <a:prstDash val="solid"/>
-                      <a:round/>
-                      <a:headEnd type="none" w="med" len="med"/>
-                      <a:tailEnd type="none" w="med" len="med"/>
-                    </a:lnR>
-                    <a:lnT w="12700" cap="flat" cmpd="sng" algn="ctr">
-                      <a:solidFill>
-                        <a:schemeClr val="tx1"/>
-                      </a:solidFill>
-                      <a:prstDash val="solid"/>
-                      <a:round/>
-                      <a:headEnd type="none" w="med" len="med"/>
-                      <a:tailEnd type="none" w="med" len="med"/>
-                    </a:lnT>
-                    <a:lnB w="12700" cap="flat" cmpd="sng" algn="ctr">
-                      <a:solidFill>
-                        <a:schemeClr val="tx1"/>
-                      </a:solidFill>
-                      <a:prstDash val="solid"/>
-                      <a:round/>
-                      <a:headEnd type="none" w="med" len="med"/>
-                      <a:tailEnd type="none" w="med" len="med"/>
-                    </a:lnB>
-                  </a:tcPr>
-                </a:tc>
-                <a:tc>
-                  <a:txBody>
-                    <a:bodyPr/>
-                    <a:lstStyle/>
-                    <a:p>
-                      <a:pPr algn="l"/>
-                      <a:r>
-                        <a:rPr lang="ru-RU" sz="1300" b="1" dirty="0">
-                          <a:effectLst/>
-                        </a:rPr>
-                        <a:t>Каждый кадр маршрутизируется независимо (пути могут различаться)</a:t>
-                      </a:r>
-                    </a:p>
-                  </a:txBody>
-                  <a:tcPr marL="70552" marR="70552" marT="35276" marB="35276" anchor="ctr">
-                    <a:lnL w="12700" cap="flat" cmpd="sng" algn="ctr">
-                      <a:solidFill>
-                        <a:schemeClr val="tx1"/>
-                      </a:solidFill>
-                      <a:prstDash val="solid"/>
-                      <a:round/>
-                      <a:headEnd type="none" w="med" len="med"/>
-                      <a:tailEnd type="none" w="med" len="med"/>
-                    </a:lnL>
-                    <a:lnR w="12700" cap="flat" cmpd="sng" algn="ctr">
-                      <a:solidFill>
-                        <a:schemeClr val="tx1"/>
-                      </a:solidFill>
-                      <a:prstDash val="solid"/>
-                      <a:round/>
-                      <a:headEnd type="none" w="med" len="med"/>
-                      <a:tailEnd type="none" w="med" len="med"/>
-                    </a:lnR>
-                    <a:lnT w="12700" cap="flat" cmpd="sng" algn="ctr">
-                      <a:solidFill>
-                        <a:schemeClr val="tx1"/>
-                      </a:solidFill>
-                      <a:prstDash val="solid"/>
-                      <a:round/>
-                      <a:headEnd type="none" w="med" len="med"/>
-                      <a:tailEnd type="none" w="med" len="med"/>
-                    </a:lnT>
-                    <a:lnB w="12700" cap="flat" cmpd="sng" algn="ctr">
-                      <a:solidFill>
-                        <a:schemeClr val="tx1"/>
-                      </a:solidFill>
-                      <a:prstDash val="solid"/>
-                      <a:round/>
-                      <a:headEnd type="none" w="med" len="med"/>
-                      <a:tailEnd type="none" w="med" len="med"/>
-                    </a:lnB>
-                  </a:tcPr>
-                </a:tc>
-                <a:tc>
-                  <a:txBody>
-                    <a:bodyPr/>
-                    <a:lstStyle/>
-                    <a:p>
-                      <a:pPr algn="l"/>
-                      <a:r>
-                        <a:rPr lang="ru-RU" sz="1300" b="1" dirty="0">
-                          <a:effectLst/>
-                        </a:rPr>
-                        <a:t>Все кадры одного соединения строго идут по заданному пути</a:t>
-                      </a:r>
-                    </a:p>
-                  </a:txBody>
-                  <a:tcPr marL="70552" marR="70552" marT="35276" marB="35276" anchor="ctr">
-                    <a:lnL w="12700" cap="flat" cmpd="sng" algn="ctr">
-                      <a:solidFill>
-                        <a:schemeClr val="tx1"/>
-                      </a:solidFill>
-                      <a:prstDash val="solid"/>
-                      <a:round/>
-                      <a:headEnd type="none" w="med" len="med"/>
-                      <a:tailEnd type="none" w="med" len="med"/>
-                    </a:lnL>
-                    <a:lnR w="12700" cap="flat" cmpd="sng" algn="ctr">
-                      <a:solidFill>
-                        <a:schemeClr val="tx1"/>
-                      </a:solidFill>
-                      <a:prstDash val="solid"/>
-                      <a:round/>
-                      <a:headEnd type="none" w="med" len="med"/>
-                      <a:tailEnd type="none" w="med" len="med"/>
-                    </a:lnR>
-                    <a:lnT w="12700" cap="flat" cmpd="sng" algn="ctr">
-                      <a:solidFill>
-                        <a:schemeClr val="tx1"/>
-                      </a:solidFill>
-                      <a:prstDash val="solid"/>
-                      <a:round/>
-                      <a:headEnd type="none" w="med" len="med"/>
-                      <a:tailEnd type="none" w="med" len="med"/>
-                    </a:lnT>
-                    <a:lnB w="12700" cap="flat" cmpd="sng" algn="ctr">
-                      <a:solidFill>
-                        <a:schemeClr val="tx1"/>
-                      </a:solidFill>
-                      <a:prstDash val="solid"/>
-                      <a:round/>
-                      <a:headEnd type="none" w="med" len="med"/>
-                      <a:tailEnd type="none" w="med" len="med"/>
-                    </a:lnB>
-                  </a:tcPr>
-                </a:tc>
-                <a:extLst>
-                  <a:ext uri="{0D108BD9-81ED-4DB2-BD59-A6C34878D82A}">
-                    <a16:rowId xmlns:a16="http://schemas.microsoft.com/office/drawing/2014/main" val="697335990"/>
-                  </a:ext>
-                </a:extLst>
-              </a:tr>
-              <a:tr h="1045380">
-                <a:tc>
-                  <a:txBody>
-                    <a:bodyPr/>
-                    <a:lstStyle/>
-                    <a:p>
-                      <a:pPr algn="l"/>
-                      <a:r>
-                        <a:rPr lang="ru-RU" sz="1300" b="1">
-                          <a:effectLst/>
-                        </a:rPr>
-                        <a:t>Устойчивость к сбоям</a:t>
-                      </a:r>
-                    </a:p>
-                  </a:txBody>
-                  <a:tcPr marL="70552" marR="70552" marT="35276" marB="35276" anchor="ctr">
-                    <a:lnL w="12700" cap="flat" cmpd="sng" algn="ctr">
-                      <a:solidFill>
-                        <a:schemeClr val="tx1"/>
-                      </a:solidFill>
-                      <a:prstDash val="solid"/>
-                      <a:round/>
-                      <a:headEnd type="none" w="med" len="med"/>
-                      <a:tailEnd type="none" w="med" len="med"/>
-                    </a:lnL>
-                    <a:lnR w="12700" cap="flat" cmpd="sng" algn="ctr">
-                      <a:solidFill>
-                        <a:schemeClr val="tx1"/>
-                      </a:solidFill>
-                      <a:prstDash val="solid"/>
-                      <a:round/>
-                      <a:headEnd type="none" w="med" len="med"/>
-                      <a:tailEnd type="none" w="med" len="med"/>
-                    </a:lnR>
-                    <a:lnT w="12700" cap="flat" cmpd="sng" algn="ctr">
-                      <a:solidFill>
-                        <a:schemeClr val="tx1"/>
-                      </a:solidFill>
-                      <a:prstDash val="solid"/>
-                      <a:round/>
-                      <a:headEnd type="none" w="med" len="med"/>
-                      <a:tailEnd type="none" w="med" len="med"/>
-                    </a:lnT>
-                    <a:lnB w="12700" cap="flat" cmpd="sng" algn="ctr">
-                      <a:solidFill>
-                        <a:schemeClr val="tx1"/>
-                      </a:solidFill>
-                      <a:prstDash val="solid"/>
-                      <a:round/>
-                      <a:headEnd type="none" w="med" len="med"/>
-                      <a:tailEnd type="none" w="med" len="med"/>
-                    </a:lnB>
-                  </a:tcPr>
-                </a:tc>
-                <a:tc>
-                  <a:txBody>
-                    <a:bodyPr/>
-                    <a:lstStyle/>
-                    <a:p>
-                      <a:pPr algn="l"/>
-                      <a:r>
-                        <a:rPr lang="ru-RU" sz="1300" b="1">
-                          <a:effectLst/>
-                        </a:rPr>
-                        <a:t>Высокая (динамическая перемаршрутизация при сбое узла/канала)</a:t>
-                      </a:r>
-                    </a:p>
-                  </a:txBody>
-                  <a:tcPr marL="70552" marR="70552" marT="35276" marB="35276" anchor="ctr">
-                    <a:lnL w="12700" cap="flat" cmpd="sng" algn="ctr">
-                      <a:solidFill>
-                        <a:schemeClr val="tx1"/>
-                      </a:solidFill>
-                      <a:prstDash val="solid"/>
-                      <a:round/>
-                      <a:headEnd type="none" w="med" len="med"/>
-                      <a:tailEnd type="none" w="med" len="med"/>
-                    </a:lnL>
-                    <a:lnR w="12700" cap="flat" cmpd="sng" algn="ctr">
-                      <a:solidFill>
-                        <a:schemeClr val="tx1"/>
-                      </a:solidFill>
-                      <a:prstDash val="solid"/>
-                      <a:round/>
-                      <a:headEnd type="none" w="med" len="med"/>
-                      <a:tailEnd type="none" w="med" len="med"/>
-                    </a:lnR>
-                    <a:lnT w="12700" cap="flat" cmpd="sng" algn="ctr">
-                      <a:solidFill>
-                        <a:schemeClr val="tx1"/>
-                      </a:solidFill>
-                      <a:prstDash val="solid"/>
-                      <a:round/>
-                      <a:headEnd type="none" w="med" len="med"/>
-                      <a:tailEnd type="none" w="med" len="med"/>
-                    </a:lnT>
-                    <a:lnB w="12700" cap="flat" cmpd="sng" algn="ctr">
-                      <a:solidFill>
-                        <a:schemeClr val="tx1"/>
-                      </a:solidFill>
-                      <a:prstDash val="solid"/>
-                      <a:round/>
-                      <a:headEnd type="none" w="med" len="med"/>
-                      <a:tailEnd type="none" w="med" len="med"/>
-                    </a:lnB>
-                  </a:tcPr>
-                </a:tc>
-                <a:tc>
-                  <a:txBody>
-                    <a:bodyPr/>
-                    <a:lstStyle/>
-                    <a:p>
-                      <a:pPr algn="l"/>
-                      <a:r>
-                        <a:rPr lang="ru-RU" sz="1300" b="1" dirty="0">
-                          <a:effectLst/>
-                        </a:rPr>
-                        <a:t>Требуется полное </a:t>
-                      </a:r>
-                      <a:r>
-                        <a:rPr lang="ru-RU" sz="1300" b="1" dirty="0" err="1">
-                          <a:effectLst/>
-                        </a:rPr>
-                        <a:t>переустановление</a:t>
-                      </a:r>
-                      <a:r>
-                        <a:rPr lang="ru-RU" sz="1300" b="1" dirty="0">
-                          <a:effectLst/>
-                        </a:rPr>
-                        <a:t> виртуального канала при сбое</a:t>
-                      </a:r>
-                    </a:p>
-                  </a:txBody>
-                  <a:tcPr marL="70552" marR="70552" marT="35276" marB="35276" anchor="ctr">
-                    <a:lnL w="12700" cap="flat" cmpd="sng" algn="ctr">
-                      <a:solidFill>
-                        <a:schemeClr val="tx1"/>
-                      </a:solidFill>
-                      <a:prstDash val="solid"/>
-                      <a:round/>
-                      <a:headEnd type="none" w="med" len="med"/>
-                      <a:tailEnd type="none" w="med" len="med"/>
-                    </a:lnL>
-                    <a:lnR w="12700" cap="flat" cmpd="sng" algn="ctr">
-                      <a:solidFill>
-                        <a:schemeClr val="tx1"/>
-                      </a:solidFill>
-                      <a:prstDash val="solid"/>
-                      <a:round/>
-                      <a:headEnd type="none" w="med" len="med"/>
-                      <a:tailEnd type="none" w="med" len="med"/>
-                    </a:lnR>
-                    <a:lnT w="12700" cap="flat" cmpd="sng" algn="ctr">
-                      <a:solidFill>
-                        <a:schemeClr val="tx1"/>
-                      </a:solidFill>
-                      <a:prstDash val="solid"/>
-                      <a:round/>
-                      <a:headEnd type="none" w="med" len="med"/>
-                      <a:tailEnd type="none" w="med" len="med"/>
-                    </a:lnT>
-                    <a:lnB w="12700" cap="flat" cmpd="sng" algn="ctr">
-                      <a:solidFill>
-                        <a:schemeClr val="tx1"/>
-                      </a:solidFill>
-                      <a:prstDash val="solid"/>
-                      <a:round/>
-                      <a:headEnd type="none" w="med" len="med"/>
-                      <a:tailEnd type="none" w="med" len="med"/>
-                    </a:lnB>
-                  </a:tcPr>
-                </a:tc>
-                <a:extLst>
-                  <a:ext uri="{0D108BD9-81ED-4DB2-BD59-A6C34878D82A}">
-                    <a16:rowId xmlns:a16="http://schemas.microsoft.com/office/drawing/2014/main" val="996016214"/>
-                  </a:ext>
-                </a:extLst>
-              </a:tr>
-              <a:tr h="420754">
-                <a:tc>
-                  <a:txBody>
-                    <a:bodyPr/>
-                    <a:lstStyle/>
-                    <a:p>
-                      <a:pPr algn="l"/>
-                      <a:r>
-                        <a:rPr lang="ru-RU" sz="1300" b="1">
-                          <a:effectLst/>
-                        </a:rPr>
-                        <a:t>Примеры технологий</a:t>
-                      </a:r>
-                    </a:p>
-                  </a:txBody>
-                  <a:tcPr marL="70552" marR="70552" marT="35276" marB="35276" anchor="ctr">
-                    <a:lnL w="12700" cap="flat" cmpd="sng" algn="ctr">
-                      <a:solidFill>
-                        <a:schemeClr val="tx1"/>
-                      </a:solidFill>
-                      <a:prstDash val="solid"/>
-                      <a:round/>
-                      <a:headEnd type="none" w="med" len="med"/>
-                      <a:tailEnd type="none" w="med" len="med"/>
-                    </a:lnL>
-                    <a:lnR w="12700" cap="flat" cmpd="sng" algn="ctr">
-                      <a:solidFill>
-                        <a:schemeClr val="tx1"/>
-                      </a:solidFill>
-                      <a:prstDash val="solid"/>
-                      <a:round/>
-                      <a:headEnd type="none" w="med" len="med"/>
-                      <a:tailEnd type="none" w="med" len="med"/>
-                    </a:lnR>
-                    <a:lnT w="12700" cap="flat" cmpd="sng" algn="ctr">
-                      <a:solidFill>
-                        <a:schemeClr val="tx1"/>
-                      </a:solidFill>
-                      <a:prstDash val="solid"/>
-                      <a:round/>
-                      <a:headEnd type="none" w="med" len="med"/>
-                      <a:tailEnd type="none" w="med" len="med"/>
-                    </a:lnT>
-                    <a:lnB w="12700" cap="flat" cmpd="sng" algn="ctr">
-                      <a:solidFill>
-                        <a:schemeClr val="tx1"/>
-                      </a:solidFill>
-                      <a:prstDash val="solid"/>
-                      <a:round/>
-                      <a:headEnd type="none" w="med" len="med"/>
-                      <a:tailEnd type="none" w="med" len="med"/>
-                    </a:lnB>
-                  </a:tcPr>
-                </a:tc>
-                <a:tc>
-                  <a:txBody>
-                    <a:bodyPr/>
-                    <a:lstStyle/>
-                    <a:p>
-                      <a:pPr algn="l"/>
-                      <a:r>
-                        <a:rPr lang="af-ZA" sz="1300" b="1">
-                          <a:effectLst/>
-                        </a:rPr>
-                        <a:t>Ethernet, IP</a:t>
-                      </a:r>
-                    </a:p>
-                  </a:txBody>
-                  <a:tcPr marL="70552" marR="70552" marT="35276" marB="35276" anchor="ctr">
-                    <a:lnL w="12700" cap="flat" cmpd="sng" algn="ctr">
-                      <a:solidFill>
-                        <a:schemeClr val="tx1"/>
-                      </a:solidFill>
-                      <a:prstDash val="solid"/>
-                      <a:round/>
-                      <a:headEnd type="none" w="med" len="med"/>
-                      <a:tailEnd type="none" w="med" len="med"/>
-                    </a:lnL>
-                    <a:lnR w="12700" cap="flat" cmpd="sng" algn="ctr">
-                      <a:solidFill>
-                        <a:schemeClr val="tx1"/>
-                      </a:solidFill>
-                      <a:prstDash val="solid"/>
-                      <a:round/>
-                      <a:headEnd type="none" w="med" len="med"/>
-                      <a:tailEnd type="none" w="med" len="med"/>
-                    </a:lnR>
-                    <a:lnT w="12700" cap="flat" cmpd="sng" algn="ctr">
-                      <a:solidFill>
-                        <a:schemeClr val="tx1"/>
-                      </a:solidFill>
-                      <a:prstDash val="solid"/>
-                      <a:round/>
-                      <a:headEnd type="none" w="med" len="med"/>
-                      <a:tailEnd type="none" w="med" len="med"/>
-                    </a:lnT>
-                    <a:lnB w="12700" cap="flat" cmpd="sng" algn="ctr">
-                      <a:solidFill>
-                        <a:schemeClr val="tx1"/>
-                      </a:solidFill>
-                      <a:prstDash val="solid"/>
-                      <a:round/>
-                      <a:headEnd type="none" w="med" len="med"/>
-                      <a:tailEnd type="none" w="med" len="med"/>
-                    </a:lnB>
-                  </a:tcPr>
-                </a:tc>
-                <a:tc>
-                  <a:txBody>
-                    <a:bodyPr/>
-                    <a:lstStyle/>
-                    <a:p>
-                      <a:pPr algn="l"/>
-                      <a:r>
-                        <a:rPr lang="af-ZA" sz="1300" b="1" dirty="0">
-                          <a:effectLst/>
-                        </a:rPr>
-                        <a:t>ATM, Frame Relay, X.25, MPLS</a:t>
-                      </a:r>
-                    </a:p>
-                  </a:txBody>
-                  <a:tcPr marL="70552" marR="70552" marT="35276" marB="35276" anchor="ctr">
-                    <a:lnL w="12700" cap="flat" cmpd="sng" algn="ctr">
-                      <a:solidFill>
-                        <a:schemeClr val="tx1"/>
-                      </a:solidFill>
-                      <a:prstDash val="solid"/>
-                      <a:round/>
-                      <a:headEnd type="none" w="med" len="med"/>
-                      <a:tailEnd type="none" w="med" len="med"/>
-                    </a:lnL>
-                    <a:lnR w="12700" cap="flat" cmpd="sng" algn="ctr">
-                      <a:solidFill>
-                        <a:schemeClr val="tx1"/>
-                      </a:solidFill>
-                      <a:prstDash val="solid"/>
-                      <a:round/>
-                      <a:headEnd type="none" w="med" len="med"/>
-                      <a:tailEnd type="none" w="med" len="med"/>
-                    </a:lnR>
-                    <a:lnT w="12700" cap="flat" cmpd="sng" algn="ctr">
-                      <a:solidFill>
-                        <a:schemeClr val="tx1"/>
-                      </a:solidFill>
-                      <a:prstDash val="solid"/>
-                      <a:round/>
-                      <a:headEnd type="none" w="med" len="med"/>
-                      <a:tailEnd type="none" w="med" len="med"/>
-                    </a:lnT>
-                    <a:lnB w="12700" cap="flat" cmpd="sng" algn="ctr">
-                      <a:solidFill>
-                        <a:schemeClr val="tx1"/>
-                      </a:solidFill>
-                      <a:prstDash val="solid"/>
-                      <a:round/>
-                      <a:headEnd type="none" w="med" len="med"/>
-                      <a:tailEnd type="none" w="med" len="med"/>
-                    </a:lnB>
-                  </a:tcPr>
-                </a:tc>
-                <a:extLst>
-                  <a:ext uri="{0D108BD9-81ED-4DB2-BD59-A6C34878D82A}">
-                    <a16:rowId xmlns:a16="http://schemas.microsoft.com/office/drawing/2014/main" val="2921308919"/>
-                  </a:ext>
-                </a:extLst>
-              </a:tr>
-            </a:tbl>
-          </a:graphicData>
-        </a:graphic>
-      </p:graphicFrame>
+        </p:nvSpPr>
+        <p:spPr/>
+        <p:txBody>
+          <a:bodyPr/>
+          <a:lstStyle/>
+          <a:p>
+            <a:r>
+              <a:rPr lang="ru-RU" b="1" dirty="0"/>
+              <a:t>Сети виртуальных каналов (</a:t>
+            </a:r>
+            <a:r>
+              <a:rPr lang="af-ZA" b="1" dirty="0"/>
+              <a:t>VC</a:t>
+            </a:r>
+            <a:r>
+              <a:rPr lang="af-ZA" b="1" dirty="0" smtClean="0"/>
+              <a:t>)</a:t>
+            </a:r>
+            <a:endParaRPr lang="ru-RU" dirty="0"/>
+          </a:p>
+        </p:txBody>
+      </p:sp>
+      <p:sp>
+        <p:nvSpPr>
+          <p:cNvPr id="3" name="Объект 2"/>
+          <p:cNvSpPr>
+            <a:spLocks noGrp="1"/>
+          </p:cNvSpPr>
+          <p:nvPr>
+            <p:ph idx="1"/>
+          </p:nvPr>
+        </p:nvSpPr>
+        <p:spPr/>
+        <p:txBody>
+          <a:bodyPr/>
+          <a:lstStyle/>
+          <a:p>
+            <a:r>
+              <a:rPr lang="ru-RU" b="1" dirty="0"/>
+              <a:t>2</a:t>
+            </a:r>
+            <a:r>
+              <a:rPr lang="ru-RU" b="1" dirty="0" smtClean="0"/>
+              <a:t> </a:t>
+            </a:r>
+            <a:r>
+              <a:rPr lang="ru-RU" b="1" dirty="0"/>
+              <a:t>фазы работы:</a:t>
+            </a:r>
+            <a:endParaRPr lang="ru-RU" dirty="0"/>
+          </a:p>
+          <a:p>
+            <a:pPr lvl="1"/>
+            <a:r>
+              <a:rPr lang="ru-RU" i="1" dirty="0" err="1"/>
+              <a:t>Setup</a:t>
+            </a:r>
+            <a:r>
+              <a:rPr lang="ru-RU" i="1" dirty="0"/>
+              <a:t>:</a:t>
+            </a:r>
+            <a:r>
+              <a:rPr lang="ru-RU" dirty="0"/>
+              <a:t> построение сквозного пути и заполнение таблиц VC.</a:t>
+            </a:r>
+          </a:p>
+          <a:p>
+            <a:pPr lvl="1"/>
+            <a:r>
+              <a:rPr lang="ru-RU" i="1" dirty="0" err="1"/>
+              <a:t>Data</a:t>
+            </a:r>
+            <a:r>
+              <a:rPr lang="ru-RU" i="1" dirty="0"/>
+              <a:t>:</a:t>
+            </a:r>
+            <a:r>
+              <a:rPr lang="ru-RU" dirty="0"/>
+              <a:t> передача кадров по созданному каналу.</a:t>
+            </a:r>
+          </a:p>
+          <a:p>
+            <a:r>
+              <a:rPr lang="ru-RU" b="1" dirty="0" smtClean="0"/>
+              <a:t>Концепция </a:t>
+            </a:r>
+            <a:r>
+              <a:rPr lang="ru-RU" b="1" dirty="0"/>
+              <a:t>VCI (</a:t>
+            </a:r>
+            <a:r>
+              <a:rPr lang="ru-RU" b="1" dirty="0" err="1"/>
+              <a:t>Virtual</a:t>
+            </a:r>
+            <a:r>
+              <a:rPr lang="ru-RU" b="1" dirty="0"/>
+              <a:t> </a:t>
+            </a:r>
+            <a:r>
+              <a:rPr lang="ru-RU" b="1" dirty="0" err="1"/>
+              <a:t>Circuit</a:t>
+            </a:r>
+            <a:r>
+              <a:rPr lang="ru-RU" b="1" dirty="0"/>
+              <a:t> </a:t>
+            </a:r>
+            <a:r>
+              <a:rPr lang="ru-RU" b="1" dirty="0" err="1"/>
+              <a:t>Identifier</a:t>
+            </a:r>
+            <a:r>
+              <a:rPr lang="ru-RU" b="1" dirty="0"/>
+              <a:t>):</a:t>
+            </a:r>
+            <a:endParaRPr lang="ru-RU" dirty="0"/>
+          </a:p>
+          <a:p>
+            <a:pPr lvl="1"/>
+            <a:r>
+              <a:rPr lang="ru-RU" dirty="0"/>
+              <a:t>VCI имеет </a:t>
+            </a:r>
+            <a:r>
+              <a:rPr lang="ru-RU" b="1" dirty="0"/>
+              <a:t>локальное значение</a:t>
+            </a:r>
+            <a:r>
+              <a:rPr lang="ru-RU" dirty="0"/>
+              <a:t> (не глобальное!).</a:t>
+            </a:r>
+          </a:p>
+          <a:p>
+            <a:pPr lvl="1"/>
+            <a:r>
+              <a:rPr lang="ru-RU" dirty="0"/>
+              <a:t>Коммутатор заменяет входящий VCI на исходящий при передаче (</a:t>
+            </a:r>
+            <a:r>
+              <a:rPr lang="ru-RU" dirty="0" err="1"/>
+              <a:t>Label</a:t>
+            </a:r>
+            <a:r>
+              <a:rPr lang="ru-RU" dirty="0"/>
+              <a:t> </a:t>
+            </a:r>
+            <a:r>
+              <a:rPr lang="ru-RU" dirty="0" err="1"/>
+              <a:t>Switching</a:t>
+            </a:r>
+            <a:r>
+              <a:rPr lang="ru-RU" dirty="0" smtClean="0"/>
+              <a:t>).</a:t>
+            </a:r>
+            <a:endParaRPr lang="ru-RU" dirty="0"/>
+          </a:p>
+        </p:txBody>
+      </p:sp>
     </p:spTree>
     <p:extLst>
       <p:ext uri="{BB962C8B-B14F-4D97-AF65-F5344CB8AC3E}">
-        <p14:creationId xmlns:p14="http://schemas.microsoft.com/office/powerpoint/2010/main" val="3792789440"/>
+        <p14:creationId xmlns:p14="http://schemas.microsoft.com/office/powerpoint/2010/main" val="1300332924"/>
       </p:ext>
     </p:extLst>
   </p:cSld>
